--- a/exports/pptx/lessons/middle-module-10-herbs-aushadhi/day-03-nimba.pptx
+++ b/exports/pptx/lessons/middle-module-10-herbs-aushadhi/day-03-nimba.pptx
@@ -17,9 +17,17 @@
     <p:sldId id="265" r:id="rId11"/>
     <p:sldId id="266" r:id="rId12"/>
     <p:sldId id="267" r:id="rId13"/>
+    <p:sldId id="268" r:id="rId14"/>
+    <p:sldId id="269" r:id="rId15"/>
+    <p:sldId id="270" r:id="rId16"/>
+    <p:sldId id="271" r:id="rId17"/>
+    <p:sldId id="272" r:id="rId18"/>
+    <p:sldId id="273" r:id="rId19"/>
+    <p:sldId id="274" r:id="rId20"/>
+    <p:sldId id="275" r:id="rId21"/>
   </p:sldIdLst>
   <p:notesMasterIdLst>
-    <p:notesMasterId r:id="rId14"/>
+    <p:notesMasterId r:id="rId22"/>
   </p:notesMasterIdLst>
   <p:sldSz cx="9144000" cy="5143500"/>
   <p:notesSz cx="5143500" cy="9144000"/>
@@ -819,6 +827,622 @@
 </p:notes>
 </file>
 
+<file path=ppt/notesSlides/notesSlide13.xml><?xml version="1.0" encoding="utf-8"?>
+<p:notes xmlns:a="http://schemas.openxmlformats.org/drawingml/2006/main" xmlns:r="http://schemas.openxmlformats.org/officeDocument/2006/relationships" xmlns:p="http://schemas.openxmlformats.org/presentationml/2006/main">
+  <p:cSld>
+    <p:spTree>
+      <p:nvGrpSpPr>
+        <p:cNvPr id="1" name=""/>
+        <p:cNvGrpSpPr/>
+        <p:nvPr/>
+      </p:nvGrpSpPr>
+      <p:grpSpPr>
+        <a:xfrm>
+          <a:off x="0" y="0"/>
+          <a:ext cx="0" cy="0"/>
+          <a:chOff x="0" y="0"/>
+          <a:chExt cx="0" cy="0"/>
+        </a:xfrm>
+      </p:grpSpPr>
+      <p:sp>
+        <p:nvSpPr>
+          <p:cNvPr id="2" name="Slide Image Placeholder 1"/>
+          <p:cNvSpPr>
+            <a:spLocks noGrp="1" noRot="1" noChangeAspect="1"/>
+          </p:cNvSpPr>
+          <p:nvPr>
+            <p:ph type="sldImg"/>
+          </p:nvPr>
+        </p:nvSpPr>
+        <p:spPr/>
+      </p:sp>
+      <p:sp>
+        <p:nvSpPr>
+          <p:cNvPr id="3" name="Notes Placeholder 2"/>
+          <p:cNvSpPr>
+            <a:spLocks noGrp="1"/>
+          </p:cNvSpPr>
+          <p:nvPr>
+            <p:ph type="body" idx="1"/>
+          </p:nvPr>
+        </p:nvSpPr>
+        <p:spPr/>
+        <p:txBody>
+          <a:bodyPr/>
+          <a:lstStyle/>
+          <a:p>
+            <a:r>
+              <a:rPr lang="en-US" dirty="0"/>
+              <a:t/>
+            </a:r>
+            <a:endParaRPr lang="en-US" dirty="0"/>
+          </a:p>
+        </p:txBody>
+      </p:sp>
+      <p:sp>
+        <p:nvSpPr>
+          <p:cNvPr id="4" name="Slide Number Placeholder 3"/>
+          <p:cNvSpPr>
+            <a:spLocks noGrp="1"/>
+          </p:cNvSpPr>
+          <p:nvPr>
+            <p:ph type="sldNum" sz="quarter" idx="10"/>
+          </p:nvPr>
+        </p:nvSpPr>
+        <p:spPr/>
+        <p:txBody>
+          <a:bodyPr/>
+          <a:lstStyle/>
+          <a:p>
+            <a:fld id="{F7021451-1387-4CA6-816F-3879F97B5CBC}" type="slidenum">
+              <a:rPr lang="en-US"/>
+              <a:t>13</a:t>
+            </a:fld>
+            <a:endParaRPr lang="en-US"/>
+          </a:p>
+        </p:txBody>
+      </p:sp>
+    </p:spTree>
+    <p:extLst>
+      <p:ext uri="{BB962C8B-B14F-4D97-AF65-F5344CB8AC3E}">
+        <p14:creationId xmlns:p14="http://schemas.microsoft.com/office/powerpoint/2010/main" val="1024086991"/>
+      </p:ext>
+    </p:extLst>
+  </p:cSld>
+  <p:clrMapOvr>
+    <a:masterClrMapping/>
+  </p:clrMapOvr>
+</p:notes>
+</file>
+
+<file path=ppt/notesSlides/notesSlide14.xml><?xml version="1.0" encoding="utf-8"?>
+<p:notes xmlns:a="http://schemas.openxmlformats.org/drawingml/2006/main" xmlns:r="http://schemas.openxmlformats.org/officeDocument/2006/relationships" xmlns:p="http://schemas.openxmlformats.org/presentationml/2006/main">
+  <p:cSld>
+    <p:spTree>
+      <p:nvGrpSpPr>
+        <p:cNvPr id="1" name=""/>
+        <p:cNvGrpSpPr/>
+        <p:nvPr/>
+      </p:nvGrpSpPr>
+      <p:grpSpPr>
+        <a:xfrm>
+          <a:off x="0" y="0"/>
+          <a:ext cx="0" cy="0"/>
+          <a:chOff x="0" y="0"/>
+          <a:chExt cx="0" cy="0"/>
+        </a:xfrm>
+      </p:grpSpPr>
+      <p:sp>
+        <p:nvSpPr>
+          <p:cNvPr id="2" name="Slide Image Placeholder 1"/>
+          <p:cNvSpPr>
+            <a:spLocks noGrp="1" noRot="1" noChangeAspect="1"/>
+          </p:cNvSpPr>
+          <p:nvPr>
+            <p:ph type="sldImg"/>
+          </p:nvPr>
+        </p:nvSpPr>
+        <p:spPr/>
+      </p:sp>
+      <p:sp>
+        <p:nvSpPr>
+          <p:cNvPr id="3" name="Notes Placeholder 2"/>
+          <p:cNvSpPr>
+            <a:spLocks noGrp="1"/>
+          </p:cNvSpPr>
+          <p:nvPr>
+            <p:ph type="body" idx="1"/>
+          </p:nvPr>
+        </p:nvSpPr>
+        <p:spPr/>
+        <p:txBody>
+          <a:bodyPr/>
+          <a:lstStyle/>
+          <a:p>
+            <a:r>
+              <a:rPr lang="en-US" dirty="0"/>
+              <a:t/>
+            </a:r>
+            <a:endParaRPr lang="en-US" dirty="0"/>
+          </a:p>
+        </p:txBody>
+      </p:sp>
+      <p:sp>
+        <p:nvSpPr>
+          <p:cNvPr id="4" name="Slide Number Placeholder 3"/>
+          <p:cNvSpPr>
+            <a:spLocks noGrp="1"/>
+          </p:cNvSpPr>
+          <p:nvPr>
+            <p:ph type="sldNum" sz="quarter" idx="10"/>
+          </p:nvPr>
+        </p:nvSpPr>
+        <p:spPr/>
+        <p:txBody>
+          <a:bodyPr/>
+          <a:lstStyle/>
+          <a:p>
+            <a:fld id="{F7021451-1387-4CA6-816F-3879F97B5CBC}" type="slidenum">
+              <a:rPr lang="en-US"/>
+              <a:t>14</a:t>
+            </a:fld>
+            <a:endParaRPr lang="en-US"/>
+          </a:p>
+        </p:txBody>
+      </p:sp>
+    </p:spTree>
+    <p:extLst>
+      <p:ext uri="{BB962C8B-B14F-4D97-AF65-F5344CB8AC3E}">
+        <p14:creationId xmlns:p14="http://schemas.microsoft.com/office/powerpoint/2010/main" val="1024086991"/>
+      </p:ext>
+    </p:extLst>
+  </p:cSld>
+  <p:clrMapOvr>
+    <a:masterClrMapping/>
+  </p:clrMapOvr>
+</p:notes>
+</file>
+
+<file path=ppt/notesSlides/notesSlide15.xml><?xml version="1.0" encoding="utf-8"?>
+<p:notes xmlns:a="http://schemas.openxmlformats.org/drawingml/2006/main" xmlns:r="http://schemas.openxmlformats.org/officeDocument/2006/relationships" xmlns:p="http://schemas.openxmlformats.org/presentationml/2006/main">
+  <p:cSld>
+    <p:spTree>
+      <p:nvGrpSpPr>
+        <p:cNvPr id="1" name=""/>
+        <p:cNvGrpSpPr/>
+        <p:nvPr/>
+      </p:nvGrpSpPr>
+      <p:grpSpPr>
+        <a:xfrm>
+          <a:off x="0" y="0"/>
+          <a:ext cx="0" cy="0"/>
+          <a:chOff x="0" y="0"/>
+          <a:chExt cx="0" cy="0"/>
+        </a:xfrm>
+      </p:grpSpPr>
+      <p:sp>
+        <p:nvSpPr>
+          <p:cNvPr id="2" name="Slide Image Placeholder 1"/>
+          <p:cNvSpPr>
+            <a:spLocks noGrp="1" noRot="1" noChangeAspect="1"/>
+          </p:cNvSpPr>
+          <p:nvPr>
+            <p:ph type="sldImg"/>
+          </p:nvPr>
+        </p:nvSpPr>
+        <p:spPr/>
+      </p:sp>
+      <p:sp>
+        <p:nvSpPr>
+          <p:cNvPr id="3" name="Notes Placeholder 2"/>
+          <p:cNvSpPr>
+            <a:spLocks noGrp="1"/>
+          </p:cNvSpPr>
+          <p:nvPr>
+            <p:ph type="body" idx="1"/>
+          </p:nvPr>
+        </p:nvSpPr>
+        <p:spPr/>
+        <p:txBody>
+          <a:bodyPr/>
+          <a:lstStyle/>
+          <a:p>
+            <a:r>
+              <a:rPr lang="en-US" dirty="0"/>
+              <a:t/>
+            </a:r>
+            <a:endParaRPr lang="en-US" dirty="0"/>
+          </a:p>
+        </p:txBody>
+      </p:sp>
+      <p:sp>
+        <p:nvSpPr>
+          <p:cNvPr id="4" name="Slide Number Placeholder 3"/>
+          <p:cNvSpPr>
+            <a:spLocks noGrp="1"/>
+          </p:cNvSpPr>
+          <p:nvPr>
+            <p:ph type="sldNum" sz="quarter" idx="10"/>
+          </p:nvPr>
+        </p:nvSpPr>
+        <p:spPr/>
+        <p:txBody>
+          <a:bodyPr/>
+          <a:lstStyle/>
+          <a:p>
+            <a:fld id="{F7021451-1387-4CA6-816F-3879F97B5CBC}" type="slidenum">
+              <a:rPr lang="en-US"/>
+              <a:t>15</a:t>
+            </a:fld>
+            <a:endParaRPr lang="en-US"/>
+          </a:p>
+        </p:txBody>
+      </p:sp>
+    </p:spTree>
+    <p:extLst>
+      <p:ext uri="{BB962C8B-B14F-4D97-AF65-F5344CB8AC3E}">
+        <p14:creationId xmlns:p14="http://schemas.microsoft.com/office/powerpoint/2010/main" val="1024086991"/>
+      </p:ext>
+    </p:extLst>
+  </p:cSld>
+  <p:clrMapOvr>
+    <a:masterClrMapping/>
+  </p:clrMapOvr>
+</p:notes>
+</file>
+
+<file path=ppt/notesSlides/notesSlide16.xml><?xml version="1.0" encoding="utf-8"?>
+<p:notes xmlns:a="http://schemas.openxmlformats.org/drawingml/2006/main" xmlns:r="http://schemas.openxmlformats.org/officeDocument/2006/relationships" xmlns:p="http://schemas.openxmlformats.org/presentationml/2006/main">
+  <p:cSld>
+    <p:spTree>
+      <p:nvGrpSpPr>
+        <p:cNvPr id="1" name=""/>
+        <p:cNvGrpSpPr/>
+        <p:nvPr/>
+      </p:nvGrpSpPr>
+      <p:grpSpPr>
+        <a:xfrm>
+          <a:off x="0" y="0"/>
+          <a:ext cx="0" cy="0"/>
+          <a:chOff x="0" y="0"/>
+          <a:chExt cx="0" cy="0"/>
+        </a:xfrm>
+      </p:grpSpPr>
+      <p:sp>
+        <p:nvSpPr>
+          <p:cNvPr id="2" name="Slide Image Placeholder 1"/>
+          <p:cNvSpPr>
+            <a:spLocks noGrp="1" noRot="1" noChangeAspect="1"/>
+          </p:cNvSpPr>
+          <p:nvPr>
+            <p:ph type="sldImg"/>
+          </p:nvPr>
+        </p:nvSpPr>
+        <p:spPr/>
+      </p:sp>
+      <p:sp>
+        <p:nvSpPr>
+          <p:cNvPr id="3" name="Notes Placeholder 2"/>
+          <p:cNvSpPr>
+            <a:spLocks noGrp="1"/>
+          </p:cNvSpPr>
+          <p:nvPr>
+            <p:ph type="body" idx="1"/>
+          </p:nvPr>
+        </p:nvSpPr>
+        <p:spPr/>
+        <p:txBody>
+          <a:bodyPr/>
+          <a:lstStyle/>
+          <a:p>
+            <a:r>
+              <a:rPr lang="en-US" dirty="0"/>
+              <a:t/>
+            </a:r>
+            <a:endParaRPr lang="en-US" dirty="0"/>
+          </a:p>
+        </p:txBody>
+      </p:sp>
+      <p:sp>
+        <p:nvSpPr>
+          <p:cNvPr id="4" name="Slide Number Placeholder 3"/>
+          <p:cNvSpPr>
+            <a:spLocks noGrp="1"/>
+          </p:cNvSpPr>
+          <p:nvPr>
+            <p:ph type="sldNum" sz="quarter" idx="10"/>
+          </p:nvPr>
+        </p:nvSpPr>
+        <p:spPr/>
+        <p:txBody>
+          <a:bodyPr/>
+          <a:lstStyle/>
+          <a:p>
+            <a:fld id="{F7021451-1387-4CA6-816F-3879F97B5CBC}" type="slidenum">
+              <a:rPr lang="en-US"/>
+              <a:t>16</a:t>
+            </a:fld>
+            <a:endParaRPr lang="en-US"/>
+          </a:p>
+        </p:txBody>
+      </p:sp>
+    </p:spTree>
+    <p:extLst>
+      <p:ext uri="{BB962C8B-B14F-4D97-AF65-F5344CB8AC3E}">
+        <p14:creationId xmlns:p14="http://schemas.microsoft.com/office/powerpoint/2010/main" val="1024086991"/>
+      </p:ext>
+    </p:extLst>
+  </p:cSld>
+  <p:clrMapOvr>
+    <a:masterClrMapping/>
+  </p:clrMapOvr>
+</p:notes>
+</file>
+
+<file path=ppt/notesSlides/notesSlide17.xml><?xml version="1.0" encoding="utf-8"?>
+<p:notes xmlns:a="http://schemas.openxmlformats.org/drawingml/2006/main" xmlns:r="http://schemas.openxmlformats.org/officeDocument/2006/relationships" xmlns:p="http://schemas.openxmlformats.org/presentationml/2006/main">
+  <p:cSld>
+    <p:spTree>
+      <p:nvGrpSpPr>
+        <p:cNvPr id="1" name=""/>
+        <p:cNvGrpSpPr/>
+        <p:nvPr/>
+      </p:nvGrpSpPr>
+      <p:grpSpPr>
+        <a:xfrm>
+          <a:off x="0" y="0"/>
+          <a:ext cx="0" cy="0"/>
+          <a:chOff x="0" y="0"/>
+          <a:chExt cx="0" cy="0"/>
+        </a:xfrm>
+      </p:grpSpPr>
+      <p:sp>
+        <p:nvSpPr>
+          <p:cNvPr id="2" name="Slide Image Placeholder 1"/>
+          <p:cNvSpPr>
+            <a:spLocks noGrp="1" noRot="1" noChangeAspect="1"/>
+          </p:cNvSpPr>
+          <p:nvPr>
+            <p:ph type="sldImg"/>
+          </p:nvPr>
+        </p:nvSpPr>
+        <p:spPr/>
+      </p:sp>
+      <p:sp>
+        <p:nvSpPr>
+          <p:cNvPr id="3" name="Notes Placeholder 2"/>
+          <p:cNvSpPr>
+            <a:spLocks noGrp="1"/>
+          </p:cNvSpPr>
+          <p:nvPr>
+            <p:ph type="body" idx="1"/>
+          </p:nvPr>
+        </p:nvSpPr>
+        <p:spPr/>
+        <p:txBody>
+          <a:bodyPr/>
+          <a:lstStyle/>
+          <a:p>
+            <a:r>
+              <a:rPr lang="en-US" dirty="0"/>
+              <a:t/>
+            </a:r>
+            <a:endParaRPr lang="en-US" dirty="0"/>
+          </a:p>
+        </p:txBody>
+      </p:sp>
+      <p:sp>
+        <p:nvSpPr>
+          <p:cNvPr id="4" name="Slide Number Placeholder 3"/>
+          <p:cNvSpPr>
+            <a:spLocks noGrp="1"/>
+          </p:cNvSpPr>
+          <p:nvPr>
+            <p:ph type="sldNum" sz="quarter" idx="10"/>
+          </p:nvPr>
+        </p:nvSpPr>
+        <p:spPr/>
+        <p:txBody>
+          <a:bodyPr/>
+          <a:lstStyle/>
+          <a:p>
+            <a:fld id="{F7021451-1387-4CA6-816F-3879F97B5CBC}" type="slidenum">
+              <a:rPr lang="en-US"/>
+              <a:t>17</a:t>
+            </a:fld>
+            <a:endParaRPr lang="en-US"/>
+          </a:p>
+        </p:txBody>
+      </p:sp>
+    </p:spTree>
+    <p:extLst>
+      <p:ext uri="{BB962C8B-B14F-4D97-AF65-F5344CB8AC3E}">
+        <p14:creationId xmlns:p14="http://schemas.microsoft.com/office/powerpoint/2010/main" val="1024086991"/>
+      </p:ext>
+    </p:extLst>
+  </p:cSld>
+  <p:clrMapOvr>
+    <a:masterClrMapping/>
+  </p:clrMapOvr>
+</p:notes>
+</file>
+
+<file path=ppt/notesSlides/notesSlide18.xml><?xml version="1.0" encoding="utf-8"?>
+<p:notes xmlns:a="http://schemas.openxmlformats.org/drawingml/2006/main" xmlns:r="http://schemas.openxmlformats.org/officeDocument/2006/relationships" xmlns:p="http://schemas.openxmlformats.org/presentationml/2006/main">
+  <p:cSld>
+    <p:spTree>
+      <p:nvGrpSpPr>
+        <p:cNvPr id="1" name=""/>
+        <p:cNvGrpSpPr/>
+        <p:nvPr/>
+      </p:nvGrpSpPr>
+      <p:grpSpPr>
+        <a:xfrm>
+          <a:off x="0" y="0"/>
+          <a:ext cx="0" cy="0"/>
+          <a:chOff x="0" y="0"/>
+          <a:chExt cx="0" cy="0"/>
+        </a:xfrm>
+      </p:grpSpPr>
+      <p:sp>
+        <p:nvSpPr>
+          <p:cNvPr id="2" name="Slide Image Placeholder 1"/>
+          <p:cNvSpPr>
+            <a:spLocks noGrp="1" noRot="1" noChangeAspect="1"/>
+          </p:cNvSpPr>
+          <p:nvPr>
+            <p:ph type="sldImg"/>
+          </p:nvPr>
+        </p:nvSpPr>
+        <p:spPr/>
+      </p:sp>
+      <p:sp>
+        <p:nvSpPr>
+          <p:cNvPr id="3" name="Notes Placeholder 2"/>
+          <p:cNvSpPr>
+            <a:spLocks noGrp="1"/>
+          </p:cNvSpPr>
+          <p:nvPr>
+            <p:ph type="body" idx="1"/>
+          </p:nvPr>
+        </p:nvSpPr>
+        <p:spPr/>
+        <p:txBody>
+          <a:bodyPr/>
+          <a:lstStyle/>
+          <a:p>
+            <a:r>
+              <a:rPr lang="en-US" dirty="0"/>
+              <a:t/>
+            </a:r>
+            <a:endParaRPr lang="en-US" dirty="0"/>
+          </a:p>
+        </p:txBody>
+      </p:sp>
+      <p:sp>
+        <p:nvSpPr>
+          <p:cNvPr id="4" name="Slide Number Placeholder 3"/>
+          <p:cNvSpPr>
+            <a:spLocks noGrp="1"/>
+          </p:cNvSpPr>
+          <p:nvPr>
+            <p:ph type="sldNum" sz="quarter" idx="10"/>
+          </p:nvPr>
+        </p:nvSpPr>
+        <p:spPr/>
+        <p:txBody>
+          <a:bodyPr/>
+          <a:lstStyle/>
+          <a:p>
+            <a:fld id="{F7021451-1387-4CA6-816F-3879F97B5CBC}" type="slidenum">
+              <a:rPr lang="en-US"/>
+              <a:t>18</a:t>
+            </a:fld>
+            <a:endParaRPr lang="en-US"/>
+          </a:p>
+        </p:txBody>
+      </p:sp>
+    </p:spTree>
+    <p:extLst>
+      <p:ext uri="{BB962C8B-B14F-4D97-AF65-F5344CB8AC3E}">
+        <p14:creationId xmlns:p14="http://schemas.microsoft.com/office/powerpoint/2010/main" val="1024086991"/>
+      </p:ext>
+    </p:extLst>
+  </p:cSld>
+  <p:clrMapOvr>
+    <a:masterClrMapping/>
+  </p:clrMapOvr>
+</p:notes>
+</file>
+
+<file path=ppt/notesSlides/notesSlide19.xml><?xml version="1.0" encoding="utf-8"?>
+<p:notes xmlns:a="http://schemas.openxmlformats.org/drawingml/2006/main" xmlns:r="http://schemas.openxmlformats.org/officeDocument/2006/relationships" xmlns:p="http://schemas.openxmlformats.org/presentationml/2006/main">
+  <p:cSld>
+    <p:spTree>
+      <p:nvGrpSpPr>
+        <p:cNvPr id="1" name=""/>
+        <p:cNvGrpSpPr/>
+        <p:nvPr/>
+      </p:nvGrpSpPr>
+      <p:grpSpPr>
+        <a:xfrm>
+          <a:off x="0" y="0"/>
+          <a:ext cx="0" cy="0"/>
+          <a:chOff x="0" y="0"/>
+          <a:chExt cx="0" cy="0"/>
+        </a:xfrm>
+      </p:grpSpPr>
+      <p:sp>
+        <p:nvSpPr>
+          <p:cNvPr id="2" name="Slide Image Placeholder 1"/>
+          <p:cNvSpPr>
+            <a:spLocks noGrp="1" noRot="1" noChangeAspect="1"/>
+          </p:cNvSpPr>
+          <p:nvPr>
+            <p:ph type="sldImg"/>
+          </p:nvPr>
+        </p:nvSpPr>
+        <p:spPr/>
+      </p:sp>
+      <p:sp>
+        <p:nvSpPr>
+          <p:cNvPr id="3" name="Notes Placeholder 2"/>
+          <p:cNvSpPr>
+            <a:spLocks noGrp="1"/>
+          </p:cNvSpPr>
+          <p:nvPr>
+            <p:ph type="body" idx="1"/>
+          </p:nvPr>
+        </p:nvSpPr>
+        <p:spPr/>
+        <p:txBody>
+          <a:bodyPr/>
+          <a:lstStyle/>
+          <a:p>
+            <a:r>
+              <a:rPr lang="en-US" dirty="0"/>
+              <a:t/>
+            </a:r>
+            <a:endParaRPr lang="en-US" dirty="0"/>
+          </a:p>
+        </p:txBody>
+      </p:sp>
+      <p:sp>
+        <p:nvSpPr>
+          <p:cNvPr id="4" name="Slide Number Placeholder 3"/>
+          <p:cNvSpPr>
+            <a:spLocks noGrp="1"/>
+          </p:cNvSpPr>
+          <p:nvPr>
+            <p:ph type="sldNum" sz="quarter" idx="10"/>
+          </p:nvPr>
+        </p:nvSpPr>
+        <p:spPr/>
+        <p:txBody>
+          <a:bodyPr/>
+          <a:lstStyle/>
+          <a:p>
+            <a:fld id="{F7021451-1387-4CA6-816F-3879F97B5CBC}" type="slidenum">
+              <a:rPr lang="en-US"/>
+              <a:t>19</a:t>
+            </a:fld>
+            <a:endParaRPr lang="en-US"/>
+          </a:p>
+        </p:txBody>
+      </p:sp>
+    </p:spTree>
+    <p:extLst>
+      <p:ext uri="{BB962C8B-B14F-4D97-AF65-F5344CB8AC3E}">
+        <p14:creationId xmlns:p14="http://schemas.microsoft.com/office/powerpoint/2010/main" val="1024086991"/>
+      </p:ext>
+    </p:extLst>
+  </p:cSld>
+  <p:clrMapOvr>
+    <a:masterClrMapping/>
+  </p:clrMapOvr>
+</p:notes>
+</file>
+
 <file path=ppt/notesSlides/notesSlide2.xml><?xml version="1.0" encoding="utf-8"?>
 <p:notes xmlns:a="http://schemas.openxmlformats.org/drawingml/2006/main" xmlns:r="http://schemas.openxmlformats.org/officeDocument/2006/relationships" xmlns:p="http://schemas.openxmlformats.org/presentationml/2006/main">
   <p:cSld>
@@ -889,6 +1513,94 @@
             <a:fld id="{F7021451-1387-4CA6-816F-3879F97B5CBC}" type="slidenum">
               <a:rPr lang="en-US"/>
               <a:t>2</a:t>
+            </a:fld>
+            <a:endParaRPr lang="en-US"/>
+          </a:p>
+        </p:txBody>
+      </p:sp>
+    </p:spTree>
+    <p:extLst>
+      <p:ext uri="{BB962C8B-B14F-4D97-AF65-F5344CB8AC3E}">
+        <p14:creationId xmlns:p14="http://schemas.microsoft.com/office/powerpoint/2010/main" val="1024086991"/>
+      </p:ext>
+    </p:extLst>
+  </p:cSld>
+  <p:clrMapOvr>
+    <a:masterClrMapping/>
+  </p:clrMapOvr>
+</p:notes>
+</file>
+
+<file path=ppt/notesSlides/notesSlide20.xml><?xml version="1.0" encoding="utf-8"?>
+<p:notes xmlns:a="http://schemas.openxmlformats.org/drawingml/2006/main" xmlns:r="http://schemas.openxmlformats.org/officeDocument/2006/relationships" xmlns:p="http://schemas.openxmlformats.org/presentationml/2006/main">
+  <p:cSld>
+    <p:spTree>
+      <p:nvGrpSpPr>
+        <p:cNvPr id="1" name=""/>
+        <p:cNvGrpSpPr/>
+        <p:nvPr/>
+      </p:nvGrpSpPr>
+      <p:grpSpPr>
+        <a:xfrm>
+          <a:off x="0" y="0"/>
+          <a:ext cx="0" cy="0"/>
+          <a:chOff x="0" y="0"/>
+          <a:chExt cx="0" cy="0"/>
+        </a:xfrm>
+      </p:grpSpPr>
+      <p:sp>
+        <p:nvSpPr>
+          <p:cNvPr id="2" name="Slide Image Placeholder 1"/>
+          <p:cNvSpPr>
+            <a:spLocks noGrp="1" noRot="1" noChangeAspect="1"/>
+          </p:cNvSpPr>
+          <p:nvPr>
+            <p:ph type="sldImg"/>
+          </p:nvPr>
+        </p:nvSpPr>
+        <p:spPr/>
+      </p:sp>
+      <p:sp>
+        <p:nvSpPr>
+          <p:cNvPr id="3" name="Notes Placeholder 2"/>
+          <p:cNvSpPr>
+            <a:spLocks noGrp="1"/>
+          </p:cNvSpPr>
+          <p:nvPr>
+            <p:ph type="body" idx="1"/>
+          </p:nvPr>
+        </p:nvSpPr>
+        <p:spPr/>
+        <p:txBody>
+          <a:bodyPr/>
+          <a:lstStyle/>
+          <a:p>
+            <a:r>
+              <a:rPr lang="en-US" dirty="0"/>
+              <a:t/>
+            </a:r>
+            <a:endParaRPr lang="en-US" dirty="0"/>
+          </a:p>
+        </p:txBody>
+      </p:sp>
+      <p:sp>
+        <p:nvSpPr>
+          <p:cNvPr id="4" name="Slide Number Placeholder 3"/>
+          <p:cNvSpPr>
+            <a:spLocks noGrp="1"/>
+          </p:cNvSpPr>
+          <p:nvPr>
+            <p:ph type="sldNum" sz="quarter" idx="10"/>
+          </p:nvPr>
+        </p:nvSpPr>
+        <p:spPr/>
+        <p:txBody>
+          <a:bodyPr/>
+          <a:lstStyle/>
+          <a:p>
+            <a:fld id="{F7021451-1387-4CA6-816F-3879F97B5CBC}" type="slidenum">
+              <a:rPr lang="en-US"/>
+              <a:t>20</a:t>
             </a:fld>
             <a:endParaRPr lang="en-US"/>
           </a:p>
@@ -2140,286 +2852,6 @@
         </p:nvSpPr>
         <p:spPr>
           <a:xfrm>
-            <a:off x="406301" y="1223963"/>
-            <a:ext cx="8498026" cy="274290"/>
-          </a:xfrm>
-          <a:prstGeom prst="rect">
-            <a:avLst/>
-          </a:prstGeom>
-          <a:noFill/>
-          <a:ln/>
-        </p:spPr>
-        <p:txBody>
-          <a:bodyPr wrap="square" lIns="0" tIns="0" rIns="0" bIns="0" rtlCol="0" anchor="t"/>
-          <a:lstStyle/>
-          <a:p>
-            <a:pPr algn="l" indent="0" marL="0">
-              <a:lnSpc>
-                <a:spcPts val="2160"/>
-              </a:lnSpc>
-              <a:spcBef>
-                <a:spcPts val="600"/>
-              </a:spcBef>
-              <a:spcAft>
-                <a:spcPts val="800"/>
-              </a:spcAft>
-              <a:buNone/>
-            </a:pPr>
-            <a:r>
-              <a:rPr lang="en-US" sz="1800" b="1" dirty="0">
-                <a:solidFill>
-                  <a:srgbClr val="FE4447"/>
-                </a:solidFill>
-                <a:latin typeface="Georgia" pitchFamily="34" charset="0"/>
-                <a:ea typeface="Georgia" pitchFamily="34" charset="-122"/>
-                <a:cs typeface="Georgia" pitchFamily="34" charset="-120"/>
-              </a:rPr>
-              <a:t>Learning objective</a:t>
-            </a:r>
-            <a:endParaRPr lang="en-US" sz="1800" dirty="0"/>
-          </a:p>
-        </p:txBody>
-      </p:sp>
-      <p:sp>
-        <p:nvSpPr>
-          <p:cNvPr id="6" name="Text 4"/>
-          <p:cNvSpPr/>
-          <p:nvPr/>
-        </p:nvSpPr>
-        <p:spPr>
-          <a:xfrm>
-            <a:off x="406301" y="1637854"/>
-            <a:ext cx="8498026" cy="639812"/>
-          </a:xfrm>
-          <a:prstGeom prst="rect">
-            <a:avLst/>
-          </a:prstGeom>
-          <a:noFill/>
-          <a:ln/>
-        </p:spPr>
-        <p:txBody>
-          <a:bodyPr wrap="square" lIns="0" tIns="0" rIns="0" bIns="0" rtlCol="0" anchor="t"/>
-          <a:lstStyle/>
-          <a:p>
-            <a:pPr algn="l" indent="0" marL="0">
-              <a:lnSpc>
-                <a:spcPts val="1680"/>
-              </a:lnSpc>
-              <a:spcBef>
-                <a:spcPts val="300"/>
-              </a:spcBef>
-              <a:spcAft>
-                <a:spcPts val="300"/>
-              </a:spcAft>
-              <a:buNone/>
-            </a:pPr>
-            <a:r>
-              <a:rPr lang="en-US" sz="1200" dirty="0">
-                <a:solidFill>
-                  <a:srgbClr val="1C2833"/>
-                </a:solidFill>
-                <a:latin typeface="Arial" pitchFamily="34" charset="0"/>
-                <a:ea typeface="Arial" pitchFamily="34" charset="-122"/>
-                <a:cs typeface="Arial" pitchFamily="34" charset="-120"/>
-              </a:rPr>
-              <a:t>By the end of this lesson, students can identify </a:t>
-            </a:r>
-            <a:pPr algn="l" indent="0" marL="0">
-              <a:lnSpc>
-                <a:spcPts val="1680"/>
-              </a:lnSpc>
-              <a:spcBef>
-                <a:spcPts val="300"/>
-              </a:spcBef>
-              <a:spcAft>
-                <a:spcPts val="300"/>
-              </a:spcAft>
-              <a:buNone/>
-            </a:pPr>
-            <a:r>
-              <a:rPr lang="en-US" sz="1200" i="1" dirty="0">
-                <a:solidFill>
-                  <a:srgbClr val="1C2833"/>
-                </a:solidFill>
-                <a:latin typeface="Arial" pitchFamily="34" charset="0"/>
-                <a:ea typeface="Arial" pitchFamily="34" charset="-122"/>
-                <a:cs typeface="Arial" pitchFamily="34" charset="-120"/>
-              </a:rPr>
-              <a:t>nimba</a:t>
-            </a:r>
-            <a:pPr algn="l" indent="0" marL="0">
-              <a:lnSpc>
-                <a:spcPts val="1680"/>
-              </a:lnSpc>
-              <a:spcBef>
-                <a:spcPts val="300"/>
-              </a:spcBef>
-              <a:spcAft>
-                <a:spcPts val="300"/>
-              </a:spcAft>
-              <a:buNone/>
-            </a:pPr>
-            <a:r>
-              <a:rPr lang="en-US" sz="1200" dirty="0">
-                <a:solidFill>
-                  <a:srgbClr val="1C2833"/>
-                </a:solidFill>
-                <a:latin typeface="Arial" pitchFamily="34" charset="0"/>
-                <a:ea typeface="Arial" pitchFamily="34" charset="-122"/>
-                <a:cs typeface="Arial" pitchFamily="34" charset="-120"/>
-              </a:rPr>
-              <a:t> (</a:t>
-            </a:r>
-            <a:pPr algn="l" indent="0" marL="0">
-              <a:lnSpc>
-                <a:spcPts val="1680"/>
-              </a:lnSpc>
-              <a:spcBef>
-                <a:spcPts val="300"/>
-              </a:spcBef>
-              <a:spcAft>
-                <a:spcPts val="300"/>
-              </a:spcAft>
-              <a:buNone/>
-            </a:pPr>
-            <a:r>
-              <a:rPr lang="en-US" sz="1200" i="1" dirty="0">
-                <a:solidFill>
-                  <a:srgbClr val="1C2833"/>
-                </a:solidFill>
-                <a:latin typeface="Arial" pitchFamily="34" charset="0"/>
-                <a:ea typeface="Arial" pitchFamily="34" charset="-122"/>
-                <a:cs typeface="Arial" pitchFamily="34" charset="-120"/>
-              </a:rPr>
-              <a:t>Azadirachta indica</a:t>
-            </a:r>
-            <a:pPr algn="l" indent="0" marL="0">
-              <a:lnSpc>
-                <a:spcPts val="1680"/>
-              </a:lnSpc>
-              <a:spcBef>
-                <a:spcPts val="300"/>
-              </a:spcBef>
-              <a:spcAft>
-                <a:spcPts val="300"/>
-              </a:spcAft>
-              <a:buNone/>
-            </a:pPr>
-            <a:r>
-              <a:rPr lang="en-US" sz="1200" dirty="0">
-                <a:solidFill>
-                  <a:srgbClr val="1C2833"/>
-                </a:solidFill>
-                <a:latin typeface="Arial" pitchFamily="34" charset="0"/>
-                <a:ea typeface="Arial" pitchFamily="34" charset="-122"/>
-                <a:cs typeface="Arial" pitchFamily="34" charset="-120"/>
-              </a:rPr>
-              <a:t>) by leaf shape, describe its dominant taste as </a:t>
-            </a:r>
-            <a:pPr algn="l" indent="0" marL="0">
-              <a:lnSpc>
-                <a:spcPts val="1680"/>
-              </a:lnSpc>
-              <a:spcBef>
-                <a:spcPts val="300"/>
-              </a:spcBef>
-              <a:spcAft>
-                <a:spcPts val="300"/>
-              </a:spcAft>
-              <a:buNone/>
-            </a:pPr>
-            <a:r>
-              <a:rPr lang="en-US" sz="1200" i="1" dirty="0">
-                <a:solidFill>
-                  <a:srgbClr val="1C2833"/>
-                </a:solidFill>
-                <a:latin typeface="Arial" pitchFamily="34" charset="0"/>
-                <a:ea typeface="Arial" pitchFamily="34" charset="-122"/>
-                <a:cs typeface="Arial" pitchFamily="34" charset="-120"/>
-              </a:rPr>
-              <a:t>tikta</a:t>
-            </a:r>
-            <a:pPr algn="l" indent="0" marL="0">
-              <a:lnSpc>
-                <a:spcPts val="1680"/>
-              </a:lnSpc>
-              <a:spcBef>
-                <a:spcPts val="300"/>
-              </a:spcBef>
-              <a:spcAft>
-                <a:spcPts val="300"/>
-              </a:spcAft>
-              <a:buNone/>
-            </a:pPr>
-            <a:r>
-              <a:rPr lang="en-US" sz="1200" dirty="0">
-                <a:solidFill>
-                  <a:srgbClr val="1C2833"/>
-                </a:solidFill>
-                <a:latin typeface="Arial" pitchFamily="34" charset="0"/>
-                <a:ea typeface="Arial" pitchFamily="34" charset="-122"/>
-                <a:cs typeface="Arial" pitchFamily="34" charset="-120"/>
-              </a:rPr>
-              <a:t> (bitter), name azadirachtin as its principal active compound, and explain why concentrated neem is </a:t>
-            </a:r>
-            <a:pPr algn="l" indent="0" marL="0">
-              <a:lnSpc>
-                <a:spcPts val="1680"/>
-              </a:lnSpc>
-              <a:spcBef>
-                <a:spcPts val="300"/>
-              </a:spcBef>
-              <a:spcAft>
-                <a:spcPts val="300"/>
-              </a:spcAft>
-              <a:buNone/>
-            </a:pPr>
-            <a:r>
-              <a:rPr lang="en-US" sz="1200" b="1" dirty="0">
-                <a:solidFill>
-                  <a:srgbClr val="1C2833"/>
-                </a:solidFill>
-                <a:latin typeface="Arial" pitchFamily="34" charset="0"/>
-                <a:ea typeface="Arial" pitchFamily="34" charset="-122"/>
-                <a:cs typeface="Arial" pitchFamily="34" charset="-120"/>
-              </a:rPr>
-              <a:t>not</a:t>
-            </a:r>
-            <a:pPr algn="l" indent="0" marL="0">
-              <a:lnSpc>
-                <a:spcPts val="1680"/>
-              </a:lnSpc>
-              <a:spcBef>
-                <a:spcPts val="300"/>
-              </a:spcBef>
-              <a:spcAft>
-                <a:spcPts val="300"/>
-              </a:spcAft>
-              <a:buNone/>
-            </a:pPr>
-            <a:r>
-              <a:rPr lang="en-US" sz="1200" dirty="0">
-                <a:solidFill>
-                  <a:srgbClr val="1C2833"/>
-                </a:solidFill>
-                <a:latin typeface="Arial" pitchFamily="34" charset="0"/>
-                <a:ea typeface="Arial" pitchFamily="34" charset="-122"/>
-                <a:cs typeface="Arial" pitchFamily="34" charset="-120"/>
-              </a:rPr>
-              <a:t> safe for ingestion at any age.</a:t>
-            </a:r>
-            <a:endParaRPr lang="en-US" sz="1200" dirty="0"/>
-          </a:p>
-        </p:txBody>
-      </p:sp>
-      <p:sp>
-        <p:nvSpPr>
-          <p:cNvPr id="7" name="Text 5"/>
-          <p:cNvSpPr/>
-          <p:nvPr/>
-        </p:nvSpPr>
-        <p:spPr>
-          <a:xfrm>
             <a:off x="406301" y="4434929"/>
             <a:ext cx="8498026" cy="213271"/>
           </a:xfrm>
@@ -2564,7 +2996,7 @@
                 <a:ea typeface="Georgia" pitchFamily="34" charset="-122"/>
                 <a:cs typeface="Georgia" pitchFamily="34" charset="-120"/>
               </a:rPr>
-              <a:t>Differentiation</a:t>
+              <a:t>Core (20 min) (cont.)</a:t>
             </a:r>
             <a:endParaRPr lang="en-US" sz="1800" dirty="0"/>
           </a:p>
@@ -2579,7 +3011,7 @@
         <p:spPr>
           <a:xfrm>
             <a:off x="634901" y="883593"/>
-            <a:ext cx="8102798" cy="937022"/>
+            <a:ext cx="8102798" cy="281880"/>
           </a:xfrm>
           <a:prstGeom prst="rect">
             <a:avLst/>
@@ -2610,7 +3042,7 @@
                 <a:ea typeface="Arial" pitchFamily="34" charset="-122"/>
                 <a:cs typeface="Arial" pitchFamily="34" charset="-120"/>
               </a:rPr>
-              <a:t>One tier up:</a:t>
+              <a:t>The safety warning — direct.</a:t>
             </a:r>
             <a:pPr algn="l" indent="0" marL="0">
               <a:lnSpc>
@@ -2630,99 +3062,208 @@
                 <a:ea typeface="Arial" pitchFamily="34" charset="-122"/>
                 <a:cs typeface="Arial" pitchFamily="34" charset="-120"/>
               </a:rPr>
-              <a:t> Read up on the </a:t>
-            </a:r>
-            <a:pPr algn="l" indent="0" marL="0">
-              <a:lnSpc>
-                <a:spcPts val="1620"/>
-              </a:lnSpc>
-              <a:spcAft>
-                <a:spcPts val="300"/>
-              </a:spcAft>
-              <a:buNone/>
-            </a:pPr>
-            <a:r>
-              <a:rPr lang="en-US" sz="1200" i="1" dirty="0">
-                <a:solidFill>
-                  <a:srgbClr val="1C2833"/>
-                </a:solidFill>
-                <a:latin typeface="Arial" pitchFamily="34" charset="0"/>
-                <a:ea typeface="Arial" pitchFamily="34" charset="-122"/>
-                <a:cs typeface="Arial" pitchFamily="34" charset="-120"/>
-              </a:rPr>
-              <a:t>Margosa oil poisoning</a:t>
-            </a:r>
-            <a:pPr algn="l" indent="0" marL="0">
-              <a:lnSpc>
-                <a:spcPts val="1620"/>
-              </a:lnSpc>
-              <a:spcAft>
-                <a:spcPts val="300"/>
-              </a:spcAft>
-              <a:buNone/>
-            </a:pPr>
-            <a:r>
-              <a:rPr lang="en-US" sz="1200" dirty="0">
-                <a:solidFill>
-                  <a:srgbClr val="1C2833"/>
-                </a:solidFill>
-                <a:latin typeface="Arial" pitchFamily="34" charset="0"/>
-                <a:ea typeface="Arial" pitchFamily="34" charset="-122"/>
-                <a:cs typeface="Arial" pitchFamily="34" charset="-120"/>
-              </a:rPr>
-              <a:t> literature (margosa is another name for neem oil). Find one case-report finding. Be ready to share next class.</a:t>
+              <a:t> Write on the board:</a:t>
             </a:r>
             <a:endParaRPr lang="en-US" sz="1200" dirty="0"/>
           </a:p>
-          <a:p>
-            <a:pPr algn="l" marL="342900" indent="-342900">
-              <a:lnSpc>
-                <a:spcPts val="1620"/>
-              </a:lnSpc>
-              <a:spcAft>
-                <a:spcPts val="300"/>
-              </a:spcAft>
-              <a:buSzPct val="100000"/>
-              <a:buChar char="•"/>
-            </a:pPr>
-            <a:r>
-              <a:rPr lang="en-US" sz="1200" b="1" dirty="0">
-                <a:solidFill>
-                  <a:srgbClr val="1C2833"/>
-                </a:solidFill>
-                <a:latin typeface="Arial" pitchFamily="34" charset="0"/>
-                <a:ea typeface="Arial" pitchFamily="34" charset="-122"/>
-                <a:cs typeface="Arial" pitchFamily="34" charset="-120"/>
-              </a:rPr>
-              <a:t>One tier down:</a:t>
-            </a:r>
-            <a:pPr algn="l" indent="0" marL="0">
-              <a:lnSpc>
-                <a:spcPts val="1620"/>
-              </a:lnSpc>
-              <a:spcAft>
-                <a:spcPts val="300"/>
-              </a:spcAft>
-              <a:buNone/>
-            </a:pPr>
-            <a:r>
-              <a:rPr lang="en-US" sz="1200" dirty="0">
-                <a:solidFill>
-                  <a:srgbClr val="1C2833"/>
-                </a:solidFill>
-                <a:latin typeface="Arial" pitchFamily="34" charset="0"/>
-                <a:ea typeface="Arial" pitchFamily="34" charset="-122"/>
-                <a:cs typeface="Arial" pitchFamily="34" charset="-120"/>
-              </a:rPr>
-              <a:t> Focus on identifying the compound-leaf shape. The chemistry (azadirachtin) can come on Day 6 once you've seen more herbs.</a:t>
-            </a:r>
-            <a:endParaRPr lang="en-US" sz="1200" dirty="0"/>
-          </a:p>
         </p:txBody>
       </p:sp>
       <p:sp>
         <p:nvSpPr>
           <p:cNvPr id="5" name="Text 3"/>
+          <p:cNvSpPr/>
+          <p:nvPr/>
+        </p:nvSpPr>
+        <p:spPr>
+          <a:xfrm>
+            <a:off x="406301" y="1266974"/>
+            <a:ext cx="8331398" cy="1073944"/>
+          </a:xfrm>
+          <a:prstGeom prst="rect">
+            <a:avLst/>
+          </a:prstGeom>
+          <a:solidFill>
+            <a:srgbClr val="F4F8F9"/>
+          </a:solidFill>
+          <a:ln/>
+        </p:spPr>
+        <p:txBody>
+          <a:bodyPr wrap="square" rtlCol="0" anchor="ctr"/>
+          <a:lstStyle/>
+          <a:p>
+            <a:pPr indent="0" marL="0">
+              <a:buNone/>
+            </a:pPr>
+            <a:endParaRPr lang="en-US" dirty="0"/>
+          </a:p>
+        </p:txBody>
+      </p:sp>
+      <p:sp>
+        <p:nvSpPr>
+          <p:cNvPr id="6" name="Shape 4"/>
+          <p:cNvSpPr/>
+          <p:nvPr/>
+        </p:nvSpPr>
+        <p:spPr>
+          <a:xfrm>
+            <a:off x="434876" y="1266974"/>
+            <a:ext cx="0" cy="1073944"/>
+          </a:xfrm>
+          <a:prstGeom prst="line">
+            <a:avLst/>
+          </a:prstGeom>
+          <a:noFill/>
+          <a:ln w="57150">
+            <a:solidFill>
+              <a:srgbClr val="FE4447"/>
+            </a:solidFill>
+            <a:prstDash val="solid"/>
+          </a:ln>
+        </p:spPr>
+      </p:sp>
+      <p:sp>
+        <p:nvSpPr>
+          <p:cNvPr id="7" name="Text 5"/>
+          <p:cNvSpPr/>
+          <p:nvPr/>
+        </p:nvSpPr>
+        <p:spPr>
+          <a:xfrm>
+            <a:off x="692051" y="1457474"/>
+            <a:ext cx="7973389" cy="692944"/>
+          </a:xfrm>
+          <a:prstGeom prst="rect">
+            <a:avLst/>
+          </a:prstGeom>
+          <a:noFill/>
+          <a:ln/>
+        </p:spPr>
+        <p:txBody>
+          <a:bodyPr wrap="square" lIns="0" tIns="0" rIns="0" bIns="0" rtlCol="0" anchor="t"/>
+          <a:lstStyle/>
+          <a:p>
+            <a:pPr algn="l" indent="0" marL="0">
+              <a:lnSpc>
+                <a:spcPts val="1820"/>
+              </a:lnSpc>
+              <a:spcBef>
+                <a:spcPts val="300"/>
+              </a:spcBef>
+              <a:spcAft>
+                <a:spcPts val="300"/>
+              </a:spcAft>
+              <a:buNone/>
+            </a:pPr>
+            <a:r>
+              <a:rPr lang="en-US" sz="1300" dirty="0">
+                <a:solidFill>
+                  <a:srgbClr val="1C2833"/>
+                </a:solidFill>
+                <a:latin typeface="Georgia" pitchFamily="34" charset="0"/>
+                <a:ea typeface="Georgia" pitchFamily="34" charset="-122"/>
+                <a:cs typeface="Georgia" pitchFamily="34" charset="-120"/>
+              </a:rPr>
+              <a:t>⚠️ </a:t>
+            </a:r>
+            <a:pPr algn="l" indent="0" marL="0">
+              <a:lnSpc>
+                <a:spcPts val="1820"/>
+              </a:lnSpc>
+              <a:spcBef>
+                <a:spcPts val="300"/>
+              </a:spcBef>
+              <a:spcAft>
+                <a:spcPts val="300"/>
+              </a:spcAft>
+              <a:buNone/>
+            </a:pPr>
+            <a:r>
+              <a:rPr lang="en-US" sz="1300" b="1" i="1" dirty="0">
+                <a:solidFill>
+                  <a:srgbClr val="1C2833"/>
+                </a:solidFill>
+                <a:latin typeface="Georgia" pitchFamily="34" charset="0"/>
+                <a:ea typeface="Georgia" pitchFamily="34" charset="-122"/>
+                <a:cs typeface="Georgia" pitchFamily="34" charset="-120"/>
+              </a:rPr>
+              <a:t>Neem is hepatotoxic at high doses.</a:t>
+            </a:r>
+            <a:pPr algn="l" indent="0" marL="0">
+              <a:lnSpc>
+                <a:spcPts val="1820"/>
+              </a:lnSpc>
+              <a:spcBef>
+                <a:spcPts val="300"/>
+              </a:spcBef>
+              <a:spcAft>
+                <a:spcPts val="300"/>
+              </a:spcAft>
+              <a:buNone/>
+            </a:pPr>
+            <a:r>
+              <a:rPr lang="en-US" sz="1300" dirty="0">
+                <a:solidFill>
+                  <a:srgbClr val="1C2833"/>
+                </a:solidFill>
+                <a:latin typeface="Georgia" pitchFamily="34" charset="0"/>
+                <a:ea typeface="Georgia" pitchFamily="34" charset="-122"/>
+                <a:cs typeface="Georgia" pitchFamily="34" charset="-120"/>
+              </a:rPr>
+              <a:t> Concentrated neem (especially neem oil ingested) has documented cases of acute liver injury, particularly in children. Neem oil is </a:t>
+            </a:r>
+            <a:pPr algn="l" indent="0" marL="0">
+              <a:lnSpc>
+                <a:spcPts val="1820"/>
+              </a:lnSpc>
+              <a:spcBef>
+                <a:spcPts val="300"/>
+              </a:spcBef>
+              <a:spcAft>
+                <a:spcPts val="300"/>
+              </a:spcAft>
+              <a:buNone/>
+            </a:pPr>
+            <a:r>
+              <a:rPr lang="en-US" sz="1300" b="1" i="1" dirty="0">
+                <a:solidFill>
+                  <a:srgbClr val="1C2833"/>
+                </a:solidFill>
+                <a:latin typeface="Georgia" pitchFamily="34" charset="0"/>
+                <a:ea typeface="Georgia" pitchFamily="34" charset="-122"/>
+                <a:cs typeface="Georgia" pitchFamily="34" charset="-120"/>
+              </a:rPr>
+              <a:t>not</a:t>
+            </a:r>
+            <a:pPr algn="l" indent="0" marL="0">
+              <a:lnSpc>
+                <a:spcPts val="1820"/>
+              </a:lnSpc>
+              <a:spcBef>
+                <a:spcPts val="300"/>
+              </a:spcBef>
+              <a:spcAft>
+                <a:spcPts val="300"/>
+              </a:spcAft>
+              <a:buNone/>
+            </a:pPr>
+            <a:r>
+              <a:rPr lang="en-US" sz="1300" dirty="0">
+                <a:solidFill>
+                  <a:srgbClr val="1C2833"/>
+                </a:solidFill>
+                <a:latin typeface="Georgia" pitchFamily="34" charset="0"/>
+                <a:ea typeface="Georgia" pitchFamily="34" charset="-122"/>
+                <a:cs typeface="Georgia" pitchFamily="34" charset="-120"/>
+              </a:rPr>
+              <a:t> for eating, drinking, or putting in anyone's mouth.</a:t>
+            </a:r>
+            <a:endParaRPr lang="en-US" sz="1300" dirty="0"/>
+          </a:p>
+        </p:txBody>
+      </p:sp>
+      <p:sp>
+        <p:nvSpPr>
+          <p:cNvPr id="8" name="Text 6"/>
           <p:cNvSpPr/>
           <p:nvPr/>
         </p:nvSpPr>
@@ -2872,7 +3413,7 @@
                 <a:ea typeface="Georgia" pitchFamily="34" charset="-122"/>
                 <a:cs typeface="Georgia" pitchFamily="34" charset="-120"/>
               </a:rPr>
-              <a:t>Teacher notes</a:t>
+              <a:t>Core (20 min) (cont.)</a:t>
             </a:r>
             <a:endParaRPr lang="en-US" sz="1800" dirty="0"/>
           </a:p>
@@ -2887,7 +3428,7 @@
         <p:spPr>
           <a:xfrm>
             <a:off x="406301" y="870942"/>
-            <a:ext cx="8498026" cy="1492895"/>
+            <a:ext cx="8498026" cy="639812"/>
           </a:xfrm>
           <a:prstGeom prst="rect">
             <a:avLst/>
@@ -2920,7 +3461,7 @@
                 <a:ea typeface="Arial" pitchFamily="34" charset="-122"/>
                 <a:cs typeface="Arial" pitchFamily="34" charset="-120"/>
               </a:rPr>
-              <a:t>– The "don't chew the leaf" rule is critical. A few brave/curious students will try if leaves are accessible — keep the container sealed and store it where students can't reach during break. – The hepatotoxicity warning needs to land as </a:t>
+              <a:t>This is a real, documented safety concern in case-report literature. Neem leaf in small amounts (a few leaves brewed as a bitter tea in some traditions) is generally tolerated by adults — but it is </a:t>
             </a:r>
             <a:pPr algn="l" indent="0" marL="0">
               <a:lnSpc>
@@ -2943,7 +3484,7 @@
                 <a:ea typeface="Arial" pitchFamily="34" charset="-122"/>
                 <a:cs typeface="Arial" pitchFamily="34" charset="-120"/>
               </a:rPr>
-              <a:t>specific knowledge</a:t>
+              <a:t>not</a:t>
             </a:r>
             <a:pPr algn="l" indent="0" marL="0">
               <a:lnSpc>
@@ -2966,99 +3507,7 @@
                 <a:ea typeface="Arial" pitchFamily="34" charset="-122"/>
                 <a:cs typeface="Arial" pitchFamily="34" charset="-120"/>
               </a:rPr>
-              <a:t>, not vague caution. Use the word "liver" explicitly. Some students have grandparents who give them neem leaves "for blood purification" — the lesson is to be respectful and curious about the traditional use </a:t>
-            </a:r>
-            <a:pPr algn="l" indent="0" marL="0">
-              <a:lnSpc>
-                <a:spcPts val="1680"/>
-              </a:lnSpc>
-              <a:spcBef>
-                <a:spcPts val="300"/>
-              </a:spcBef>
-              <a:spcAft>
-                <a:spcPts val="300"/>
-              </a:spcAft>
-              <a:buNone/>
-            </a:pPr>
-            <a:r>
-              <a:rPr lang="en-US" sz="1200" i="1" dirty="0">
-                <a:solidFill>
-                  <a:srgbClr val="1C2833"/>
-                </a:solidFill>
-                <a:latin typeface="Arial" pitchFamily="34" charset="0"/>
-                <a:ea typeface="Arial" pitchFamily="34" charset="-122"/>
-                <a:cs typeface="Arial" pitchFamily="34" charset="-120"/>
-              </a:rPr>
-              <a:t>while</a:t>
-            </a:r>
-            <a:pPr algn="l" indent="0" marL="0">
-              <a:lnSpc>
-                <a:spcPts val="1680"/>
-              </a:lnSpc>
-              <a:spcBef>
-                <a:spcPts val="300"/>
-              </a:spcBef>
-              <a:spcAft>
-                <a:spcPts val="300"/>
-              </a:spcAft>
-              <a:buNone/>
-            </a:pPr>
-            <a:r>
-              <a:rPr lang="en-US" sz="1200" dirty="0">
-                <a:solidFill>
-                  <a:srgbClr val="1C2833"/>
-                </a:solidFill>
-                <a:latin typeface="Arial" pitchFamily="34" charset="0"/>
-                <a:ea typeface="Arial" pitchFamily="34" charset="-122"/>
-                <a:cs typeface="Arial" pitchFamily="34" charset="-120"/>
-              </a:rPr>
-              <a:t> being clear about the dose concern. – If a student asks "but if azadirachtin is dangerous, why have people used neem for centuries?" — the answer is: dilute external use and very small dietary use have a long history of being tolerated; </a:t>
-            </a:r>
-            <a:pPr algn="l" indent="0" marL="0">
-              <a:lnSpc>
-                <a:spcPts val="1680"/>
-              </a:lnSpc>
-              <a:spcBef>
-                <a:spcPts val="300"/>
-              </a:spcBef>
-              <a:spcAft>
-                <a:spcPts val="300"/>
-              </a:spcAft>
-              <a:buNone/>
-            </a:pPr>
-            <a:r>
-              <a:rPr lang="en-US" sz="1200" i="1" dirty="0">
-                <a:solidFill>
-                  <a:srgbClr val="1C2833"/>
-                </a:solidFill>
-                <a:latin typeface="Arial" pitchFamily="34" charset="0"/>
-                <a:ea typeface="Arial" pitchFamily="34" charset="-122"/>
-                <a:cs typeface="Arial" pitchFamily="34" charset="-120"/>
-              </a:rPr>
-              <a:t>concentrated</a:t>
-            </a:r>
-            <a:pPr algn="l" indent="0" marL="0">
-              <a:lnSpc>
-                <a:spcPts val="1680"/>
-              </a:lnSpc>
-              <a:spcBef>
-                <a:spcPts val="300"/>
-              </a:spcBef>
-              <a:spcAft>
-                <a:spcPts val="300"/>
-              </a:spcAft>
-              <a:buNone/>
-            </a:pPr>
-            <a:r>
-              <a:rPr lang="en-US" sz="1200" dirty="0">
-                <a:solidFill>
-                  <a:srgbClr val="1C2833"/>
-                </a:solidFill>
-                <a:latin typeface="Arial" pitchFamily="34" charset="0"/>
-                <a:ea typeface="Arial" pitchFamily="34" charset="-122"/>
-                <a:cs typeface="Arial" pitchFamily="34" charset="-120"/>
-              </a:rPr>
-              <a:t> use (oil, multi-leaf daily intake in adults, anything in children) is where the harm shows up.</a:t>
+              <a:t> what we are teaching here, and self-prescription is not appropriate.</a:t>
             </a:r>
             <a:endParaRPr lang="en-US" sz="1200" dirty="0"/>
           </a:p>
@@ -3216,7 +3665,7 @@
                 <a:ea typeface="Georgia" pitchFamily="34" charset="-122"/>
                 <a:cs typeface="Georgia" pitchFamily="34" charset="-120"/>
               </a:rPr>
-              <a:t>Citation(s) used in this lesson</a:t>
+              <a:t>Core (20 min) (cont.)</a:t>
             </a:r>
             <a:endParaRPr lang="en-US" sz="1800" dirty="0"/>
           </a:p>
@@ -3231,7 +3680,7 @@
         <p:spPr>
           <a:xfrm>
             <a:off x="634901" y="883593"/>
-            <a:ext cx="8102798" cy="487561"/>
+            <a:ext cx="8102798" cy="281880"/>
           </a:xfrm>
           <a:prstGeom prst="rect">
             <a:avLst/>
@@ -3254,35 +3703,15 @@
               <a:buChar char="•"/>
             </a:pPr>
             <a:r>
-              <a:rPr lang="en-US" sz="1200" i="1" dirty="0">
-                <a:solidFill>
-                  <a:srgbClr val="1C2833"/>
-                </a:solidFill>
-                <a:latin typeface="Arial" pitchFamily="34" charset="0"/>
-                <a:ea typeface="Arial" pitchFamily="34" charset="-122"/>
-                <a:cs typeface="Arial" pitchFamily="34" charset="-120"/>
-              </a:rPr>
-              <a:t>Azadirachta indica</a:t>
-            </a:r>
-            <a:pPr algn="l" indent="0" marL="0">
-              <a:lnSpc>
-                <a:spcPts val="1620"/>
-              </a:lnSpc>
-              <a:spcAft>
-                <a:spcPts val="300"/>
-              </a:spcAft>
-              <a:buNone/>
-            </a:pPr>
-            <a:r>
-              <a:rPr lang="en-US" sz="1200" dirty="0">
-                <a:solidFill>
-                  <a:srgbClr val="1C2833"/>
-                </a:solidFill>
-                <a:latin typeface="Arial" pitchFamily="34" charset="0"/>
-                <a:ea typeface="Arial" pitchFamily="34" charset="-122"/>
-                <a:cs typeface="Arial" pitchFamily="34" charset="-120"/>
-              </a:rPr>
-              <a:t> and azadirachtin as principal limonoid: standard ethnobotanical and pharmacognosy textbook content.</a:t>
+              <a:rPr lang="en-US" sz="1200" b="1" dirty="0">
+                <a:solidFill>
+                  <a:srgbClr val="1C2833"/>
+                </a:solidFill>
+                <a:latin typeface="Arial" pitchFamily="34" charset="0"/>
+                <a:ea typeface="Arial" pitchFamily="34" charset="-122"/>
+                <a:cs typeface="Arial" pitchFamily="34" charset="-120"/>
+              </a:rPr>
+              <a:t>What's it in, that we DO use?</a:t>
             </a:r>
             <a:endParaRPr lang="en-US" sz="1200" dirty="0"/>
           </a:p>
@@ -3296,8 +3725,8 @@
         </p:nvSpPr>
         <p:spPr>
           <a:xfrm>
-            <a:off x="406301" y="1460004"/>
-            <a:ext cx="8498026" cy="426541"/>
+            <a:off x="634901" y="1266974"/>
+            <a:ext cx="8102798" cy="975122"/>
           </a:xfrm>
           <a:prstGeom prst="rect">
             <a:avLst/>
@@ -3309,6 +3738,100 @@
           <a:bodyPr wrap="square" lIns="0" tIns="0" rIns="0" bIns="0" rtlCol="0" anchor="t"/>
           <a:lstStyle/>
           <a:p>
+            <a:pPr algn="l" marL="342900" indent="-342900">
+              <a:lnSpc>
+                <a:spcPts val="1620"/>
+              </a:lnSpc>
+              <a:spcAft>
+                <a:spcPts val="300"/>
+              </a:spcAft>
+              <a:buSzPct val="100000"/>
+              <a:buChar char="•"/>
+            </a:pPr>
+            <a:r>
+              <a:rPr lang="en-US" sz="1200" dirty="0">
+                <a:solidFill>
+                  <a:srgbClr val="1C2833"/>
+                </a:solidFill>
+                <a:latin typeface="Arial" pitchFamily="34" charset="0"/>
+                <a:ea typeface="Arial" pitchFamily="34" charset="-122"/>
+                <a:cs typeface="Arial" pitchFamily="34" charset="-120"/>
+              </a:rPr>
+              <a:t>Neem-based soap, shampoo, toothpaste — fine for external use as marketed.</a:t>
+            </a:r>
+            <a:endParaRPr lang="en-US" sz="1200" dirty="0"/>
+          </a:p>
+          <a:p>
+            <a:pPr algn="l" marL="342900" indent="-342900">
+              <a:lnSpc>
+                <a:spcPts val="1620"/>
+              </a:lnSpc>
+              <a:spcAft>
+                <a:spcPts val="300"/>
+              </a:spcAft>
+              <a:buSzPct val="100000"/>
+              <a:buChar char="•"/>
+            </a:pPr>
+            <a:r>
+              <a:rPr lang="en-US" sz="1200" dirty="0">
+                <a:solidFill>
+                  <a:srgbClr val="1C2833"/>
+                </a:solidFill>
+                <a:latin typeface="Arial" pitchFamily="34" charset="0"/>
+                <a:ea typeface="Arial" pitchFamily="34" charset="-122"/>
+                <a:cs typeface="Arial" pitchFamily="34" charset="-120"/>
+              </a:rPr>
+              <a:t>Neem oil for plants — used as agricultural pest control. Read the label.</a:t>
+            </a:r>
+            <a:endParaRPr lang="en-US" sz="1200" dirty="0"/>
+          </a:p>
+          <a:p>
+            <a:pPr algn="l" marL="342900" indent="-342900">
+              <a:lnSpc>
+                <a:spcPts val="1620"/>
+              </a:lnSpc>
+              <a:spcAft>
+                <a:spcPts val="300"/>
+              </a:spcAft>
+              <a:buSzPct val="100000"/>
+              <a:buChar char="•"/>
+            </a:pPr>
+            <a:r>
+              <a:rPr lang="en-US" sz="1200" dirty="0">
+                <a:solidFill>
+                  <a:srgbClr val="1C2833"/>
+                </a:solidFill>
+                <a:latin typeface="Arial" pitchFamily="34" charset="0"/>
+                <a:ea typeface="Arial" pitchFamily="34" charset="-122"/>
+                <a:cs typeface="Arial" pitchFamily="34" charset="-120"/>
+              </a:rPr>
+              <a:t>Neem twigs as toothbrushes — a long-standing dental tradition with modern dentistry's mixed view (some plaque-reducing benefit; abrasive enamel concern if used too often).</a:t>
+            </a:r>
+            <a:endParaRPr lang="en-US" sz="1200" dirty="0"/>
+          </a:p>
+        </p:txBody>
+      </p:sp>
+      <p:sp>
+        <p:nvSpPr>
+          <p:cNvPr id="6" name="Text 4"/>
+          <p:cNvSpPr/>
+          <p:nvPr/>
+        </p:nvSpPr>
+        <p:spPr>
+          <a:xfrm>
+            <a:off x="406301" y="4434929"/>
+            <a:ext cx="8498026" cy="213271"/>
+          </a:xfrm>
+          <a:prstGeom prst="rect">
+            <a:avLst/>
+          </a:prstGeom>
+          <a:noFill/>
+          <a:ln/>
+        </p:spPr>
+        <p:txBody>
+          <a:bodyPr wrap="square" lIns="0" tIns="0" rIns="0" bIns="0" rtlCol="0" anchor="t"/>
+          <a:lstStyle/>
+          <a:p>
             <a:pPr algn="l" indent="0" marL="0">
               <a:lnSpc>
                 <a:spcPts val="1680"/>
@@ -3330,15 +3853,2174 @@
                 <a:ea typeface="Arial" pitchFamily="34" charset="-122"/>
                 <a:cs typeface="Arial" pitchFamily="34" charset="-120"/>
               </a:rPr>
-              <a:t>– Neem oil hepatotoxicity: documented in published case reports in pediatric toxicology literature. We do not cite a specific paper here — teachers who want to deepen this should search "margosa oil hepatotoxicity case report" in PubMed.</a:t>
+              <a:t>Middle ·  · IKS Curriculum</a:t>
             </a:r>
             <a:endParaRPr lang="en-US" sz="1200" dirty="0"/>
           </a:p>
         </p:txBody>
       </p:sp>
+    </p:spTree>
+  </p:cSld>
+  <p:clrMapOvr>
+    <a:masterClrMapping/>
+  </p:clrMapOvr>
+</p:sld>
+</file>
+
+<file path=ppt/slides/slide13.xml><?xml version="1.0" encoding="utf-8"?>
+<p:sld xmlns:a="http://schemas.openxmlformats.org/drawingml/2006/main" xmlns:r="http://schemas.openxmlformats.org/officeDocument/2006/relationships" xmlns:p="http://schemas.openxmlformats.org/presentationml/2006/main">
+  <p:cSld name="Slide 13">
+    <p:bg>
+      <p:bgPr>
+        <a:solidFill>
+          <a:srgbClr val="FFFFFF"/>
+        </a:solidFill>
+      </p:bgPr>
+    </p:bg>
+    <p:spTree>
+      <p:nvGrpSpPr>
+        <p:cNvPr id="1" name=""/>
+        <p:cNvGrpSpPr/>
+        <p:nvPr/>
+      </p:nvGrpSpPr>
+      <p:grpSpPr>
+        <a:xfrm>
+          <a:off x="0" y="0"/>
+          <a:ext cx="0" cy="0"/>
+          <a:chOff x="0" y="0"/>
+          <a:chExt cx="0" cy="0"/>
+        </a:xfrm>
+      </p:grpSpPr>
+      <p:sp>
+        <p:nvSpPr>
+          <p:cNvPr id="2" name="Text 0"/>
+          <p:cNvSpPr/>
+          <p:nvPr/>
+        </p:nvSpPr>
+        <p:spPr>
+          <a:xfrm>
+            <a:off x="0" y="0"/>
+            <a:ext cx="9144000" cy="101501"/>
+          </a:xfrm>
+          <a:prstGeom prst="rect">
+            <a:avLst/>
+          </a:prstGeom>
+          <a:solidFill>
+            <a:srgbClr val="277884"/>
+          </a:solidFill>
+          <a:ln/>
+        </p:spPr>
+        <p:txBody>
+          <a:bodyPr wrap="square" rtlCol="0" anchor="ctr"/>
+          <a:lstStyle/>
+          <a:p>
+            <a:pPr indent="0" marL="0">
+              <a:buNone/>
+            </a:pPr>
+            <a:endParaRPr lang="en-US" dirty="0"/>
+          </a:p>
+        </p:txBody>
+      </p:sp>
+      <p:sp>
+        <p:nvSpPr>
+          <p:cNvPr id="3" name="Text 1"/>
+          <p:cNvSpPr/>
+          <p:nvPr/>
+        </p:nvSpPr>
+        <p:spPr>
+          <a:xfrm>
+            <a:off x="406301" y="457051"/>
+            <a:ext cx="8498026" cy="274290"/>
+          </a:xfrm>
+          <a:prstGeom prst="rect">
+            <a:avLst/>
+          </a:prstGeom>
+          <a:noFill/>
+          <a:ln/>
+        </p:spPr>
+        <p:txBody>
+          <a:bodyPr wrap="square" lIns="0" tIns="0" rIns="0" bIns="0" rtlCol="0" anchor="t"/>
+          <a:lstStyle/>
+          <a:p>
+            <a:pPr algn="l" indent="0" marL="0">
+              <a:lnSpc>
+                <a:spcPts val="2160"/>
+              </a:lnSpc>
+              <a:spcBef>
+                <a:spcPts val="600"/>
+              </a:spcBef>
+              <a:spcAft>
+                <a:spcPts val="800"/>
+              </a:spcAft>
+              <a:buNone/>
+            </a:pPr>
+            <a:r>
+              <a:rPr lang="en-US" sz="1800" b="1" dirty="0">
+                <a:solidFill>
+                  <a:srgbClr val="FE4447"/>
+                </a:solidFill>
+                <a:latin typeface="Georgia" pitchFamily="34" charset="0"/>
+                <a:ea typeface="Georgia" pitchFamily="34" charset="-122"/>
+                <a:cs typeface="Georgia" pitchFamily="34" charset="-120"/>
+              </a:rPr>
+              <a:t>Activity (15 min) — Formative Quiz Part A + Compound-leaf sketch</a:t>
+            </a:r>
+            <a:endParaRPr lang="en-US" sz="1800" dirty="0"/>
+          </a:p>
+        </p:txBody>
+      </p:sp>
+      <p:sp>
+        <p:nvSpPr>
+          <p:cNvPr id="4" name="Text 2"/>
+          <p:cNvSpPr/>
+          <p:nvPr/>
+        </p:nvSpPr>
+        <p:spPr>
+          <a:xfrm>
+            <a:off x="406301" y="870942"/>
+            <a:ext cx="8498026" cy="436066"/>
+          </a:xfrm>
+          <a:prstGeom prst="rect">
+            <a:avLst/>
+          </a:prstGeom>
+          <a:noFill/>
+          <a:ln/>
+        </p:spPr>
+        <p:txBody>
+          <a:bodyPr wrap="square" lIns="0" tIns="0" rIns="0" bIns="0" rtlCol="0" anchor="t"/>
+          <a:lstStyle/>
+          <a:p>
+            <a:pPr algn="l" indent="0" marL="0">
+              <a:lnSpc>
+                <a:spcPts val="1680"/>
+              </a:lnSpc>
+              <a:spcBef>
+                <a:spcPts val="300"/>
+              </a:spcBef>
+              <a:spcAft>
+                <a:spcPts val="300"/>
+              </a:spcAft>
+              <a:buNone/>
+            </a:pPr>
+            <a:r>
+              <a:rPr lang="en-US" sz="1200" b="1" dirty="0">
+                <a:solidFill>
+                  <a:srgbClr val="1C2833"/>
+                </a:solidFill>
+                <a:latin typeface="Arial" pitchFamily="34" charset="0"/>
+                <a:ea typeface="Arial" pitchFamily="34" charset="-122"/>
+                <a:cs typeface="Arial" pitchFamily="34" charset="-120"/>
+              </a:rPr>
+              <a:t>First 5 min — Formative Quiz Part A</a:t>
+            </a:r>
+            <a:pPr algn="l" indent="0" marL="0">
+              <a:lnSpc>
+                <a:spcPts val="1680"/>
+              </a:lnSpc>
+              <a:spcBef>
+                <a:spcPts val="300"/>
+              </a:spcBef>
+              <a:spcAft>
+                <a:spcPts val="300"/>
+              </a:spcAft>
+              <a:buNone/>
+            </a:pPr>
+            <a:r>
+              <a:rPr lang="en-US" sz="1200" dirty="0">
+                <a:solidFill>
+                  <a:srgbClr val="1C2833"/>
+                </a:solidFill>
+                <a:latin typeface="Arial" pitchFamily="34" charset="0"/>
+                <a:ea typeface="Arial" pitchFamily="34" charset="-122"/>
+                <a:cs typeface="Arial" pitchFamily="34" charset="-120"/>
+              </a:rPr>
+              <a:t> (from </a:t>
+            </a:r>
+            <a:pPr algn="l" indent="0" marL="0">
+              <a:lnSpc>
+                <a:spcPts val="1680"/>
+              </a:lnSpc>
+              <a:spcBef>
+                <a:spcPts val="300"/>
+              </a:spcBef>
+              <a:spcAft>
+                <a:spcPts val="300"/>
+              </a:spcAft>
+              <a:buNone/>
+            </a:pPr>
+            <a:r>
+              <a:rPr lang="en-US" sz="1200" dirty="0">
+                <a:solidFill>
+                  <a:srgbClr val="1C2833"/>
+                </a:solidFill>
+                <a:latin typeface="Arial" pitchFamily="34" charset="0"/>
+                <a:ea typeface="Arial" pitchFamily="34" charset="-122"/>
+                <a:cs typeface="Arial" pitchFamily="34" charset="-120"/>
+              </a:rPr>
+              <a:t>quizzes/formative.md</a:t>
+            </a:r>
+            <a:pPr algn="l" indent="0" marL="0">
+              <a:lnSpc>
+                <a:spcPts val="1680"/>
+              </a:lnSpc>
+              <a:spcBef>
+                <a:spcPts val="300"/>
+              </a:spcBef>
+              <a:spcAft>
+                <a:spcPts val="300"/>
+              </a:spcAft>
+              <a:buNone/>
+            </a:pPr>
+            <a:r>
+              <a:rPr lang="en-US" sz="1200" dirty="0">
+                <a:solidFill>
+                  <a:srgbClr val="1C2833"/>
+                </a:solidFill>
+                <a:latin typeface="Arial" pitchFamily="34" charset="0"/>
+                <a:ea typeface="Arial" pitchFamily="34" charset="-122"/>
+                <a:cs typeface="Arial" pitchFamily="34" charset="-120"/>
+              </a:rPr>
+              <a:t>). Hand out the 5-question slip. Pencils only. Collect at minute 5.</a:t>
+            </a:r>
+            <a:endParaRPr lang="en-US" sz="1200" dirty="0"/>
+          </a:p>
+        </p:txBody>
+      </p:sp>
+      <p:sp>
+        <p:nvSpPr>
+          <p:cNvPr id="5" name="Text 3"/>
+          <p:cNvSpPr/>
+          <p:nvPr/>
+        </p:nvSpPr>
+        <p:spPr>
+          <a:xfrm>
+            <a:off x="406301" y="4434929"/>
+            <a:ext cx="8498026" cy="213271"/>
+          </a:xfrm>
+          <a:prstGeom prst="rect">
+            <a:avLst/>
+          </a:prstGeom>
+          <a:noFill/>
+          <a:ln/>
+        </p:spPr>
+        <p:txBody>
+          <a:bodyPr wrap="square" lIns="0" tIns="0" rIns="0" bIns="0" rtlCol="0" anchor="t"/>
+          <a:lstStyle/>
+          <a:p>
+            <a:pPr algn="l" indent="0" marL="0">
+              <a:lnSpc>
+                <a:spcPts val="1680"/>
+              </a:lnSpc>
+              <a:spcBef>
+                <a:spcPts val="300"/>
+              </a:spcBef>
+              <a:spcAft>
+                <a:spcPts val="300"/>
+              </a:spcAft>
+              <a:buNone/>
+            </a:pPr>
+            <a:r>
+              <a:rPr lang="en-US" sz="1200" dirty="0">
+                <a:solidFill>
+                  <a:srgbClr val="1C2833"/>
+                </a:solidFill>
+                <a:latin typeface="Arial" pitchFamily="34" charset="0"/>
+                <a:ea typeface="Arial" pitchFamily="34" charset="-122"/>
+                <a:cs typeface="Arial" pitchFamily="34" charset="-120"/>
+              </a:rPr>
+              <a:t>Middle ·  · IKS Curriculum</a:t>
+            </a:r>
+            <a:endParaRPr lang="en-US" sz="1200" dirty="0"/>
+          </a:p>
+        </p:txBody>
+      </p:sp>
+    </p:spTree>
+  </p:cSld>
+  <p:clrMapOvr>
+    <a:masterClrMapping/>
+  </p:clrMapOvr>
+</p:sld>
+</file>
+
+<file path=ppt/slides/slide14.xml><?xml version="1.0" encoding="utf-8"?>
+<p:sld xmlns:a="http://schemas.openxmlformats.org/drawingml/2006/main" xmlns:r="http://schemas.openxmlformats.org/officeDocument/2006/relationships" xmlns:p="http://schemas.openxmlformats.org/presentationml/2006/main">
+  <p:cSld name="Slide 14">
+    <p:bg>
+      <p:bgPr>
+        <a:solidFill>
+          <a:srgbClr val="FFFFFF"/>
+        </a:solidFill>
+      </p:bgPr>
+    </p:bg>
+    <p:spTree>
+      <p:nvGrpSpPr>
+        <p:cNvPr id="1" name=""/>
+        <p:cNvGrpSpPr/>
+        <p:nvPr/>
+      </p:nvGrpSpPr>
+      <p:grpSpPr>
+        <a:xfrm>
+          <a:off x="0" y="0"/>
+          <a:ext cx="0" cy="0"/>
+          <a:chOff x="0" y="0"/>
+          <a:chExt cx="0" cy="0"/>
+        </a:xfrm>
+      </p:grpSpPr>
+      <p:sp>
+        <p:nvSpPr>
+          <p:cNvPr id="2" name="Text 0"/>
+          <p:cNvSpPr/>
+          <p:nvPr/>
+        </p:nvSpPr>
+        <p:spPr>
+          <a:xfrm>
+            <a:off x="0" y="0"/>
+            <a:ext cx="9144000" cy="101501"/>
+          </a:xfrm>
+          <a:prstGeom prst="rect">
+            <a:avLst/>
+          </a:prstGeom>
+          <a:solidFill>
+            <a:srgbClr val="277884"/>
+          </a:solidFill>
+          <a:ln/>
+        </p:spPr>
+        <p:txBody>
+          <a:bodyPr wrap="square" rtlCol="0" anchor="ctr"/>
+          <a:lstStyle/>
+          <a:p>
+            <a:pPr indent="0" marL="0">
+              <a:buNone/>
+            </a:pPr>
+            <a:endParaRPr lang="en-US" dirty="0"/>
+          </a:p>
+        </p:txBody>
+      </p:sp>
+      <p:sp>
+        <p:nvSpPr>
+          <p:cNvPr id="3" name="Text 1"/>
+          <p:cNvSpPr/>
+          <p:nvPr/>
+        </p:nvSpPr>
+        <p:spPr>
+          <a:xfrm>
+            <a:off x="406301" y="457051"/>
+            <a:ext cx="8498026" cy="548580"/>
+          </a:xfrm>
+          <a:prstGeom prst="rect">
+            <a:avLst/>
+          </a:prstGeom>
+          <a:noFill/>
+          <a:ln/>
+        </p:spPr>
+        <p:txBody>
+          <a:bodyPr wrap="square" lIns="0" tIns="0" rIns="0" bIns="0" rtlCol="0" anchor="t"/>
+          <a:lstStyle/>
+          <a:p>
+            <a:pPr algn="l" indent="0" marL="0">
+              <a:lnSpc>
+                <a:spcPts val="2160"/>
+              </a:lnSpc>
+              <a:spcBef>
+                <a:spcPts val="600"/>
+              </a:spcBef>
+              <a:spcAft>
+                <a:spcPts val="800"/>
+              </a:spcAft>
+              <a:buNone/>
+            </a:pPr>
+            <a:r>
+              <a:rPr lang="en-US" sz="1800" b="1" dirty="0">
+                <a:solidFill>
+                  <a:srgbClr val="FE4447"/>
+                </a:solidFill>
+                <a:latin typeface="Georgia" pitchFamily="34" charset="0"/>
+                <a:ea typeface="Georgia" pitchFamily="34" charset="-122"/>
+                <a:cs typeface="Georgia" pitchFamily="34" charset="-120"/>
+              </a:rPr>
+              <a:t>Activity (15 min) — Formative Quiz Part A + Compound-leaf sketch (cont.)</a:t>
+            </a:r>
+            <a:endParaRPr lang="en-US" sz="1800" dirty="0"/>
+          </a:p>
+        </p:txBody>
+      </p:sp>
+      <p:sp>
+        <p:nvSpPr>
+          <p:cNvPr id="4" name="Text 2"/>
+          <p:cNvSpPr/>
+          <p:nvPr/>
+        </p:nvSpPr>
+        <p:spPr>
+          <a:xfrm>
+            <a:off x="406301" y="1145232"/>
+            <a:ext cx="8498026" cy="213271"/>
+          </a:xfrm>
+          <a:prstGeom prst="rect">
+            <a:avLst/>
+          </a:prstGeom>
+          <a:noFill/>
+          <a:ln/>
+        </p:spPr>
+        <p:txBody>
+          <a:bodyPr wrap="square" lIns="0" tIns="0" rIns="0" bIns="0" rtlCol="0" anchor="t"/>
+          <a:lstStyle/>
+          <a:p>
+            <a:pPr algn="l" indent="0" marL="0">
+              <a:lnSpc>
+                <a:spcPts val="1680"/>
+              </a:lnSpc>
+              <a:spcBef>
+                <a:spcPts val="300"/>
+              </a:spcBef>
+              <a:spcAft>
+                <a:spcPts val="300"/>
+              </a:spcAft>
+              <a:buNone/>
+            </a:pPr>
+            <a:r>
+              <a:rPr lang="en-US" sz="1200" b="1" dirty="0">
+                <a:solidFill>
+                  <a:srgbClr val="1C2833"/>
+                </a:solidFill>
+                <a:latin typeface="Arial" pitchFamily="34" charset="0"/>
+                <a:ea typeface="Arial" pitchFamily="34" charset="-122"/>
+                <a:cs typeface="Arial" pitchFamily="34" charset="-120"/>
+              </a:rPr>
+              <a:t>Next 10 min — Compound-leaf sketch.</a:t>
+            </a:r>
+            <a:endParaRPr lang="en-US" sz="1200" dirty="0"/>
+          </a:p>
+        </p:txBody>
+      </p:sp>
+      <p:sp>
+        <p:nvSpPr>
+          <p:cNvPr id="5" name="Text 3"/>
+          <p:cNvSpPr/>
+          <p:nvPr/>
+        </p:nvSpPr>
+        <p:spPr>
+          <a:xfrm>
+            <a:off x="634901" y="1447354"/>
+            <a:ext cx="8102798" cy="1950244"/>
+          </a:xfrm>
+          <a:prstGeom prst="rect">
+            <a:avLst/>
+          </a:prstGeom>
+          <a:noFill/>
+          <a:ln/>
+        </p:spPr>
+        <p:txBody>
+          <a:bodyPr wrap="square" lIns="0" tIns="0" rIns="0" bIns="0" rtlCol="0" anchor="t"/>
+          <a:lstStyle/>
+          <a:p>
+            <a:pPr algn="l" marL="342900" indent="-342900">
+              <a:lnSpc>
+                <a:spcPts val="1620"/>
+              </a:lnSpc>
+              <a:spcAft>
+                <a:spcPts val="300"/>
+              </a:spcAft>
+              <a:buSzPct val="100000"/>
+              <a:buChar char="•"/>
+            </a:pPr>
+            <a:r>
+              <a:rPr lang="en-US" sz="1200" dirty="0">
+                <a:solidFill>
+                  <a:srgbClr val="1C2833"/>
+                </a:solidFill>
+                <a:latin typeface="Arial" pitchFamily="34" charset="0"/>
+                <a:ea typeface="Arial" pitchFamily="34" charset="-122"/>
+                <a:cs typeface="Arial" pitchFamily="34" charset="-120"/>
+              </a:rPr>
+              <a:t>Each student draws a neem compound leaf from observation (or from the photo if no live sample). Label the rachis (central stem), the leaflets, the serrate edges.</a:t>
+            </a:r>
+            <a:endParaRPr lang="en-US" sz="1200" dirty="0"/>
+          </a:p>
+          <a:p>
+            <a:pPr algn="l" marL="342900" indent="-342900">
+              <a:lnSpc>
+                <a:spcPts val="1620"/>
+              </a:lnSpc>
+              <a:spcAft>
+                <a:spcPts val="300"/>
+              </a:spcAft>
+              <a:buSzPct val="100000"/>
+              <a:buChar char="•"/>
+            </a:pPr>
+            <a:r>
+              <a:rPr lang="en-US" sz="1200" dirty="0">
+                <a:solidFill>
+                  <a:srgbClr val="1C2833"/>
+                </a:solidFill>
+                <a:latin typeface="Arial" pitchFamily="34" charset="0"/>
+                <a:ea typeface="Arial" pitchFamily="34" charset="-122"/>
+                <a:cs typeface="Arial" pitchFamily="34" charset="-120"/>
+              </a:rPr>
+              <a:t>Below the drawing, label:</a:t>
+            </a:r>
+            <a:endParaRPr lang="en-US" sz="1200" dirty="0"/>
+          </a:p>
+          <a:p>
+            <a:pPr algn="l" marL="342900" indent="-342900">
+              <a:lnSpc>
+                <a:spcPts val="1620"/>
+              </a:lnSpc>
+              <a:spcAft>
+                <a:spcPts val="300"/>
+              </a:spcAft>
+              <a:buSzPct val="100000"/>
+              <a:buChar char="•"/>
+            </a:pPr>
+            <a:r>
+              <a:rPr lang="en-US" sz="1200" b="1" dirty="0">
+                <a:solidFill>
+                  <a:srgbClr val="1C2833"/>
+                </a:solidFill>
+                <a:latin typeface="Arial" pitchFamily="34" charset="0"/>
+                <a:ea typeface="Arial" pitchFamily="34" charset="-122"/>
+                <a:cs typeface="Arial" pitchFamily="34" charset="-120"/>
+              </a:rPr>
+              <a:t>Sanskrit name:</a:t>
+            </a:r>
+            <a:pPr algn="l" indent="0" marL="0">
+              <a:lnSpc>
+                <a:spcPts val="1620"/>
+              </a:lnSpc>
+              <a:spcAft>
+                <a:spcPts val="300"/>
+              </a:spcAft>
+              <a:buNone/>
+            </a:pPr>
+            <a:r>
+              <a:rPr lang="en-US" sz="1200" dirty="0">
+                <a:solidFill>
+                  <a:srgbClr val="1C2833"/>
+                </a:solidFill>
+                <a:latin typeface="Arial" pitchFamily="34" charset="0"/>
+                <a:ea typeface="Arial" pitchFamily="34" charset="-122"/>
+                <a:cs typeface="Arial" pitchFamily="34" charset="-120"/>
+              </a:rPr>
+              <a:t> </a:t>
+            </a:r>
+            <a:pPr algn="l" indent="0" marL="0">
+              <a:lnSpc>
+                <a:spcPts val="1620"/>
+              </a:lnSpc>
+              <a:spcAft>
+                <a:spcPts val="300"/>
+              </a:spcAft>
+              <a:buNone/>
+            </a:pPr>
+            <a:r>
+              <a:rPr lang="en-US" sz="1200" i="1" dirty="0">
+                <a:solidFill>
+                  <a:srgbClr val="1C2833"/>
+                </a:solidFill>
+                <a:latin typeface="Arial" pitchFamily="34" charset="0"/>
+                <a:ea typeface="Arial" pitchFamily="34" charset="-122"/>
+                <a:cs typeface="Arial" pitchFamily="34" charset="-120"/>
+              </a:rPr>
+              <a:t>nimba</a:t>
+            </a:r>
+            <a:endParaRPr lang="en-US" sz="1200" dirty="0"/>
+          </a:p>
+          <a:p>
+            <a:pPr algn="l" marL="342900" indent="-342900">
+              <a:lnSpc>
+                <a:spcPts val="1620"/>
+              </a:lnSpc>
+              <a:spcAft>
+                <a:spcPts val="300"/>
+              </a:spcAft>
+              <a:buSzPct val="100000"/>
+              <a:buChar char="•"/>
+            </a:pPr>
+            <a:r>
+              <a:rPr lang="en-US" sz="1200" b="1" dirty="0">
+                <a:solidFill>
+                  <a:srgbClr val="1C2833"/>
+                </a:solidFill>
+                <a:latin typeface="Arial" pitchFamily="34" charset="0"/>
+                <a:ea typeface="Arial" pitchFamily="34" charset="-122"/>
+                <a:cs typeface="Arial" pitchFamily="34" charset="-120"/>
+              </a:rPr>
+              <a:t>Botanical name:</a:t>
+            </a:r>
+            <a:pPr algn="l" indent="0" marL="0">
+              <a:lnSpc>
+                <a:spcPts val="1620"/>
+              </a:lnSpc>
+              <a:spcAft>
+                <a:spcPts val="300"/>
+              </a:spcAft>
+              <a:buNone/>
+            </a:pPr>
+            <a:r>
+              <a:rPr lang="en-US" sz="1200" dirty="0">
+                <a:solidFill>
+                  <a:srgbClr val="1C2833"/>
+                </a:solidFill>
+                <a:latin typeface="Arial" pitchFamily="34" charset="0"/>
+                <a:ea typeface="Arial" pitchFamily="34" charset="-122"/>
+                <a:cs typeface="Arial" pitchFamily="34" charset="-120"/>
+              </a:rPr>
+              <a:t> </a:t>
+            </a:r>
+            <a:pPr algn="l" indent="0" marL="0">
+              <a:lnSpc>
+                <a:spcPts val="1620"/>
+              </a:lnSpc>
+              <a:spcAft>
+                <a:spcPts val="300"/>
+              </a:spcAft>
+              <a:buNone/>
+            </a:pPr>
+            <a:r>
+              <a:rPr lang="en-US" sz="1200" i="1" dirty="0">
+                <a:solidFill>
+                  <a:srgbClr val="1C2833"/>
+                </a:solidFill>
+                <a:latin typeface="Arial" pitchFamily="34" charset="0"/>
+                <a:ea typeface="Arial" pitchFamily="34" charset="-122"/>
+                <a:cs typeface="Arial" pitchFamily="34" charset="-120"/>
+              </a:rPr>
+              <a:t>Azadirachta indica</a:t>
+            </a:r>
+            <a:endParaRPr lang="en-US" sz="1200" dirty="0"/>
+          </a:p>
+          <a:p>
+            <a:pPr algn="l" marL="342900" indent="-342900">
+              <a:lnSpc>
+                <a:spcPts val="1620"/>
+              </a:lnSpc>
+              <a:spcAft>
+                <a:spcPts val="300"/>
+              </a:spcAft>
+              <a:buSzPct val="100000"/>
+              <a:buChar char="•"/>
+            </a:pPr>
+            <a:r>
+              <a:rPr lang="en-US" sz="1200" b="1" dirty="0">
+                <a:solidFill>
+                  <a:srgbClr val="1C2833"/>
+                </a:solidFill>
+                <a:latin typeface="Arial" pitchFamily="34" charset="0"/>
+                <a:ea typeface="Arial" pitchFamily="34" charset="-122"/>
+                <a:cs typeface="Arial" pitchFamily="34" charset="-120"/>
+              </a:rPr>
+              <a:t>Taste class:</a:t>
+            </a:r>
+            <a:pPr algn="l" indent="0" marL="0">
+              <a:lnSpc>
+                <a:spcPts val="1620"/>
+              </a:lnSpc>
+              <a:spcAft>
+                <a:spcPts val="300"/>
+              </a:spcAft>
+              <a:buNone/>
+            </a:pPr>
+            <a:r>
+              <a:rPr lang="en-US" sz="1200" dirty="0">
+                <a:solidFill>
+                  <a:srgbClr val="1C2833"/>
+                </a:solidFill>
+                <a:latin typeface="Arial" pitchFamily="34" charset="0"/>
+                <a:ea typeface="Arial" pitchFamily="34" charset="-122"/>
+                <a:cs typeface="Arial" pitchFamily="34" charset="-120"/>
+              </a:rPr>
+              <a:t> </a:t>
+            </a:r>
+            <a:pPr algn="l" indent="0" marL="0">
+              <a:lnSpc>
+                <a:spcPts val="1620"/>
+              </a:lnSpc>
+              <a:spcAft>
+                <a:spcPts val="300"/>
+              </a:spcAft>
+              <a:buNone/>
+            </a:pPr>
+            <a:r>
+              <a:rPr lang="en-US" sz="1200" i="1" dirty="0">
+                <a:solidFill>
+                  <a:srgbClr val="1C2833"/>
+                </a:solidFill>
+                <a:latin typeface="Arial" pitchFamily="34" charset="0"/>
+                <a:ea typeface="Arial" pitchFamily="34" charset="-122"/>
+                <a:cs typeface="Arial" pitchFamily="34" charset="-120"/>
+              </a:rPr>
+              <a:t>tikta</a:t>
+            </a:r>
+            <a:pPr algn="l" indent="0" marL="0">
+              <a:lnSpc>
+                <a:spcPts val="1620"/>
+              </a:lnSpc>
+              <a:spcAft>
+                <a:spcPts val="300"/>
+              </a:spcAft>
+              <a:buNone/>
+            </a:pPr>
+            <a:r>
+              <a:rPr lang="en-US" sz="1200" dirty="0">
+                <a:solidFill>
+                  <a:srgbClr val="1C2833"/>
+                </a:solidFill>
+                <a:latin typeface="Arial" pitchFamily="34" charset="0"/>
+                <a:ea typeface="Arial" pitchFamily="34" charset="-122"/>
+                <a:cs typeface="Arial" pitchFamily="34" charset="-120"/>
+              </a:rPr>
+              <a:t> (bitter)</a:t>
+            </a:r>
+            <a:endParaRPr lang="en-US" sz="1200" dirty="0"/>
+          </a:p>
+          <a:p>
+            <a:pPr algn="l" marL="342900" indent="-342900">
+              <a:lnSpc>
+                <a:spcPts val="1620"/>
+              </a:lnSpc>
+              <a:spcAft>
+                <a:spcPts val="300"/>
+              </a:spcAft>
+              <a:buSzPct val="100000"/>
+              <a:buChar char="•"/>
+            </a:pPr>
+            <a:r>
+              <a:rPr lang="en-US" sz="1200" b="1" dirty="0">
+                <a:solidFill>
+                  <a:srgbClr val="1C2833"/>
+                </a:solidFill>
+                <a:latin typeface="Arial" pitchFamily="34" charset="0"/>
+                <a:ea typeface="Arial" pitchFamily="34" charset="-122"/>
+                <a:cs typeface="Arial" pitchFamily="34" charset="-120"/>
+              </a:rPr>
+              <a:t>Active compound:</a:t>
+            </a:r>
+            <a:pPr algn="l" indent="0" marL="0">
+              <a:lnSpc>
+                <a:spcPts val="1620"/>
+              </a:lnSpc>
+              <a:spcAft>
+                <a:spcPts val="300"/>
+              </a:spcAft>
+              <a:buNone/>
+            </a:pPr>
+            <a:r>
+              <a:rPr lang="en-US" sz="1200" dirty="0">
+                <a:solidFill>
+                  <a:srgbClr val="1C2833"/>
+                </a:solidFill>
+                <a:latin typeface="Arial" pitchFamily="34" charset="0"/>
+                <a:ea typeface="Arial" pitchFamily="34" charset="-122"/>
+                <a:cs typeface="Arial" pitchFamily="34" charset="-120"/>
+              </a:rPr>
+              <a:t> azadirachtin</a:t>
+            </a:r>
+            <a:endParaRPr lang="en-US" sz="1200" dirty="0"/>
+          </a:p>
+          <a:p>
+            <a:pPr algn="l" marL="342900" indent="-342900">
+              <a:lnSpc>
+                <a:spcPts val="1620"/>
+              </a:lnSpc>
+              <a:spcAft>
+                <a:spcPts val="300"/>
+              </a:spcAft>
+              <a:buSzPct val="100000"/>
+              <a:buChar char="•"/>
+            </a:pPr>
+            <a:r>
+              <a:rPr lang="en-US" sz="1200" b="1" dirty="0">
+                <a:solidFill>
+                  <a:srgbClr val="1C2833"/>
+                </a:solidFill>
+                <a:latin typeface="Arial" pitchFamily="34" charset="0"/>
+                <a:ea typeface="Arial" pitchFamily="34" charset="-122"/>
+                <a:cs typeface="Arial" pitchFamily="34" charset="-120"/>
+              </a:rPr>
+              <a:t>Safety:</a:t>
+            </a:r>
+            <a:pPr algn="l" indent="0" marL="0">
+              <a:lnSpc>
+                <a:spcPts val="1620"/>
+              </a:lnSpc>
+              <a:spcAft>
+                <a:spcPts val="300"/>
+              </a:spcAft>
+              <a:buNone/>
+            </a:pPr>
+            <a:r>
+              <a:rPr lang="en-US" sz="1200" dirty="0">
+                <a:solidFill>
+                  <a:srgbClr val="1C2833"/>
+                </a:solidFill>
+                <a:latin typeface="Arial" pitchFamily="34" charset="0"/>
+                <a:ea typeface="Arial" pitchFamily="34" charset="-122"/>
+                <a:cs typeface="Arial" pitchFamily="34" charset="-120"/>
+              </a:rPr>
+              <a:t> </a:t>
+            </a:r>
+            <a:pPr algn="l" indent="0" marL="0">
+              <a:lnSpc>
+                <a:spcPts val="1620"/>
+              </a:lnSpc>
+              <a:spcAft>
+                <a:spcPts val="300"/>
+              </a:spcAft>
+              <a:buNone/>
+            </a:pPr>
+            <a:r>
+              <a:rPr lang="en-US" sz="1200" i="1" dirty="0">
+                <a:solidFill>
+                  <a:srgbClr val="1C2833"/>
+                </a:solidFill>
+                <a:latin typeface="Arial" pitchFamily="34" charset="0"/>
+                <a:ea typeface="Arial" pitchFamily="34" charset="-122"/>
+                <a:cs typeface="Arial" pitchFamily="34" charset="-120"/>
+              </a:rPr>
+              <a:t>not for ingestion in concentrated form</a:t>
+            </a:r>
+            <a:endParaRPr lang="en-US" sz="1200" dirty="0"/>
+          </a:p>
+        </p:txBody>
+      </p:sp>
       <p:sp>
         <p:nvSpPr>
           <p:cNvPr id="6" name="Text 4"/>
+          <p:cNvSpPr/>
+          <p:nvPr/>
+        </p:nvSpPr>
+        <p:spPr>
+          <a:xfrm>
+            <a:off x="406301" y="4434929"/>
+            <a:ext cx="8498026" cy="213271"/>
+          </a:xfrm>
+          <a:prstGeom prst="rect">
+            <a:avLst/>
+          </a:prstGeom>
+          <a:noFill/>
+          <a:ln/>
+        </p:spPr>
+        <p:txBody>
+          <a:bodyPr wrap="square" lIns="0" tIns="0" rIns="0" bIns="0" rtlCol="0" anchor="t"/>
+          <a:lstStyle/>
+          <a:p>
+            <a:pPr algn="l" indent="0" marL="0">
+              <a:lnSpc>
+                <a:spcPts val="1680"/>
+              </a:lnSpc>
+              <a:spcBef>
+                <a:spcPts val="300"/>
+              </a:spcBef>
+              <a:spcAft>
+                <a:spcPts val="300"/>
+              </a:spcAft>
+              <a:buNone/>
+            </a:pPr>
+            <a:r>
+              <a:rPr lang="en-US" sz="1200" dirty="0">
+                <a:solidFill>
+                  <a:srgbClr val="1C2833"/>
+                </a:solidFill>
+                <a:latin typeface="Arial" pitchFamily="34" charset="0"/>
+                <a:ea typeface="Arial" pitchFamily="34" charset="-122"/>
+                <a:cs typeface="Arial" pitchFamily="34" charset="-120"/>
+              </a:rPr>
+              <a:t>Middle ·  · IKS Curriculum</a:t>
+            </a:r>
+            <a:endParaRPr lang="en-US" sz="1200" dirty="0"/>
+          </a:p>
+        </p:txBody>
+      </p:sp>
+    </p:spTree>
+  </p:cSld>
+  <p:clrMapOvr>
+    <a:masterClrMapping/>
+  </p:clrMapOvr>
+</p:sld>
+</file>
+
+<file path=ppt/slides/slide15.xml><?xml version="1.0" encoding="utf-8"?>
+<p:sld xmlns:a="http://schemas.openxmlformats.org/drawingml/2006/main" xmlns:r="http://schemas.openxmlformats.org/officeDocument/2006/relationships" xmlns:p="http://schemas.openxmlformats.org/presentationml/2006/main">
+  <p:cSld name="Slide 15">
+    <p:bg>
+      <p:bgPr>
+        <a:solidFill>
+          <a:srgbClr val="FFFFFF"/>
+        </a:solidFill>
+      </p:bgPr>
+    </p:bg>
+    <p:spTree>
+      <p:nvGrpSpPr>
+        <p:cNvPr id="1" name=""/>
+        <p:cNvGrpSpPr/>
+        <p:nvPr/>
+      </p:nvGrpSpPr>
+      <p:grpSpPr>
+        <a:xfrm>
+          <a:off x="0" y="0"/>
+          <a:ext cx="0" cy="0"/>
+          <a:chOff x="0" y="0"/>
+          <a:chExt cx="0" cy="0"/>
+        </a:xfrm>
+      </p:grpSpPr>
+      <p:sp>
+        <p:nvSpPr>
+          <p:cNvPr id="2" name="Text 0"/>
+          <p:cNvSpPr/>
+          <p:nvPr/>
+        </p:nvSpPr>
+        <p:spPr>
+          <a:xfrm>
+            <a:off x="0" y="0"/>
+            <a:ext cx="9144000" cy="101501"/>
+          </a:xfrm>
+          <a:prstGeom prst="rect">
+            <a:avLst/>
+          </a:prstGeom>
+          <a:solidFill>
+            <a:srgbClr val="277884"/>
+          </a:solidFill>
+          <a:ln/>
+        </p:spPr>
+        <p:txBody>
+          <a:bodyPr wrap="square" rtlCol="0" anchor="ctr"/>
+          <a:lstStyle/>
+          <a:p>
+            <a:pPr indent="0" marL="0">
+              <a:buNone/>
+            </a:pPr>
+            <a:endParaRPr lang="en-US" dirty="0"/>
+          </a:p>
+        </p:txBody>
+      </p:sp>
+      <p:sp>
+        <p:nvSpPr>
+          <p:cNvPr id="3" name="Text 1"/>
+          <p:cNvSpPr/>
+          <p:nvPr/>
+        </p:nvSpPr>
+        <p:spPr>
+          <a:xfrm>
+            <a:off x="406301" y="457051"/>
+            <a:ext cx="8498026" cy="274290"/>
+          </a:xfrm>
+          <a:prstGeom prst="rect">
+            <a:avLst/>
+          </a:prstGeom>
+          <a:noFill/>
+          <a:ln/>
+        </p:spPr>
+        <p:txBody>
+          <a:bodyPr wrap="square" lIns="0" tIns="0" rIns="0" bIns="0" rtlCol="0" anchor="t"/>
+          <a:lstStyle/>
+          <a:p>
+            <a:pPr algn="l" indent="0" marL="0">
+              <a:lnSpc>
+                <a:spcPts val="2160"/>
+              </a:lnSpc>
+              <a:spcBef>
+                <a:spcPts val="600"/>
+              </a:spcBef>
+              <a:spcAft>
+                <a:spcPts val="800"/>
+              </a:spcAft>
+              <a:buNone/>
+            </a:pPr>
+            <a:r>
+              <a:rPr lang="en-US" sz="1800" b="1" dirty="0">
+                <a:solidFill>
+                  <a:srgbClr val="FE4447"/>
+                </a:solidFill>
+                <a:latin typeface="Georgia" pitchFamily="34" charset="0"/>
+                <a:ea typeface="Georgia" pitchFamily="34" charset="-122"/>
+                <a:cs typeface="Georgia" pitchFamily="34" charset="-120"/>
+              </a:rPr>
+              <a:t>Wrap-up (5 min)</a:t>
+            </a:r>
+            <a:endParaRPr lang="en-US" sz="1800" dirty="0"/>
+          </a:p>
+        </p:txBody>
+      </p:sp>
+      <p:sp>
+        <p:nvSpPr>
+          <p:cNvPr id="4" name="Text 2"/>
+          <p:cNvSpPr/>
+          <p:nvPr/>
+        </p:nvSpPr>
+        <p:spPr>
+          <a:xfrm>
+            <a:off x="634901" y="883593"/>
+            <a:ext cx="8102798" cy="769441"/>
+          </a:xfrm>
+          <a:prstGeom prst="rect">
+            <a:avLst/>
+          </a:prstGeom>
+          <a:noFill/>
+          <a:ln/>
+        </p:spPr>
+        <p:txBody>
+          <a:bodyPr wrap="square" lIns="0" tIns="0" rIns="0" bIns="0" rtlCol="0" anchor="t"/>
+          <a:lstStyle/>
+          <a:p>
+            <a:pPr algn="l" marL="342900" indent="-342900">
+              <a:lnSpc>
+                <a:spcPts val="1620"/>
+              </a:lnSpc>
+              <a:spcAft>
+                <a:spcPts val="300"/>
+              </a:spcAft>
+              <a:buSzPct val="100000"/>
+              <a:buChar char="•"/>
+            </a:pPr>
+            <a:r>
+              <a:rPr lang="en-US" sz="1200" dirty="0">
+                <a:solidFill>
+                  <a:srgbClr val="1C2833"/>
+                </a:solidFill>
+                <a:latin typeface="Arial" pitchFamily="34" charset="0"/>
+                <a:ea typeface="Arial" pitchFamily="34" charset="-122"/>
+                <a:cs typeface="Arial" pitchFamily="34" charset="-120"/>
+              </a:rPr>
+              <a:t>Restate safety rule + the neem-specific warning chorally.</a:t>
+            </a:r>
+            <a:endParaRPr lang="en-US" sz="1200" dirty="0"/>
+          </a:p>
+          <a:p>
+            <a:pPr algn="l" marL="342900" indent="-342900">
+              <a:lnSpc>
+                <a:spcPts val="1620"/>
+              </a:lnSpc>
+              <a:spcAft>
+                <a:spcPts val="300"/>
+              </a:spcAft>
+              <a:buSzPct val="100000"/>
+              <a:buChar char="•"/>
+            </a:pPr>
+            <a:r>
+              <a:rPr lang="en-US" sz="1200" dirty="0">
+                <a:solidFill>
+                  <a:srgbClr val="1C2833"/>
+                </a:solidFill>
+                <a:latin typeface="Arial" pitchFamily="34" charset="0"/>
+                <a:ea typeface="Arial" pitchFamily="34" charset="-122"/>
+                <a:cs typeface="Arial" pitchFamily="34" charset="-120"/>
+              </a:rPr>
+              <a:t>Hand-back of Day 2 exit tickets if marked.</a:t>
+            </a:r>
+            <a:endParaRPr lang="en-US" sz="1200" dirty="0"/>
+          </a:p>
+          <a:p>
+            <a:pPr algn="l" marL="342900" indent="-342900">
+              <a:lnSpc>
+                <a:spcPts val="1620"/>
+              </a:lnSpc>
+              <a:spcAft>
+                <a:spcPts val="300"/>
+              </a:spcAft>
+              <a:buSzPct val="100000"/>
+              <a:buChar char="•"/>
+            </a:pPr>
+            <a:r>
+              <a:rPr lang="en-US" sz="1200" dirty="0">
+                <a:solidFill>
+                  <a:srgbClr val="1C2833"/>
+                </a:solidFill>
+                <a:latin typeface="Arial" pitchFamily="34" charset="0"/>
+                <a:ea typeface="Arial" pitchFamily="34" charset="-122"/>
+                <a:cs typeface="Arial" pitchFamily="34" charset="-120"/>
+              </a:rPr>
+              <a:t>Preview Day 4: </a:t>
+            </a:r>
+            <a:pPr algn="l" indent="0" marL="0">
+              <a:lnSpc>
+                <a:spcPts val="1620"/>
+              </a:lnSpc>
+              <a:spcAft>
+                <a:spcPts val="300"/>
+              </a:spcAft>
+              <a:buNone/>
+            </a:pPr>
+            <a:r>
+              <a:rPr lang="en-US" sz="1200" i="1" dirty="0">
+                <a:solidFill>
+                  <a:srgbClr val="1C2833"/>
+                </a:solidFill>
+                <a:latin typeface="Arial" pitchFamily="34" charset="0"/>
+                <a:ea typeface="Arial" pitchFamily="34" charset="-122"/>
+                <a:cs typeface="Arial" pitchFamily="34" charset="-120"/>
+              </a:rPr>
+              <a:t>"Tomorrow — the herb that turns everything gold."</a:t>
+            </a:r>
+            <a:endParaRPr lang="en-US" sz="1200" dirty="0"/>
+          </a:p>
+        </p:txBody>
+      </p:sp>
+      <p:sp>
+        <p:nvSpPr>
+          <p:cNvPr id="5" name="Text 3"/>
+          <p:cNvSpPr/>
+          <p:nvPr/>
+        </p:nvSpPr>
+        <p:spPr>
+          <a:xfrm>
+            <a:off x="406301" y="4434929"/>
+            <a:ext cx="8498026" cy="213271"/>
+          </a:xfrm>
+          <a:prstGeom prst="rect">
+            <a:avLst/>
+          </a:prstGeom>
+          <a:noFill/>
+          <a:ln/>
+        </p:spPr>
+        <p:txBody>
+          <a:bodyPr wrap="square" lIns="0" tIns="0" rIns="0" bIns="0" rtlCol="0" anchor="t"/>
+          <a:lstStyle/>
+          <a:p>
+            <a:pPr algn="l" indent="0" marL="0">
+              <a:lnSpc>
+                <a:spcPts val="1680"/>
+              </a:lnSpc>
+              <a:spcBef>
+                <a:spcPts val="300"/>
+              </a:spcBef>
+              <a:spcAft>
+                <a:spcPts val="300"/>
+              </a:spcAft>
+              <a:buNone/>
+            </a:pPr>
+            <a:r>
+              <a:rPr lang="en-US" sz="1200" dirty="0">
+                <a:solidFill>
+                  <a:srgbClr val="1C2833"/>
+                </a:solidFill>
+                <a:latin typeface="Arial" pitchFamily="34" charset="0"/>
+                <a:ea typeface="Arial" pitchFamily="34" charset="-122"/>
+                <a:cs typeface="Arial" pitchFamily="34" charset="-120"/>
+              </a:rPr>
+              <a:t>Middle ·  · IKS Curriculum</a:t>
+            </a:r>
+            <a:endParaRPr lang="en-US" sz="1200" dirty="0"/>
+          </a:p>
+        </p:txBody>
+      </p:sp>
+    </p:spTree>
+  </p:cSld>
+  <p:clrMapOvr>
+    <a:masterClrMapping/>
+  </p:clrMapOvr>
+</p:sld>
+</file>
+
+<file path=ppt/slides/slide16.xml><?xml version="1.0" encoding="utf-8"?>
+<p:sld xmlns:a="http://schemas.openxmlformats.org/drawingml/2006/main" xmlns:r="http://schemas.openxmlformats.org/officeDocument/2006/relationships" xmlns:p="http://schemas.openxmlformats.org/presentationml/2006/main">
+  <p:cSld name="Slide 16">
+    <p:bg>
+      <p:bgPr>
+        <a:solidFill>
+          <a:srgbClr val="FFFFFF"/>
+        </a:solidFill>
+      </p:bgPr>
+    </p:bg>
+    <p:spTree>
+      <p:nvGrpSpPr>
+        <p:cNvPr id="1" name=""/>
+        <p:cNvGrpSpPr/>
+        <p:nvPr/>
+      </p:nvGrpSpPr>
+      <p:grpSpPr>
+        <a:xfrm>
+          <a:off x="0" y="0"/>
+          <a:ext cx="0" cy="0"/>
+          <a:chOff x="0" y="0"/>
+          <a:chExt cx="0" cy="0"/>
+        </a:xfrm>
+      </p:grpSpPr>
+      <p:sp>
+        <p:nvSpPr>
+          <p:cNvPr id="2" name="Text 0"/>
+          <p:cNvSpPr/>
+          <p:nvPr/>
+        </p:nvSpPr>
+        <p:spPr>
+          <a:xfrm>
+            <a:off x="0" y="0"/>
+            <a:ext cx="9144000" cy="101501"/>
+          </a:xfrm>
+          <a:prstGeom prst="rect">
+            <a:avLst/>
+          </a:prstGeom>
+          <a:solidFill>
+            <a:srgbClr val="277884"/>
+          </a:solidFill>
+          <a:ln/>
+        </p:spPr>
+        <p:txBody>
+          <a:bodyPr wrap="square" rtlCol="0" anchor="ctr"/>
+          <a:lstStyle/>
+          <a:p>
+            <a:pPr indent="0" marL="0">
+              <a:buNone/>
+            </a:pPr>
+            <a:endParaRPr lang="en-US" dirty="0"/>
+          </a:p>
+        </p:txBody>
+      </p:sp>
+      <p:sp>
+        <p:nvSpPr>
+          <p:cNvPr id="3" name="Text 1"/>
+          <p:cNvSpPr/>
+          <p:nvPr/>
+        </p:nvSpPr>
+        <p:spPr>
+          <a:xfrm>
+            <a:off x="406301" y="457051"/>
+            <a:ext cx="8498026" cy="274290"/>
+          </a:xfrm>
+          <a:prstGeom prst="rect">
+            <a:avLst/>
+          </a:prstGeom>
+          <a:noFill/>
+          <a:ln/>
+        </p:spPr>
+        <p:txBody>
+          <a:bodyPr wrap="square" lIns="0" tIns="0" rIns="0" bIns="0" rtlCol="0" anchor="t"/>
+          <a:lstStyle/>
+          <a:p>
+            <a:pPr algn="l" indent="0" marL="0">
+              <a:lnSpc>
+                <a:spcPts val="2160"/>
+              </a:lnSpc>
+              <a:spcBef>
+                <a:spcPts val="600"/>
+              </a:spcBef>
+              <a:spcAft>
+                <a:spcPts val="800"/>
+              </a:spcAft>
+              <a:buNone/>
+            </a:pPr>
+            <a:r>
+              <a:rPr lang="en-US" sz="1800" b="1" dirty="0">
+                <a:solidFill>
+                  <a:srgbClr val="FE4447"/>
+                </a:solidFill>
+                <a:latin typeface="Georgia" pitchFamily="34" charset="0"/>
+                <a:ea typeface="Georgia" pitchFamily="34" charset="-122"/>
+                <a:cs typeface="Georgia" pitchFamily="34" charset="-120"/>
+              </a:rPr>
+              <a:t>Homework</a:t>
+            </a:r>
+            <a:endParaRPr lang="en-US" sz="1800" dirty="0"/>
+          </a:p>
+        </p:txBody>
+      </p:sp>
+      <p:sp>
+        <p:nvSpPr>
+          <p:cNvPr id="4" name="Text 2"/>
+          <p:cNvSpPr/>
+          <p:nvPr/>
+        </p:nvSpPr>
+        <p:spPr>
+          <a:xfrm>
+            <a:off x="634901" y="883593"/>
+            <a:ext cx="8102798" cy="487561"/>
+          </a:xfrm>
+          <a:prstGeom prst="rect">
+            <a:avLst/>
+          </a:prstGeom>
+          <a:noFill/>
+          <a:ln/>
+        </p:spPr>
+        <p:txBody>
+          <a:bodyPr wrap="square" lIns="0" tIns="0" rIns="0" bIns="0" rtlCol="0" anchor="t"/>
+          <a:lstStyle/>
+          <a:p>
+            <a:pPr algn="l" marL="342900" indent="-342900">
+              <a:lnSpc>
+                <a:spcPts val="1620"/>
+              </a:lnSpc>
+              <a:spcAft>
+                <a:spcPts val="300"/>
+              </a:spcAft>
+              <a:buSzPct val="100000"/>
+              <a:buChar char="•"/>
+            </a:pPr>
+            <a:r>
+              <a:rPr lang="en-US" sz="1200" dirty="0">
+                <a:solidFill>
+                  <a:srgbClr val="1C2833"/>
+                </a:solidFill>
+                <a:latin typeface="Arial" pitchFamily="34" charset="0"/>
+                <a:ea typeface="Arial" pitchFamily="34" charset="-122"/>
+                <a:cs typeface="Arial" pitchFamily="34" charset="-120"/>
+              </a:rPr>
+              <a:t>Find a neem tree near your home or school. Sketch a leaf in your workbook from life. Note where the tree is and how many you saw on your walk.</a:t>
+            </a:r>
+            <a:endParaRPr lang="en-US" sz="1200" dirty="0"/>
+          </a:p>
+        </p:txBody>
+      </p:sp>
+      <p:sp>
+        <p:nvSpPr>
+          <p:cNvPr id="5" name="Text 3"/>
+          <p:cNvSpPr/>
+          <p:nvPr/>
+        </p:nvSpPr>
+        <p:spPr>
+          <a:xfrm>
+            <a:off x="406301" y="4434929"/>
+            <a:ext cx="8498026" cy="213271"/>
+          </a:xfrm>
+          <a:prstGeom prst="rect">
+            <a:avLst/>
+          </a:prstGeom>
+          <a:noFill/>
+          <a:ln/>
+        </p:spPr>
+        <p:txBody>
+          <a:bodyPr wrap="square" lIns="0" tIns="0" rIns="0" bIns="0" rtlCol="0" anchor="t"/>
+          <a:lstStyle/>
+          <a:p>
+            <a:pPr algn="l" indent="0" marL="0">
+              <a:lnSpc>
+                <a:spcPts val="1680"/>
+              </a:lnSpc>
+              <a:spcBef>
+                <a:spcPts val="300"/>
+              </a:spcBef>
+              <a:spcAft>
+                <a:spcPts val="300"/>
+              </a:spcAft>
+              <a:buNone/>
+            </a:pPr>
+            <a:r>
+              <a:rPr lang="en-US" sz="1200" dirty="0">
+                <a:solidFill>
+                  <a:srgbClr val="1C2833"/>
+                </a:solidFill>
+                <a:latin typeface="Arial" pitchFamily="34" charset="0"/>
+                <a:ea typeface="Arial" pitchFamily="34" charset="-122"/>
+                <a:cs typeface="Arial" pitchFamily="34" charset="-120"/>
+              </a:rPr>
+              <a:t>Middle ·  · IKS Curriculum</a:t>
+            </a:r>
+            <a:endParaRPr lang="en-US" sz="1200" dirty="0"/>
+          </a:p>
+        </p:txBody>
+      </p:sp>
+    </p:spTree>
+  </p:cSld>
+  <p:clrMapOvr>
+    <a:masterClrMapping/>
+  </p:clrMapOvr>
+</p:sld>
+</file>
+
+<file path=ppt/slides/slide17.xml><?xml version="1.0" encoding="utf-8"?>
+<p:sld xmlns:a="http://schemas.openxmlformats.org/drawingml/2006/main" xmlns:r="http://schemas.openxmlformats.org/officeDocument/2006/relationships" xmlns:p="http://schemas.openxmlformats.org/presentationml/2006/main">
+  <p:cSld name="Slide 17">
+    <p:bg>
+      <p:bgPr>
+        <a:solidFill>
+          <a:srgbClr val="FFFFFF"/>
+        </a:solidFill>
+      </p:bgPr>
+    </p:bg>
+    <p:spTree>
+      <p:nvGrpSpPr>
+        <p:cNvPr id="1" name=""/>
+        <p:cNvGrpSpPr/>
+        <p:nvPr/>
+      </p:nvGrpSpPr>
+      <p:grpSpPr>
+        <a:xfrm>
+          <a:off x="0" y="0"/>
+          <a:ext cx="0" cy="0"/>
+          <a:chOff x="0" y="0"/>
+          <a:chExt cx="0" cy="0"/>
+        </a:xfrm>
+      </p:grpSpPr>
+      <p:sp>
+        <p:nvSpPr>
+          <p:cNvPr id="2" name="Text 0"/>
+          <p:cNvSpPr/>
+          <p:nvPr/>
+        </p:nvSpPr>
+        <p:spPr>
+          <a:xfrm>
+            <a:off x="0" y="0"/>
+            <a:ext cx="9144000" cy="101501"/>
+          </a:xfrm>
+          <a:prstGeom prst="rect">
+            <a:avLst/>
+          </a:prstGeom>
+          <a:solidFill>
+            <a:srgbClr val="277884"/>
+          </a:solidFill>
+          <a:ln/>
+        </p:spPr>
+        <p:txBody>
+          <a:bodyPr wrap="square" rtlCol="0" anchor="ctr"/>
+          <a:lstStyle/>
+          <a:p>
+            <a:pPr indent="0" marL="0">
+              <a:buNone/>
+            </a:pPr>
+            <a:endParaRPr lang="en-US" dirty="0"/>
+          </a:p>
+        </p:txBody>
+      </p:sp>
+      <p:sp>
+        <p:nvSpPr>
+          <p:cNvPr id="3" name="Text 1"/>
+          <p:cNvSpPr/>
+          <p:nvPr/>
+        </p:nvSpPr>
+        <p:spPr>
+          <a:xfrm>
+            <a:off x="406301" y="457051"/>
+            <a:ext cx="8498026" cy="274290"/>
+          </a:xfrm>
+          <a:prstGeom prst="rect">
+            <a:avLst/>
+          </a:prstGeom>
+          <a:noFill/>
+          <a:ln/>
+        </p:spPr>
+        <p:txBody>
+          <a:bodyPr wrap="square" lIns="0" tIns="0" rIns="0" bIns="0" rtlCol="0" anchor="t"/>
+          <a:lstStyle/>
+          <a:p>
+            <a:pPr algn="l" indent="0" marL="0">
+              <a:lnSpc>
+                <a:spcPts val="2160"/>
+              </a:lnSpc>
+              <a:spcBef>
+                <a:spcPts val="600"/>
+              </a:spcBef>
+              <a:spcAft>
+                <a:spcPts val="800"/>
+              </a:spcAft>
+              <a:buNone/>
+            </a:pPr>
+            <a:r>
+              <a:rPr lang="en-US" sz="1800" b="1" dirty="0">
+                <a:solidFill>
+                  <a:srgbClr val="FE4447"/>
+                </a:solidFill>
+                <a:latin typeface="Georgia" pitchFamily="34" charset="0"/>
+                <a:ea typeface="Georgia" pitchFamily="34" charset="-122"/>
+                <a:cs typeface="Georgia" pitchFamily="34" charset="-120"/>
+              </a:rPr>
+              <a:t>Differentiation</a:t>
+            </a:r>
+            <a:endParaRPr lang="en-US" sz="1800" dirty="0"/>
+          </a:p>
+        </p:txBody>
+      </p:sp>
+      <p:sp>
+        <p:nvSpPr>
+          <p:cNvPr id="4" name="Text 2"/>
+          <p:cNvSpPr/>
+          <p:nvPr/>
+        </p:nvSpPr>
+        <p:spPr>
+          <a:xfrm>
+            <a:off x="634901" y="883593"/>
+            <a:ext cx="8102798" cy="937022"/>
+          </a:xfrm>
+          <a:prstGeom prst="rect">
+            <a:avLst/>
+          </a:prstGeom>
+          <a:noFill/>
+          <a:ln/>
+        </p:spPr>
+        <p:txBody>
+          <a:bodyPr wrap="square" lIns="0" tIns="0" rIns="0" bIns="0" rtlCol="0" anchor="t"/>
+          <a:lstStyle/>
+          <a:p>
+            <a:pPr algn="l" marL="342900" indent="-342900">
+              <a:lnSpc>
+                <a:spcPts val="1620"/>
+              </a:lnSpc>
+              <a:spcAft>
+                <a:spcPts val="300"/>
+              </a:spcAft>
+              <a:buSzPct val="100000"/>
+              <a:buChar char="•"/>
+            </a:pPr>
+            <a:r>
+              <a:rPr lang="en-US" sz="1200" b="1" dirty="0">
+                <a:solidFill>
+                  <a:srgbClr val="1C2833"/>
+                </a:solidFill>
+                <a:latin typeface="Arial" pitchFamily="34" charset="0"/>
+                <a:ea typeface="Arial" pitchFamily="34" charset="-122"/>
+                <a:cs typeface="Arial" pitchFamily="34" charset="-120"/>
+              </a:rPr>
+              <a:t>One tier up:</a:t>
+            </a:r>
+            <a:pPr algn="l" indent="0" marL="0">
+              <a:lnSpc>
+                <a:spcPts val="1620"/>
+              </a:lnSpc>
+              <a:spcAft>
+                <a:spcPts val="300"/>
+              </a:spcAft>
+              <a:buNone/>
+            </a:pPr>
+            <a:r>
+              <a:rPr lang="en-US" sz="1200" dirty="0">
+                <a:solidFill>
+                  <a:srgbClr val="1C2833"/>
+                </a:solidFill>
+                <a:latin typeface="Arial" pitchFamily="34" charset="0"/>
+                <a:ea typeface="Arial" pitchFamily="34" charset="-122"/>
+                <a:cs typeface="Arial" pitchFamily="34" charset="-120"/>
+              </a:rPr>
+              <a:t> Read up on the </a:t>
+            </a:r>
+            <a:pPr algn="l" indent="0" marL="0">
+              <a:lnSpc>
+                <a:spcPts val="1620"/>
+              </a:lnSpc>
+              <a:spcAft>
+                <a:spcPts val="300"/>
+              </a:spcAft>
+              <a:buNone/>
+            </a:pPr>
+            <a:r>
+              <a:rPr lang="en-US" sz="1200" i="1" dirty="0">
+                <a:solidFill>
+                  <a:srgbClr val="1C2833"/>
+                </a:solidFill>
+                <a:latin typeface="Arial" pitchFamily="34" charset="0"/>
+                <a:ea typeface="Arial" pitchFamily="34" charset="-122"/>
+                <a:cs typeface="Arial" pitchFamily="34" charset="-120"/>
+              </a:rPr>
+              <a:t>Margosa oil poisoning</a:t>
+            </a:r>
+            <a:pPr algn="l" indent="0" marL="0">
+              <a:lnSpc>
+                <a:spcPts val="1620"/>
+              </a:lnSpc>
+              <a:spcAft>
+                <a:spcPts val="300"/>
+              </a:spcAft>
+              <a:buNone/>
+            </a:pPr>
+            <a:r>
+              <a:rPr lang="en-US" sz="1200" dirty="0">
+                <a:solidFill>
+                  <a:srgbClr val="1C2833"/>
+                </a:solidFill>
+                <a:latin typeface="Arial" pitchFamily="34" charset="0"/>
+                <a:ea typeface="Arial" pitchFamily="34" charset="-122"/>
+                <a:cs typeface="Arial" pitchFamily="34" charset="-120"/>
+              </a:rPr>
+              <a:t> literature (margosa is another name for neem oil). Find one case-report finding. Be ready to share next class.</a:t>
+            </a:r>
+            <a:endParaRPr lang="en-US" sz="1200" dirty="0"/>
+          </a:p>
+          <a:p>
+            <a:pPr algn="l" marL="342900" indent="-342900">
+              <a:lnSpc>
+                <a:spcPts val="1620"/>
+              </a:lnSpc>
+              <a:spcAft>
+                <a:spcPts val="300"/>
+              </a:spcAft>
+              <a:buSzPct val="100000"/>
+              <a:buChar char="•"/>
+            </a:pPr>
+            <a:r>
+              <a:rPr lang="en-US" sz="1200" b="1" dirty="0">
+                <a:solidFill>
+                  <a:srgbClr val="1C2833"/>
+                </a:solidFill>
+                <a:latin typeface="Arial" pitchFamily="34" charset="0"/>
+                <a:ea typeface="Arial" pitchFamily="34" charset="-122"/>
+                <a:cs typeface="Arial" pitchFamily="34" charset="-120"/>
+              </a:rPr>
+              <a:t>One tier down:</a:t>
+            </a:r>
+            <a:pPr algn="l" indent="0" marL="0">
+              <a:lnSpc>
+                <a:spcPts val="1620"/>
+              </a:lnSpc>
+              <a:spcAft>
+                <a:spcPts val="300"/>
+              </a:spcAft>
+              <a:buNone/>
+            </a:pPr>
+            <a:r>
+              <a:rPr lang="en-US" sz="1200" dirty="0">
+                <a:solidFill>
+                  <a:srgbClr val="1C2833"/>
+                </a:solidFill>
+                <a:latin typeface="Arial" pitchFamily="34" charset="0"/>
+                <a:ea typeface="Arial" pitchFamily="34" charset="-122"/>
+                <a:cs typeface="Arial" pitchFamily="34" charset="-120"/>
+              </a:rPr>
+              <a:t> Focus on identifying the compound-leaf shape. The chemistry (azadirachtin) can come on Day 6 once you've seen more herbs.</a:t>
+            </a:r>
+            <a:endParaRPr lang="en-US" sz="1200" dirty="0"/>
+          </a:p>
+        </p:txBody>
+      </p:sp>
+      <p:sp>
+        <p:nvSpPr>
+          <p:cNvPr id="5" name="Text 3"/>
+          <p:cNvSpPr/>
+          <p:nvPr/>
+        </p:nvSpPr>
+        <p:spPr>
+          <a:xfrm>
+            <a:off x="406301" y="4434929"/>
+            <a:ext cx="8498026" cy="213271"/>
+          </a:xfrm>
+          <a:prstGeom prst="rect">
+            <a:avLst/>
+          </a:prstGeom>
+          <a:noFill/>
+          <a:ln/>
+        </p:spPr>
+        <p:txBody>
+          <a:bodyPr wrap="square" lIns="0" tIns="0" rIns="0" bIns="0" rtlCol="0" anchor="t"/>
+          <a:lstStyle/>
+          <a:p>
+            <a:pPr algn="l" indent="0" marL="0">
+              <a:lnSpc>
+                <a:spcPts val="1680"/>
+              </a:lnSpc>
+              <a:spcBef>
+                <a:spcPts val="300"/>
+              </a:spcBef>
+              <a:spcAft>
+                <a:spcPts val="300"/>
+              </a:spcAft>
+              <a:buNone/>
+            </a:pPr>
+            <a:r>
+              <a:rPr lang="en-US" sz="1200" dirty="0">
+                <a:solidFill>
+                  <a:srgbClr val="1C2833"/>
+                </a:solidFill>
+                <a:latin typeface="Arial" pitchFamily="34" charset="0"/>
+                <a:ea typeface="Arial" pitchFamily="34" charset="-122"/>
+                <a:cs typeface="Arial" pitchFamily="34" charset="-120"/>
+              </a:rPr>
+              <a:t>Middle ·  · IKS Curriculum</a:t>
+            </a:r>
+            <a:endParaRPr lang="en-US" sz="1200" dirty="0"/>
+          </a:p>
+        </p:txBody>
+      </p:sp>
+    </p:spTree>
+  </p:cSld>
+  <p:clrMapOvr>
+    <a:masterClrMapping/>
+  </p:clrMapOvr>
+</p:sld>
+</file>
+
+<file path=ppt/slides/slide18.xml><?xml version="1.0" encoding="utf-8"?>
+<p:sld xmlns:a="http://schemas.openxmlformats.org/drawingml/2006/main" xmlns:r="http://schemas.openxmlformats.org/officeDocument/2006/relationships" xmlns:p="http://schemas.openxmlformats.org/presentationml/2006/main">
+  <p:cSld name="Slide 18">
+    <p:bg>
+      <p:bgPr>
+        <a:solidFill>
+          <a:srgbClr val="FFFFFF"/>
+        </a:solidFill>
+      </p:bgPr>
+    </p:bg>
+    <p:spTree>
+      <p:nvGrpSpPr>
+        <p:cNvPr id="1" name=""/>
+        <p:cNvGrpSpPr/>
+        <p:nvPr/>
+      </p:nvGrpSpPr>
+      <p:grpSpPr>
+        <a:xfrm>
+          <a:off x="0" y="0"/>
+          <a:ext cx="0" cy="0"/>
+          <a:chOff x="0" y="0"/>
+          <a:chExt cx="0" cy="0"/>
+        </a:xfrm>
+      </p:grpSpPr>
+      <p:sp>
+        <p:nvSpPr>
+          <p:cNvPr id="2" name="Text 0"/>
+          <p:cNvSpPr/>
+          <p:nvPr/>
+        </p:nvSpPr>
+        <p:spPr>
+          <a:xfrm>
+            <a:off x="0" y="0"/>
+            <a:ext cx="9144000" cy="101501"/>
+          </a:xfrm>
+          <a:prstGeom prst="rect">
+            <a:avLst/>
+          </a:prstGeom>
+          <a:solidFill>
+            <a:srgbClr val="277884"/>
+          </a:solidFill>
+          <a:ln/>
+        </p:spPr>
+        <p:txBody>
+          <a:bodyPr wrap="square" rtlCol="0" anchor="ctr"/>
+          <a:lstStyle/>
+          <a:p>
+            <a:pPr indent="0" marL="0">
+              <a:buNone/>
+            </a:pPr>
+            <a:endParaRPr lang="en-US" dirty="0"/>
+          </a:p>
+        </p:txBody>
+      </p:sp>
+      <p:sp>
+        <p:nvSpPr>
+          <p:cNvPr id="3" name="Text 1"/>
+          <p:cNvSpPr/>
+          <p:nvPr/>
+        </p:nvSpPr>
+        <p:spPr>
+          <a:xfrm>
+            <a:off x="406301" y="457051"/>
+            <a:ext cx="8498026" cy="274290"/>
+          </a:xfrm>
+          <a:prstGeom prst="rect">
+            <a:avLst/>
+          </a:prstGeom>
+          <a:noFill/>
+          <a:ln/>
+        </p:spPr>
+        <p:txBody>
+          <a:bodyPr wrap="square" lIns="0" tIns="0" rIns="0" bIns="0" rtlCol="0" anchor="t"/>
+          <a:lstStyle/>
+          <a:p>
+            <a:pPr algn="l" indent="0" marL="0">
+              <a:lnSpc>
+                <a:spcPts val="2160"/>
+              </a:lnSpc>
+              <a:spcBef>
+                <a:spcPts val="600"/>
+              </a:spcBef>
+              <a:spcAft>
+                <a:spcPts val="800"/>
+              </a:spcAft>
+              <a:buNone/>
+            </a:pPr>
+            <a:r>
+              <a:rPr lang="en-US" sz="1800" b="1" dirty="0">
+                <a:solidFill>
+                  <a:srgbClr val="FE4447"/>
+                </a:solidFill>
+                <a:latin typeface="Georgia" pitchFamily="34" charset="0"/>
+                <a:ea typeface="Georgia" pitchFamily="34" charset="-122"/>
+                <a:cs typeface="Georgia" pitchFamily="34" charset="-120"/>
+              </a:rPr>
+              <a:t>Teacher notes</a:t>
+            </a:r>
+            <a:endParaRPr lang="en-US" sz="1800" dirty="0"/>
+          </a:p>
+        </p:txBody>
+      </p:sp>
+      <p:sp>
+        <p:nvSpPr>
+          <p:cNvPr id="4" name="Text 2"/>
+          <p:cNvSpPr/>
+          <p:nvPr/>
+        </p:nvSpPr>
+        <p:spPr>
+          <a:xfrm>
+            <a:off x="634901" y="883593"/>
+            <a:ext cx="8102798" cy="1142702"/>
+          </a:xfrm>
+          <a:prstGeom prst="rect">
+            <a:avLst/>
+          </a:prstGeom>
+          <a:noFill/>
+          <a:ln/>
+        </p:spPr>
+        <p:txBody>
+          <a:bodyPr wrap="square" lIns="0" tIns="0" rIns="0" bIns="0" rtlCol="0" anchor="t"/>
+          <a:lstStyle/>
+          <a:p>
+            <a:pPr algn="l" marL="342900" indent="-342900">
+              <a:lnSpc>
+                <a:spcPts val="1620"/>
+              </a:lnSpc>
+              <a:spcAft>
+                <a:spcPts val="300"/>
+              </a:spcAft>
+              <a:buSzPct val="100000"/>
+              <a:buChar char="•"/>
+            </a:pPr>
+            <a:r>
+              <a:rPr lang="en-US" sz="1200" dirty="0">
+                <a:solidFill>
+                  <a:srgbClr val="1C2833"/>
+                </a:solidFill>
+                <a:latin typeface="Arial" pitchFamily="34" charset="0"/>
+                <a:ea typeface="Arial" pitchFamily="34" charset="-122"/>
+                <a:cs typeface="Arial" pitchFamily="34" charset="-120"/>
+              </a:rPr>
+              <a:t>The "don't chew the leaf" rule is critical. A few brave/curious students will try if leaves are accessible — keep the container sealed and store it where students can't reach during break.</a:t>
+            </a:r>
+            <a:endParaRPr lang="en-US" sz="1200" dirty="0"/>
+          </a:p>
+          <a:p>
+            <a:pPr algn="l" marL="342900" indent="-342900">
+              <a:lnSpc>
+                <a:spcPts val="1620"/>
+              </a:lnSpc>
+              <a:spcAft>
+                <a:spcPts val="300"/>
+              </a:spcAft>
+              <a:buSzPct val="100000"/>
+              <a:buChar char="•"/>
+            </a:pPr>
+            <a:r>
+              <a:rPr lang="en-US" sz="1200" dirty="0">
+                <a:solidFill>
+                  <a:srgbClr val="1C2833"/>
+                </a:solidFill>
+                <a:latin typeface="Arial" pitchFamily="34" charset="0"/>
+                <a:ea typeface="Arial" pitchFamily="34" charset="-122"/>
+                <a:cs typeface="Arial" pitchFamily="34" charset="-120"/>
+              </a:rPr>
+              <a:t>The hepatotoxicity warning needs to land as </a:t>
+            </a:r>
+            <a:pPr algn="l" indent="0" marL="0">
+              <a:lnSpc>
+                <a:spcPts val="1620"/>
+              </a:lnSpc>
+              <a:spcAft>
+                <a:spcPts val="300"/>
+              </a:spcAft>
+              <a:buNone/>
+            </a:pPr>
+            <a:r>
+              <a:rPr lang="en-US" sz="1200" b="1" dirty="0">
+                <a:solidFill>
+                  <a:srgbClr val="1C2833"/>
+                </a:solidFill>
+                <a:latin typeface="Arial" pitchFamily="34" charset="0"/>
+                <a:ea typeface="Arial" pitchFamily="34" charset="-122"/>
+                <a:cs typeface="Arial" pitchFamily="34" charset="-120"/>
+              </a:rPr>
+              <a:t>specific knowledge</a:t>
+            </a:r>
+            <a:pPr algn="l" indent="0" marL="0">
+              <a:lnSpc>
+                <a:spcPts val="1620"/>
+              </a:lnSpc>
+              <a:spcAft>
+                <a:spcPts val="300"/>
+              </a:spcAft>
+              <a:buNone/>
+            </a:pPr>
+            <a:r>
+              <a:rPr lang="en-US" sz="1200" dirty="0">
+                <a:solidFill>
+                  <a:srgbClr val="1C2833"/>
+                </a:solidFill>
+                <a:latin typeface="Arial" pitchFamily="34" charset="0"/>
+                <a:ea typeface="Arial" pitchFamily="34" charset="-122"/>
+                <a:cs typeface="Arial" pitchFamily="34" charset="-120"/>
+              </a:rPr>
+              <a:t>, not vague caution. Use the word "liver" explicitly. Some students have grandparents who give them neem leaves "for blood purification" — the lesson is to be respectful and curious about the traditional use </a:t>
+            </a:r>
+            <a:pPr algn="l" indent="0" marL="0">
+              <a:lnSpc>
+                <a:spcPts val="1620"/>
+              </a:lnSpc>
+              <a:spcAft>
+                <a:spcPts val="300"/>
+              </a:spcAft>
+              <a:buNone/>
+            </a:pPr>
+            <a:r>
+              <a:rPr lang="en-US" sz="1200" i="1" dirty="0">
+                <a:solidFill>
+                  <a:srgbClr val="1C2833"/>
+                </a:solidFill>
+                <a:latin typeface="Arial" pitchFamily="34" charset="0"/>
+                <a:ea typeface="Arial" pitchFamily="34" charset="-122"/>
+                <a:cs typeface="Arial" pitchFamily="34" charset="-120"/>
+              </a:rPr>
+              <a:t>while</a:t>
+            </a:r>
+            <a:pPr algn="l" indent="0" marL="0">
+              <a:lnSpc>
+                <a:spcPts val="1620"/>
+              </a:lnSpc>
+              <a:spcAft>
+                <a:spcPts val="300"/>
+              </a:spcAft>
+              <a:buNone/>
+            </a:pPr>
+            <a:r>
+              <a:rPr lang="en-US" sz="1200" dirty="0">
+                <a:solidFill>
+                  <a:srgbClr val="1C2833"/>
+                </a:solidFill>
+                <a:latin typeface="Arial" pitchFamily="34" charset="0"/>
+                <a:ea typeface="Arial" pitchFamily="34" charset="-122"/>
+                <a:cs typeface="Arial" pitchFamily="34" charset="-120"/>
+              </a:rPr>
+              <a:t> being clear about the dose concern.</a:t>
+            </a:r>
+            <a:endParaRPr lang="en-US" sz="1200" dirty="0"/>
+          </a:p>
+        </p:txBody>
+      </p:sp>
+      <p:sp>
+        <p:nvSpPr>
+          <p:cNvPr id="5" name="Text 3"/>
+          <p:cNvSpPr/>
+          <p:nvPr/>
+        </p:nvSpPr>
+        <p:spPr>
+          <a:xfrm>
+            <a:off x="406301" y="4434929"/>
+            <a:ext cx="8498026" cy="213271"/>
+          </a:xfrm>
+          <a:prstGeom prst="rect">
+            <a:avLst/>
+          </a:prstGeom>
+          <a:noFill/>
+          <a:ln/>
+        </p:spPr>
+        <p:txBody>
+          <a:bodyPr wrap="square" lIns="0" tIns="0" rIns="0" bIns="0" rtlCol="0" anchor="t"/>
+          <a:lstStyle/>
+          <a:p>
+            <a:pPr algn="l" indent="0" marL="0">
+              <a:lnSpc>
+                <a:spcPts val="1680"/>
+              </a:lnSpc>
+              <a:spcBef>
+                <a:spcPts val="300"/>
+              </a:spcBef>
+              <a:spcAft>
+                <a:spcPts val="300"/>
+              </a:spcAft>
+              <a:buNone/>
+            </a:pPr>
+            <a:r>
+              <a:rPr lang="en-US" sz="1200" dirty="0">
+                <a:solidFill>
+                  <a:srgbClr val="1C2833"/>
+                </a:solidFill>
+                <a:latin typeface="Arial" pitchFamily="34" charset="0"/>
+                <a:ea typeface="Arial" pitchFamily="34" charset="-122"/>
+                <a:cs typeface="Arial" pitchFamily="34" charset="-120"/>
+              </a:rPr>
+              <a:t>Middle ·  · IKS Curriculum</a:t>
+            </a:r>
+            <a:endParaRPr lang="en-US" sz="1200" dirty="0"/>
+          </a:p>
+        </p:txBody>
+      </p:sp>
+    </p:spTree>
+  </p:cSld>
+  <p:clrMapOvr>
+    <a:masterClrMapping/>
+  </p:clrMapOvr>
+</p:sld>
+</file>
+
+<file path=ppt/slides/slide19.xml><?xml version="1.0" encoding="utf-8"?>
+<p:sld xmlns:a="http://schemas.openxmlformats.org/drawingml/2006/main" xmlns:r="http://schemas.openxmlformats.org/officeDocument/2006/relationships" xmlns:p="http://schemas.openxmlformats.org/presentationml/2006/main">
+  <p:cSld name="Slide 19">
+    <p:bg>
+      <p:bgPr>
+        <a:solidFill>
+          <a:srgbClr val="FFFFFF"/>
+        </a:solidFill>
+      </p:bgPr>
+    </p:bg>
+    <p:spTree>
+      <p:nvGrpSpPr>
+        <p:cNvPr id="1" name=""/>
+        <p:cNvGrpSpPr/>
+        <p:nvPr/>
+      </p:nvGrpSpPr>
+      <p:grpSpPr>
+        <a:xfrm>
+          <a:off x="0" y="0"/>
+          <a:ext cx="0" cy="0"/>
+          <a:chOff x="0" y="0"/>
+          <a:chExt cx="0" cy="0"/>
+        </a:xfrm>
+      </p:grpSpPr>
+      <p:sp>
+        <p:nvSpPr>
+          <p:cNvPr id="2" name="Text 0"/>
+          <p:cNvSpPr/>
+          <p:nvPr/>
+        </p:nvSpPr>
+        <p:spPr>
+          <a:xfrm>
+            <a:off x="0" y="0"/>
+            <a:ext cx="9144000" cy="101501"/>
+          </a:xfrm>
+          <a:prstGeom prst="rect">
+            <a:avLst/>
+          </a:prstGeom>
+          <a:solidFill>
+            <a:srgbClr val="277884"/>
+          </a:solidFill>
+          <a:ln/>
+        </p:spPr>
+        <p:txBody>
+          <a:bodyPr wrap="square" rtlCol="0" anchor="ctr"/>
+          <a:lstStyle/>
+          <a:p>
+            <a:pPr indent="0" marL="0">
+              <a:buNone/>
+            </a:pPr>
+            <a:endParaRPr lang="en-US" dirty="0"/>
+          </a:p>
+        </p:txBody>
+      </p:sp>
+      <p:sp>
+        <p:nvSpPr>
+          <p:cNvPr id="3" name="Text 1"/>
+          <p:cNvSpPr/>
+          <p:nvPr/>
+        </p:nvSpPr>
+        <p:spPr>
+          <a:xfrm>
+            <a:off x="406301" y="457051"/>
+            <a:ext cx="8498026" cy="274290"/>
+          </a:xfrm>
+          <a:prstGeom prst="rect">
+            <a:avLst/>
+          </a:prstGeom>
+          <a:noFill/>
+          <a:ln/>
+        </p:spPr>
+        <p:txBody>
+          <a:bodyPr wrap="square" lIns="0" tIns="0" rIns="0" bIns="0" rtlCol="0" anchor="t"/>
+          <a:lstStyle/>
+          <a:p>
+            <a:pPr algn="l" indent="0" marL="0">
+              <a:lnSpc>
+                <a:spcPts val="2160"/>
+              </a:lnSpc>
+              <a:spcBef>
+                <a:spcPts val="600"/>
+              </a:spcBef>
+              <a:spcAft>
+                <a:spcPts val="800"/>
+              </a:spcAft>
+              <a:buNone/>
+            </a:pPr>
+            <a:r>
+              <a:rPr lang="en-US" sz="1800" b="1" dirty="0">
+                <a:solidFill>
+                  <a:srgbClr val="FE4447"/>
+                </a:solidFill>
+                <a:latin typeface="Georgia" pitchFamily="34" charset="0"/>
+                <a:ea typeface="Georgia" pitchFamily="34" charset="-122"/>
+                <a:cs typeface="Georgia" pitchFamily="34" charset="-120"/>
+              </a:rPr>
+              <a:t>Teacher notes (cont.)</a:t>
+            </a:r>
+            <a:endParaRPr lang="en-US" sz="1800" dirty="0"/>
+          </a:p>
+        </p:txBody>
+      </p:sp>
+      <p:sp>
+        <p:nvSpPr>
+          <p:cNvPr id="4" name="Text 2"/>
+          <p:cNvSpPr/>
+          <p:nvPr/>
+        </p:nvSpPr>
+        <p:spPr>
+          <a:xfrm>
+            <a:off x="634901" y="883593"/>
+            <a:ext cx="8102798" cy="693241"/>
+          </a:xfrm>
+          <a:prstGeom prst="rect">
+            <a:avLst/>
+          </a:prstGeom>
+          <a:noFill/>
+          <a:ln/>
+        </p:spPr>
+        <p:txBody>
+          <a:bodyPr wrap="square" lIns="0" tIns="0" rIns="0" bIns="0" rtlCol="0" anchor="t"/>
+          <a:lstStyle/>
+          <a:p>
+            <a:pPr algn="l" marL="342900" indent="-342900">
+              <a:lnSpc>
+                <a:spcPts val="1620"/>
+              </a:lnSpc>
+              <a:spcAft>
+                <a:spcPts val="300"/>
+              </a:spcAft>
+              <a:buSzPct val="100000"/>
+              <a:buChar char="•"/>
+            </a:pPr>
+            <a:r>
+              <a:rPr lang="en-US" sz="1200" dirty="0">
+                <a:solidFill>
+                  <a:srgbClr val="1C2833"/>
+                </a:solidFill>
+                <a:latin typeface="Arial" pitchFamily="34" charset="0"/>
+                <a:ea typeface="Arial" pitchFamily="34" charset="-122"/>
+                <a:cs typeface="Arial" pitchFamily="34" charset="-120"/>
+              </a:rPr>
+              <a:t>If a student asks "but if azadirachtin is dangerous, why have people used neem for centuries?" — the answer is: dilute external use and very small dietary use have a long history of being tolerated; </a:t>
+            </a:r>
+            <a:pPr algn="l" indent="0" marL="0">
+              <a:lnSpc>
+                <a:spcPts val="1620"/>
+              </a:lnSpc>
+              <a:spcAft>
+                <a:spcPts val="300"/>
+              </a:spcAft>
+              <a:buNone/>
+            </a:pPr>
+            <a:r>
+              <a:rPr lang="en-US" sz="1200" i="1" dirty="0">
+                <a:solidFill>
+                  <a:srgbClr val="1C2833"/>
+                </a:solidFill>
+                <a:latin typeface="Arial" pitchFamily="34" charset="0"/>
+                <a:ea typeface="Arial" pitchFamily="34" charset="-122"/>
+                <a:cs typeface="Arial" pitchFamily="34" charset="-120"/>
+              </a:rPr>
+              <a:t>concentrated</a:t>
+            </a:r>
+            <a:pPr algn="l" indent="0" marL="0">
+              <a:lnSpc>
+                <a:spcPts val="1620"/>
+              </a:lnSpc>
+              <a:spcAft>
+                <a:spcPts val="300"/>
+              </a:spcAft>
+              <a:buNone/>
+            </a:pPr>
+            <a:r>
+              <a:rPr lang="en-US" sz="1200" dirty="0">
+                <a:solidFill>
+                  <a:srgbClr val="1C2833"/>
+                </a:solidFill>
+                <a:latin typeface="Arial" pitchFamily="34" charset="0"/>
+                <a:ea typeface="Arial" pitchFamily="34" charset="-122"/>
+                <a:cs typeface="Arial" pitchFamily="34" charset="-120"/>
+              </a:rPr>
+              <a:t> use (oil, multi-leaf daily intake in adults, anything in children) is where the harm shows up.</a:t>
+            </a:r>
+            <a:endParaRPr lang="en-US" sz="1200" dirty="0"/>
+          </a:p>
+        </p:txBody>
+      </p:sp>
+      <p:sp>
+        <p:nvSpPr>
+          <p:cNvPr id="5" name="Text 3"/>
           <p:cNvSpPr/>
           <p:nvPr/>
         </p:nvSpPr>
@@ -3488,7 +6170,7 @@
                 <a:ea typeface="Georgia" pitchFamily="34" charset="-122"/>
                 <a:cs typeface="Georgia" pitchFamily="34" charset="-120"/>
               </a:rPr>
-              <a:t>Materials</a:t>
+              <a:t>Learning objective</a:t>
             </a:r>
             <a:endParaRPr lang="en-US" sz="1800" dirty="0"/>
           </a:p>
@@ -3503,7 +6185,7 @@
         <p:spPr>
           <a:xfrm>
             <a:off x="406301" y="870942"/>
-            <a:ext cx="8498026" cy="853083"/>
+            <a:ext cx="8498026" cy="639812"/>
           </a:xfrm>
           <a:prstGeom prst="rect">
             <a:avLst/>
@@ -3536,7 +6218,7 @@
                 <a:ea typeface="Arial" pitchFamily="34" charset="-122"/>
                 <a:cs typeface="Arial" pitchFamily="34" charset="-120"/>
               </a:rPr>
-              <a:t>– A few dried neem leaves in a sealed container (smelling only — no chewing) – A picture or — if you can — a neem twig with the characteristic compound leaf – A small bottle of neem oil </a:t>
+              <a:t>By the end of this lesson, students can identify </a:t>
             </a:r>
             <a:pPr algn="l" indent="0" marL="0">
               <a:lnSpc>
@@ -3551,6 +6233,144 @@
               <a:buNone/>
             </a:pPr>
             <a:r>
+              <a:rPr lang="en-US" sz="1200" i="1" dirty="0">
+                <a:solidFill>
+                  <a:srgbClr val="1C2833"/>
+                </a:solidFill>
+                <a:latin typeface="Arial" pitchFamily="34" charset="0"/>
+                <a:ea typeface="Arial" pitchFamily="34" charset="-122"/>
+                <a:cs typeface="Arial" pitchFamily="34" charset="-120"/>
+              </a:rPr>
+              <a:t>nimba</a:t>
+            </a:r>
+            <a:pPr algn="l" indent="0" marL="0">
+              <a:lnSpc>
+                <a:spcPts val="1680"/>
+              </a:lnSpc>
+              <a:spcBef>
+                <a:spcPts val="300"/>
+              </a:spcBef>
+              <a:spcAft>
+                <a:spcPts val="300"/>
+              </a:spcAft>
+              <a:buNone/>
+            </a:pPr>
+            <a:r>
+              <a:rPr lang="en-US" sz="1200" dirty="0">
+                <a:solidFill>
+                  <a:srgbClr val="1C2833"/>
+                </a:solidFill>
+                <a:latin typeface="Arial" pitchFamily="34" charset="0"/>
+                <a:ea typeface="Arial" pitchFamily="34" charset="-122"/>
+                <a:cs typeface="Arial" pitchFamily="34" charset="-120"/>
+              </a:rPr>
+              <a:t> (</a:t>
+            </a:r>
+            <a:pPr algn="l" indent="0" marL="0">
+              <a:lnSpc>
+                <a:spcPts val="1680"/>
+              </a:lnSpc>
+              <a:spcBef>
+                <a:spcPts val="300"/>
+              </a:spcBef>
+              <a:spcAft>
+                <a:spcPts val="300"/>
+              </a:spcAft>
+              <a:buNone/>
+            </a:pPr>
+            <a:r>
+              <a:rPr lang="en-US" sz="1200" i="1" dirty="0">
+                <a:solidFill>
+                  <a:srgbClr val="1C2833"/>
+                </a:solidFill>
+                <a:latin typeface="Arial" pitchFamily="34" charset="0"/>
+                <a:ea typeface="Arial" pitchFamily="34" charset="-122"/>
+                <a:cs typeface="Arial" pitchFamily="34" charset="-120"/>
+              </a:rPr>
+              <a:t>Azadirachta indica</a:t>
+            </a:r>
+            <a:pPr algn="l" indent="0" marL="0">
+              <a:lnSpc>
+                <a:spcPts val="1680"/>
+              </a:lnSpc>
+              <a:spcBef>
+                <a:spcPts val="300"/>
+              </a:spcBef>
+              <a:spcAft>
+                <a:spcPts val="300"/>
+              </a:spcAft>
+              <a:buNone/>
+            </a:pPr>
+            <a:r>
+              <a:rPr lang="en-US" sz="1200" dirty="0">
+                <a:solidFill>
+                  <a:srgbClr val="1C2833"/>
+                </a:solidFill>
+                <a:latin typeface="Arial" pitchFamily="34" charset="0"/>
+                <a:ea typeface="Arial" pitchFamily="34" charset="-122"/>
+                <a:cs typeface="Arial" pitchFamily="34" charset="-120"/>
+              </a:rPr>
+              <a:t>) by leaf shape, describe its dominant taste as </a:t>
+            </a:r>
+            <a:pPr algn="l" indent="0" marL="0">
+              <a:lnSpc>
+                <a:spcPts val="1680"/>
+              </a:lnSpc>
+              <a:spcBef>
+                <a:spcPts val="300"/>
+              </a:spcBef>
+              <a:spcAft>
+                <a:spcPts val="300"/>
+              </a:spcAft>
+              <a:buNone/>
+            </a:pPr>
+            <a:r>
+              <a:rPr lang="en-US" sz="1200" i="1" dirty="0">
+                <a:solidFill>
+                  <a:srgbClr val="1C2833"/>
+                </a:solidFill>
+                <a:latin typeface="Arial" pitchFamily="34" charset="0"/>
+                <a:ea typeface="Arial" pitchFamily="34" charset="-122"/>
+                <a:cs typeface="Arial" pitchFamily="34" charset="-120"/>
+              </a:rPr>
+              <a:t>tikta</a:t>
+            </a:r>
+            <a:pPr algn="l" indent="0" marL="0">
+              <a:lnSpc>
+                <a:spcPts val="1680"/>
+              </a:lnSpc>
+              <a:spcBef>
+                <a:spcPts val="300"/>
+              </a:spcBef>
+              <a:spcAft>
+                <a:spcPts val="300"/>
+              </a:spcAft>
+              <a:buNone/>
+            </a:pPr>
+            <a:r>
+              <a:rPr lang="en-US" sz="1200" dirty="0">
+                <a:solidFill>
+                  <a:srgbClr val="1C2833"/>
+                </a:solidFill>
+                <a:latin typeface="Arial" pitchFamily="34" charset="0"/>
+                <a:ea typeface="Arial" pitchFamily="34" charset="-122"/>
+                <a:cs typeface="Arial" pitchFamily="34" charset="-120"/>
+              </a:rPr>
+              <a:t> (bitter), name azadirachtin as its principal active compound, and explain why concentrated neem is </a:t>
+            </a:r>
+            <a:pPr algn="l" indent="0" marL="0">
+              <a:lnSpc>
+                <a:spcPts val="1680"/>
+              </a:lnSpc>
+              <a:spcBef>
+                <a:spcPts val="300"/>
+              </a:spcBef>
+              <a:spcAft>
+                <a:spcPts val="300"/>
+              </a:spcAft>
+              <a:buNone/>
+            </a:pPr>
+            <a:r>
               <a:rPr lang="en-US" sz="1200" b="1" dirty="0">
                 <a:solidFill>
                   <a:srgbClr val="1C2833"/>
@@ -3559,7 +6379,7 @@
                 <a:ea typeface="Arial" pitchFamily="34" charset="-122"/>
                 <a:cs typeface="Arial" pitchFamily="34" charset="-120"/>
               </a:rPr>
-              <a:t>kept by the teacher</a:t>
+              <a:t>not</a:t>
             </a:r>
             <a:pPr algn="l" indent="0" marL="0">
               <a:lnSpc>
@@ -3582,7 +6402,255 @@
                 <a:ea typeface="Arial" pitchFamily="34" charset="-122"/>
                 <a:cs typeface="Arial" pitchFamily="34" charset="-120"/>
               </a:rPr>
-              <a:t> (do not pass to students) – A piece of neem-containing soap (commercial — most Indian general stores stock these) for the "what's it actually in" demonstration – Whiteboard</a:t>
+              <a:t> safe for ingestion at any age.</a:t>
+            </a:r>
+            <a:endParaRPr lang="en-US" sz="1200" dirty="0"/>
+          </a:p>
+        </p:txBody>
+      </p:sp>
+      <p:sp>
+        <p:nvSpPr>
+          <p:cNvPr id="5" name="Text 3"/>
+          <p:cNvSpPr/>
+          <p:nvPr/>
+        </p:nvSpPr>
+        <p:spPr>
+          <a:xfrm>
+            <a:off x="406301" y="4434929"/>
+            <a:ext cx="8498026" cy="213271"/>
+          </a:xfrm>
+          <a:prstGeom prst="rect">
+            <a:avLst/>
+          </a:prstGeom>
+          <a:noFill/>
+          <a:ln/>
+        </p:spPr>
+        <p:txBody>
+          <a:bodyPr wrap="square" lIns="0" tIns="0" rIns="0" bIns="0" rtlCol="0" anchor="t"/>
+          <a:lstStyle/>
+          <a:p>
+            <a:pPr algn="l" indent="0" marL="0">
+              <a:lnSpc>
+                <a:spcPts val="1680"/>
+              </a:lnSpc>
+              <a:spcBef>
+                <a:spcPts val="300"/>
+              </a:spcBef>
+              <a:spcAft>
+                <a:spcPts val="300"/>
+              </a:spcAft>
+              <a:buNone/>
+            </a:pPr>
+            <a:r>
+              <a:rPr lang="en-US" sz="1200" dirty="0">
+                <a:solidFill>
+                  <a:srgbClr val="1C2833"/>
+                </a:solidFill>
+                <a:latin typeface="Arial" pitchFamily="34" charset="0"/>
+                <a:ea typeface="Arial" pitchFamily="34" charset="-122"/>
+                <a:cs typeface="Arial" pitchFamily="34" charset="-120"/>
+              </a:rPr>
+              <a:t>Middle ·  · IKS Curriculum</a:t>
+            </a:r>
+            <a:endParaRPr lang="en-US" sz="1200" dirty="0"/>
+          </a:p>
+        </p:txBody>
+      </p:sp>
+    </p:spTree>
+  </p:cSld>
+  <p:clrMapOvr>
+    <a:masterClrMapping/>
+  </p:clrMapOvr>
+</p:sld>
+</file>
+
+<file path=ppt/slides/slide20.xml><?xml version="1.0" encoding="utf-8"?>
+<p:sld xmlns:a="http://schemas.openxmlformats.org/drawingml/2006/main" xmlns:r="http://schemas.openxmlformats.org/officeDocument/2006/relationships" xmlns:p="http://schemas.openxmlformats.org/presentationml/2006/main">
+  <p:cSld name="Slide 20">
+    <p:bg>
+      <p:bgPr>
+        <a:solidFill>
+          <a:srgbClr val="FFFFFF"/>
+        </a:solidFill>
+      </p:bgPr>
+    </p:bg>
+    <p:spTree>
+      <p:nvGrpSpPr>
+        <p:cNvPr id="1" name=""/>
+        <p:cNvGrpSpPr/>
+        <p:nvPr/>
+      </p:nvGrpSpPr>
+      <p:grpSpPr>
+        <a:xfrm>
+          <a:off x="0" y="0"/>
+          <a:ext cx="0" cy="0"/>
+          <a:chOff x="0" y="0"/>
+          <a:chExt cx="0" cy="0"/>
+        </a:xfrm>
+      </p:grpSpPr>
+      <p:sp>
+        <p:nvSpPr>
+          <p:cNvPr id="2" name="Text 0"/>
+          <p:cNvSpPr/>
+          <p:nvPr/>
+        </p:nvSpPr>
+        <p:spPr>
+          <a:xfrm>
+            <a:off x="0" y="0"/>
+            <a:ext cx="9144000" cy="101501"/>
+          </a:xfrm>
+          <a:prstGeom prst="rect">
+            <a:avLst/>
+          </a:prstGeom>
+          <a:solidFill>
+            <a:srgbClr val="277884"/>
+          </a:solidFill>
+          <a:ln/>
+        </p:spPr>
+        <p:txBody>
+          <a:bodyPr wrap="square" rtlCol="0" anchor="ctr"/>
+          <a:lstStyle/>
+          <a:p>
+            <a:pPr indent="0" marL="0">
+              <a:buNone/>
+            </a:pPr>
+            <a:endParaRPr lang="en-US" dirty="0"/>
+          </a:p>
+        </p:txBody>
+      </p:sp>
+      <p:sp>
+        <p:nvSpPr>
+          <p:cNvPr id="3" name="Text 1"/>
+          <p:cNvSpPr/>
+          <p:nvPr/>
+        </p:nvSpPr>
+        <p:spPr>
+          <a:xfrm>
+            <a:off x="406301" y="457051"/>
+            <a:ext cx="8498026" cy="274290"/>
+          </a:xfrm>
+          <a:prstGeom prst="rect">
+            <a:avLst/>
+          </a:prstGeom>
+          <a:noFill/>
+          <a:ln/>
+        </p:spPr>
+        <p:txBody>
+          <a:bodyPr wrap="square" lIns="0" tIns="0" rIns="0" bIns="0" rtlCol="0" anchor="t"/>
+          <a:lstStyle/>
+          <a:p>
+            <a:pPr algn="l" indent="0" marL="0">
+              <a:lnSpc>
+                <a:spcPts val="2160"/>
+              </a:lnSpc>
+              <a:spcBef>
+                <a:spcPts val="600"/>
+              </a:spcBef>
+              <a:spcAft>
+                <a:spcPts val="800"/>
+              </a:spcAft>
+              <a:buNone/>
+            </a:pPr>
+            <a:r>
+              <a:rPr lang="en-US" sz="1800" b="1" dirty="0">
+                <a:solidFill>
+                  <a:srgbClr val="FE4447"/>
+                </a:solidFill>
+                <a:latin typeface="Georgia" pitchFamily="34" charset="0"/>
+                <a:ea typeface="Georgia" pitchFamily="34" charset="-122"/>
+                <a:cs typeface="Georgia" pitchFamily="34" charset="-120"/>
+              </a:rPr>
+              <a:t>Citation(s) used in this lesson</a:t>
+            </a:r>
+            <a:endParaRPr lang="en-US" sz="1800" dirty="0"/>
+          </a:p>
+        </p:txBody>
+      </p:sp>
+      <p:sp>
+        <p:nvSpPr>
+          <p:cNvPr id="4" name="Text 2"/>
+          <p:cNvSpPr/>
+          <p:nvPr/>
+        </p:nvSpPr>
+        <p:spPr>
+          <a:xfrm>
+            <a:off x="634901" y="883593"/>
+            <a:ext cx="8102798" cy="1142702"/>
+          </a:xfrm>
+          <a:prstGeom prst="rect">
+            <a:avLst/>
+          </a:prstGeom>
+          <a:noFill/>
+          <a:ln/>
+        </p:spPr>
+        <p:txBody>
+          <a:bodyPr wrap="square" lIns="0" tIns="0" rIns="0" bIns="0" rtlCol="0" anchor="t"/>
+          <a:lstStyle/>
+          <a:p>
+            <a:pPr algn="l" marL="342900" indent="-342900">
+              <a:lnSpc>
+                <a:spcPts val="1620"/>
+              </a:lnSpc>
+              <a:spcAft>
+                <a:spcPts val="300"/>
+              </a:spcAft>
+              <a:buSzPct val="100000"/>
+              <a:buChar char="•"/>
+            </a:pPr>
+            <a:r>
+              <a:rPr lang="en-US" sz="1200" i="1" dirty="0">
+                <a:solidFill>
+                  <a:srgbClr val="1C2833"/>
+                </a:solidFill>
+                <a:latin typeface="Arial" pitchFamily="34" charset="0"/>
+                <a:ea typeface="Arial" pitchFamily="34" charset="-122"/>
+                <a:cs typeface="Arial" pitchFamily="34" charset="-120"/>
+              </a:rPr>
+              <a:t>Azadirachta indica</a:t>
+            </a:r>
+            <a:pPr algn="l" indent="0" marL="0">
+              <a:lnSpc>
+                <a:spcPts val="1620"/>
+              </a:lnSpc>
+              <a:spcAft>
+                <a:spcPts val="300"/>
+              </a:spcAft>
+              <a:buNone/>
+            </a:pPr>
+            <a:r>
+              <a:rPr lang="en-US" sz="1200" dirty="0">
+                <a:solidFill>
+                  <a:srgbClr val="1C2833"/>
+                </a:solidFill>
+                <a:latin typeface="Arial" pitchFamily="34" charset="0"/>
+                <a:ea typeface="Arial" pitchFamily="34" charset="-122"/>
+                <a:cs typeface="Arial" pitchFamily="34" charset="-120"/>
+              </a:rPr>
+              <a:t> and azadirachtin as principal limonoid: standard ethnobotanical and pharmacognosy textbook content.</a:t>
+            </a:r>
+            <a:endParaRPr lang="en-US" sz="1200" dirty="0"/>
+          </a:p>
+          <a:p>
+            <a:pPr algn="l" marL="342900" indent="-342900">
+              <a:lnSpc>
+                <a:spcPts val="1620"/>
+              </a:lnSpc>
+              <a:spcAft>
+                <a:spcPts val="300"/>
+              </a:spcAft>
+              <a:buSzPct val="100000"/>
+              <a:buChar char="•"/>
+            </a:pPr>
+            <a:r>
+              <a:rPr lang="en-US" sz="1200" dirty="0">
+                <a:solidFill>
+                  <a:srgbClr val="1C2833"/>
+                </a:solidFill>
+                <a:latin typeface="Arial" pitchFamily="34" charset="0"/>
+                <a:ea typeface="Arial" pitchFamily="34" charset="-122"/>
+                <a:cs typeface="Arial" pitchFamily="34" charset="-120"/>
+              </a:rPr>
+              <a:t>Neem oil hepatotoxicity: documented in published case reports in pediatric toxicology literature. We do not cite a specific paper here — teachers who want to deepen this should search "margosa oil hepatotoxicity case report" in PubMed.</a:t>
             </a:r>
             <a:endParaRPr lang="en-US" sz="1200" dirty="0"/>
           </a:p>
@@ -3740,7 +6808,7 @@
                 <a:ea typeface="Georgia" pitchFamily="34" charset="-122"/>
                 <a:cs typeface="Georgia" pitchFamily="34" charset="-120"/>
               </a:rPr>
-              <a:t>Vocabulary introduced today</a:t>
+              <a:t>Materials</a:t>
             </a:r>
             <a:endParaRPr lang="en-US" sz="1800" dirty="0"/>
           </a:p>
@@ -3755,7 +6823,7 @@
         <p:spPr>
           <a:xfrm>
             <a:off x="634901" y="883593"/>
-            <a:ext cx="8102798" cy="975122"/>
+            <a:ext cx="8102798" cy="1462683"/>
           </a:xfrm>
           <a:prstGeom prst="rect">
             <a:avLst/>
@@ -3778,26 +6846,6 @@
               <a:buChar char="•"/>
             </a:pPr>
             <a:r>
-              <a:rPr lang="en-US" sz="1200" i="1" dirty="0">
-                <a:solidFill>
-                  <a:srgbClr val="1C2833"/>
-                </a:solidFill>
-                <a:latin typeface="Arial" pitchFamily="34" charset="0"/>
-                <a:ea typeface="Arial" pitchFamily="34" charset="-122"/>
-                <a:cs typeface="Arial" pitchFamily="34" charset="-120"/>
-              </a:rPr>
-              <a:t>nimba</a:t>
-            </a:r>
-            <a:pPr algn="l" indent="0" marL="0">
-              <a:lnSpc>
-                <a:spcPts val="1620"/>
-              </a:lnSpc>
-              <a:spcAft>
-                <a:spcPts val="300"/>
-              </a:spcAft>
-              <a:buNone/>
-            </a:pPr>
-            <a:r>
               <a:rPr lang="en-US" sz="1200" dirty="0">
                 <a:solidFill>
                   <a:srgbClr val="1C2833"/>
@@ -3806,47 +6854,7 @@
                 <a:ea typeface="Arial" pitchFamily="34" charset="-122"/>
                 <a:cs typeface="Arial" pitchFamily="34" charset="-120"/>
               </a:rPr>
-              <a:t> (IAST: nimba; lit. "the bitter one") — </a:t>
-            </a:r>
-            <a:pPr algn="l" indent="0" marL="0">
-              <a:lnSpc>
-                <a:spcPts val="1620"/>
-              </a:lnSpc>
-              <a:spcAft>
-                <a:spcPts val="300"/>
-              </a:spcAft>
-              <a:buNone/>
-            </a:pPr>
-            <a:r>
-              <a:rPr lang="en-US" sz="1200" i="1" dirty="0">
-                <a:solidFill>
-                  <a:srgbClr val="1C2833"/>
-                </a:solidFill>
-                <a:latin typeface="Arial" pitchFamily="34" charset="0"/>
-                <a:ea typeface="Arial" pitchFamily="34" charset="-122"/>
-                <a:cs typeface="Arial" pitchFamily="34" charset="-120"/>
-              </a:rPr>
-              <a:t>Azadirachta indica</a:t>
-            </a:r>
-            <a:pPr algn="l" indent="0" marL="0">
-              <a:lnSpc>
-                <a:spcPts val="1620"/>
-              </a:lnSpc>
-              <a:spcAft>
-                <a:spcPts val="300"/>
-              </a:spcAft>
-              <a:buNone/>
-            </a:pPr>
-            <a:r>
-              <a:rPr lang="en-US" sz="1200" dirty="0">
-                <a:solidFill>
-                  <a:srgbClr val="1C2833"/>
-                </a:solidFill>
-                <a:latin typeface="Arial" pitchFamily="34" charset="0"/>
-                <a:ea typeface="Arial" pitchFamily="34" charset="-122"/>
-                <a:cs typeface="Arial" pitchFamily="34" charset="-120"/>
-              </a:rPr>
-              <a:t>, the neem tree.</a:t>
+              <a:t>A few dried neem leaves in a sealed container (smelling only — no chewing)</a:t>
             </a:r>
             <a:endParaRPr lang="en-US" sz="1200" dirty="0"/>
           </a:p>
@@ -3862,26 +6870,6 @@
               <a:buChar char="•"/>
             </a:pPr>
             <a:r>
-              <a:rPr lang="en-US" sz="1200" i="1" dirty="0">
-                <a:solidFill>
-                  <a:srgbClr val="1C2833"/>
-                </a:solidFill>
-                <a:latin typeface="Arial" pitchFamily="34" charset="0"/>
-                <a:ea typeface="Arial" pitchFamily="34" charset="-122"/>
-                <a:cs typeface="Arial" pitchFamily="34" charset="-120"/>
-              </a:rPr>
-              <a:t>tikta</a:t>
-            </a:r>
-            <a:pPr algn="l" indent="0" marL="0">
-              <a:lnSpc>
-                <a:spcPts val="1620"/>
-              </a:lnSpc>
-              <a:spcAft>
-                <a:spcPts val="300"/>
-              </a:spcAft>
-              <a:buNone/>
-            </a:pPr>
-            <a:r>
               <a:rPr lang="en-US" sz="1200" dirty="0">
                 <a:solidFill>
                   <a:srgbClr val="1C2833"/>
@@ -3890,47 +6878,7 @@
                 <a:ea typeface="Arial" pitchFamily="34" charset="-122"/>
                 <a:cs typeface="Arial" pitchFamily="34" charset="-120"/>
               </a:rPr>
-              <a:t> (IAST: tikta; lit. "bitter") — one of the six tastes in Ayurveda; neem is the canonical </a:t>
-            </a:r>
-            <a:pPr algn="l" indent="0" marL="0">
-              <a:lnSpc>
-                <a:spcPts val="1620"/>
-              </a:lnSpc>
-              <a:spcAft>
-                <a:spcPts val="300"/>
-              </a:spcAft>
-              <a:buNone/>
-            </a:pPr>
-            <a:r>
-              <a:rPr lang="en-US" sz="1200" i="1" dirty="0">
-                <a:solidFill>
-                  <a:srgbClr val="1C2833"/>
-                </a:solidFill>
-                <a:latin typeface="Arial" pitchFamily="34" charset="0"/>
-                <a:ea typeface="Arial" pitchFamily="34" charset="-122"/>
-                <a:cs typeface="Arial" pitchFamily="34" charset="-120"/>
-              </a:rPr>
-              <a:t>tikta</a:t>
-            </a:r>
-            <a:pPr algn="l" indent="0" marL="0">
-              <a:lnSpc>
-                <a:spcPts val="1620"/>
-              </a:lnSpc>
-              <a:spcAft>
-                <a:spcPts val="300"/>
-              </a:spcAft>
-              <a:buNone/>
-            </a:pPr>
-            <a:r>
-              <a:rPr lang="en-US" sz="1200" dirty="0">
-                <a:solidFill>
-                  <a:srgbClr val="1C2833"/>
-                </a:solidFill>
-                <a:latin typeface="Arial" pitchFamily="34" charset="0"/>
-                <a:ea typeface="Arial" pitchFamily="34" charset="-122"/>
-                <a:cs typeface="Arial" pitchFamily="34" charset="-120"/>
-              </a:rPr>
-              <a:t> plant.</a:t>
+              <a:t>A picture or — if you can — a neem twig with the characteristic compound leaf</a:t>
             </a:r>
             <a:endParaRPr lang="en-US" sz="1200" dirty="0"/>
           </a:p>
@@ -3946,15 +6894,15 @@
               <a:buChar char="•"/>
             </a:pPr>
             <a:r>
-              <a:rPr lang="en-US" sz="1200" i="1" dirty="0">
-                <a:solidFill>
-                  <a:srgbClr val="1C2833"/>
-                </a:solidFill>
-                <a:latin typeface="Arial" pitchFamily="34" charset="0"/>
-                <a:ea typeface="Arial" pitchFamily="34" charset="-122"/>
-                <a:cs typeface="Arial" pitchFamily="34" charset="-120"/>
-              </a:rPr>
-              <a:t>azadirachtin</a:t>
+              <a:rPr lang="en-US" sz="1200" dirty="0">
+                <a:solidFill>
+                  <a:srgbClr val="1C2833"/>
+                </a:solidFill>
+                <a:latin typeface="Arial" pitchFamily="34" charset="0"/>
+                <a:ea typeface="Arial" pitchFamily="34" charset="-122"/>
+                <a:cs typeface="Arial" pitchFamily="34" charset="-120"/>
+              </a:rPr>
+              <a:t>A small bottle of neem oil </a:t>
             </a:r>
             <a:pPr algn="l" indent="0" marL="0">
               <a:lnSpc>
@@ -3966,6 +6914,26 @@
               <a:buNone/>
             </a:pPr>
             <a:r>
+              <a:rPr lang="en-US" sz="1200" b="1" dirty="0">
+                <a:solidFill>
+                  <a:srgbClr val="1C2833"/>
+                </a:solidFill>
+                <a:latin typeface="Arial" pitchFamily="34" charset="0"/>
+                <a:ea typeface="Arial" pitchFamily="34" charset="-122"/>
+                <a:cs typeface="Arial" pitchFamily="34" charset="-120"/>
+              </a:rPr>
+              <a:t>kept by the teacher</a:t>
+            </a:r>
+            <a:pPr algn="l" indent="0" marL="0">
+              <a:lnSpc>
+                <a:spcPts val="1620"/>
+              </a:lnSpc>
+              <a:spcAft>
+                <a:spcPts val="300"/>
+              </a:spcAft>
+              <a:buNone/>
+            </a:pPr>
+            <a:r>
               <a:rPr lang="en-US" sz="1200" dirty="0">
                 <a:solidFill>
                   <a:srgbClr val="1C2833"/>
@@ -3974,7 +6942,55 @@
                 <a:ea typeface="Arial" pitchFamily="34" charset="-122"/>
                 <a:cs typeface="Arial" pitchFamily="34" charset="-120"/>
               </a:rPr>
-              <a:t> — a complex limonoid compound. The most-studied bioactive in neem; the molecule behind neem's use as an agricultural insect repellent.</a:t>
+              <a:t> (do not pass to students)</a:t>
+            </a:r>
+            <a:endParaRPr lang="en-US" sz="1200" dirty="0"/>
+          </a:p>
+          <a:p>
+            <a:pPr algn="l" marL="342900" indent="-342900">
+              <a:lnSpc>
+                <a:spcPts val="1620"/>
+              </a:lnSpc>
+              <a:spcAft>
+                <a:spcPts val="300"/>
+              </a:spcAft>
+              <a:buSzPct val="100000"/>
+              <a:buChar char="•"/>
+            </a:pPr>
+            <a:r>
+              <a:rPr lang="en-US" sz="1200" dirty="0">
+                <a:solidFill>
+                  <a:srgbClr val="1C2833"/>
+                </a:solidFill>
+                <a:latin typeface="Arial" pitchFamily="34" charset="0"/>
+                <a:ea typeface="Arial" pitchFamily="34" charset="-122"/>
+                <a:cs typeface="Arial" pitchFamily="34" charset="-120"/>
+              </a:rPr>
+              <a:t>A piece of neem-containing soap (commercial — most Indian general stores stock these) for the "what's it actually in" demonstration</a:t>
+            </a:r>
+            <a:endParaRPr lang="en-US" sz="1200" dirty="0"/>
+          </a:p>
+          <a:p>
+            <a:pPr algn="l" marL="342900" indent="-342900">
+              <a:lnSpc>
+                <a:spcPts val="1620"/>
+              </a:lnSpc>
+              <a:spcAft>
+                <a:spcPts val="300"/>
+              </a:spcAft>
+              <a:buSzPct val="100000"/>
+              <a:buChar char="•"/>
+            </a:pPr>
+            <a:r>
+              <a:rPr lang="en-US" sz="1200" dirty="0">
+                <a:solidFill>
+                  <a:srgbClr val="1C2833"/>
+                </a:solidFill>
+                <a:latin typeface="Arial" pitchFamily="34" charset="0"/>
+                <a:ea typeface="Arial" pitchFamily="34" charset="-122"/>
+                <a:cs typeface="Arial" pitchFamily="34" charset="-120"/>
+              </a:rPr>
+              <a:t>Whiteboard</a:t>
             </a:r>
             <a:endParaRPr lang="en-US" sz="1200" dirty="0"/>
           </a:p>
@@ -4132,7 +7148,7 @@
                 <a:ea typeface="Georgia" pitchFamily="34" charset="-122"/>
                 <a:cs typeface="Georgia" pitchFamily="34" charset="-120"/>
               </a:rPr>
-              <a:t>Lesson flow</a:t>
+              <a:t>Vocabulary introduced today</a:t>
             </a:r>
             <a:endParaRPr lang="en-US" sz="1800" dirty="0"/>
           </a:p>
@@ -4141,6 +7157,240 @@
       <p:sp>
         <p:nvSpPr>
           <p:cNvPr id="4" name="Text 2"/>
+          <p:cNvSpPr/>
+          <p:nvPr/>
+        </p:nvSpPr>
+        <p:spPr>
+          <a:xfrm>
+            <a:off x="634901" y="883593"/>
+            <a:ext cx="8102798" cy="975122"/>
+          </a:xfrm>
+          <a:prstGeom prst="rect">
+            <a:avLst/>
+          </a:prstGeom>
+          <a:noFill/>
+          <a:ln/>
+        </p:spPr>
+        <p:txBody>
+          <a:bodyPr wrap="square" lIns="0" tIns="0" rIns="0" bIns="0" rtlCol="0" anchor="t"/>
+          <a:lstStyle/>
+          <a:p>
+            <a:pPr algn="l" marL="342900" indent="-342900">
+              <a:lnSpc>
+                <a:spcPts val="1620"/>
+              </a:lnSpc>
+              <a:spcAft>
+                <a:spcPts val="300"/>
+              </a:spcAft>
+              <a:buSzPct val="100000"/>
+              <a:buChar char="•"/>
+            </a:pPr>
+            <a:r>
+              <a:rPr lang="en-US" sz="1200" i="1" dirty="0">
+                <a:solidFill>
+                  <a:srgbClr val="1C2833"/>
+                </a:solidFill>
+                <a:latin typeface="Arial" pitchFamily="34" charset="0"/>
+                <a:ea typeface="Arial" pitchFamily="34" charset="-122"/>
+                <a:cs typeface="Arial" pitchFamily="34" charset="-120"/>
+              </a:rPr>
+              <a:t>nimba</a:t>
+            </a:r>
+            <a:pPr algn="l" indent="0" marL="0">
+              <a:lnSpc>
+                <a:spcPts val="1620"/>
+              </a:lnSpc>
+              <a:spcAft>
+                <a:spcPts val="300"/>
+              </a:spcAft>
+              <a:buNone/>
+            </a:pPr>
+            <a:r>
+              <a:rPr lang="en-US" sz="1200" dirty="0">
+                <a:solidFill>
+                  <a:srgbClr val="1C2833"/>
+                </a:solidFill>
+                <a:latin typeface="Arial" pitchFamily="34" charset="0"/>
+                <a:ea typeface="Arial" pitchFamily="34" charset="-122"/>
+                <a:cs typeface="Arial" pitchFamily="34" charset="-120"/>
+              </a:rPr>
+              <a:t> (IAST: nimba; lit. "the bitter one") — </a:t>
+            </a:r>
+            <a:pPr algn="l" indent="0" marL="0">
+              <a:lnSpc>
+                <a:spcPts val="1620"/>
+              </a:lnSpc>
+              <a:spcAft>
+                <a:spcPts val="300"/>
+              </a:spcAft>
+              <a:buNone/>
+            </a:pPr>
+            <a:r>
+              <a:rPr lang="en-US" sz="1200" i="1" dirty="0">
+                <a:solidFill>
+                  <a:srgbClr val="1C2833"/>
+                </a:solidFill>
+                <a:latin typeface="Arial" pitchFamily="34" charset="0"/>
+                <a:ea typeface="Arial" pitchFamily="34" charset="-122"/>
+                <a:cs typeface="Arial" pitchFamily="34" charset="-120"/>
+              </a:rPr>
+              <a:t>Azadirachta indica</a:t>
+            </a:r>
+            <a:pPr algn="l" indent="0" marL="0">
+              <a:lnSpc>
+                <a:spcPts val="1620"/>
+              </a:lnSpc>
+              <a:spcAft>
+                <a:spcPts val="300"/>
+              </a:spcAft>
+              <a:buNone/>
+            </a:pPr>
+            <a:r>
+              <a:rPr lang="en-US" sz="1200" dirty="0">
+                <a:solidFill>
+                  <a:srgbClr val="1C2833"/>
+                </a:solidFill>
+                <a:latin typeface="Arial" pitchFamily="34" charset="0"/>
+                <a:ea typeface="Arial" pitchFamily="34" charset="-122"/>
+                <a:cs typeface="Arial" pitchFamily="34" charset="-120"/>
+              </a:rPr>
+              <a:t>, the neem tree.</a:t>
+            </a:r>
+            <a:endParaRPr lang="en-US" sz="1200" dirty="0"/>
+          </a:p>
+          <a:p>
+            <a:pPr algn="l" marL="342900" indent="-342900">
+              <a:lnSpc>
+                <a:spcPts val="1620"/>
+              </a:lnSpc>
+              <a:spcAft>
+                <a:spcPts val="300"/>
+              </a:spcAft>
+              <a:buSzPct val="100000"/>
+              <a:buChar char="•"/>
+            </a:pPr>
+            <a:r>
+              <a:rPr lang="en-US" sz="1200" i="1" dirty="0">
+                <a:solidFill>
+                  <a:srgbClr val="1C2833"/>
+                </a:solidFill>
+                <a:latin typeface="Arial" pitchFamily="34" charset="0"/>
+                <a:ea typeface="Arial" pitchFamily="34" charset="-122"/>
+                <a:cs typeface="Arial" pitchFamily="34" charset="-120"/>
+              </a:rPr>
+              <a:t>tikta</a:t>
+            </a:r>
+            <a:pPr algn="l" indent="0" marL="0">
+              <a:lnSpc>
+                <a:spcPts val="1620"/>
+              </a:lnSpc>
+              <a:spcAft>
+                <a:spcPts val="300"/>
+              </a:spcAft>
+              <a:buNone/>
+            </a:pPr>
+            <a:r>
+              <a:rPr lang="en-US" sz="1200" dirty="0">
+                <a:solidFill>
+                  <a:srgbClr val="1C2833"/>
+                </a:solidFill>
+                <a:latin typeface="Arial" pitchFamily="34" charset="0"/>
+                <a:ea typeface="Arial" pitchFamily="34" charset="-122"/>
+                <a:cs typeface="Arial" pitchFamily="34" charset="-120"/>
+              </a:rPr>
+              <a:t> (IAST: tikta; lit. "bitter") — one of the six tastes in Ayurveda; neem is the canonical </a:t>
+            </a:r>
+            <a:pPr algn="l" indent="0" marL="0">
+              <a:lnSpc>
+                <a:spcPts val="1620"/>
+              </a:lnSpc>
+              <a:spcAft>
+                <a:spcPts val="300"/>
+              </a:spcAft>
+              <a:buNone/>
+            </a:pPr>
+            <a:r>
+              <a:rPr lang="en-US" sz="1200" i="1" dirty="0">
+                <a:solidFill>
+                  <a:srgbClr val="1C2833"/>
+                </a:solidFill>
+                <a:latin typeface="Arial" pitchFamily="34" charset="0"/>
+                <a:ea typeface="Arial" pitchFamily="34" charset="-122"/>
+                <a:cs typeface="Arial" pitchFamily="34" charset="-120"/>
+              </a:rPr>
+              <a:t>tikta</a:t>
+            </a:r>
+            <a:pPr algn="l" indent="0" marL="0">
+              <a:lnSpc>
+                <a:spcPts val="1620"/>
+              </a:lnSpc>
+              <a:spcAft>
+                <a:spcPts val="300"/>
+              </a:spcAft>
+              <a:buNone/>
+            </a:pPr>
+            <a:r>
+              <a:rPr lang="en-US" sz="1200" dirty="0">
+                <a:solidFill>
+                  <a:srgbClr val="1C2833"/>
+                </a:solidFill>
+                <a:latin typeface="Arial" pitchFamily="34" charset="0"/>
+                <a:ea typeface="Arial" pitchFamily="34" charset="-122"/>
+                <a:cs typeface="Arial" pitchFamily="34" charset="-120"/>
+              </a:rPr>
+              <a:t> plant.</a:t>
+            </a:r>
+            <a:endParaRPr lang="en-US" sz="1200" dirty="0"/>
+          </a:p>
+          <a:p>
+            <a:pPr algn="l" marL="342900" indent="-342900">
+              <a:lnSpc>
+                <a:spcPts val="1620"/>
+              </a:lnSpc>
+              <a:spcAft>
+                <a:spcPts val="300"/>
+              </a:spcAft>
+              <a:buSzPct val="100000"/>
+              <a:buChar char="•"/>
+            </a:pPr>
+            <a:r>
+              <a:rPr lang="en-US" sz="1200" i="1" dirty="0">
+                <a:solidFill>
+                  <a:srgbClr val="1C2833"/>
+                </a:solidFill>
+                <a:latin typeface="Arial" pitchFamily="34" charset="0"/>
+                <a:ea typeface="Arial" pitchFamily="34" charset="-122"/>
+                <a:cs typeface="Arial" pitchFamily="34" charset="-120"/>
+              </a:rPr>
+              <a:t>azadirachtin</a:t>
+            </a:r>
+            <a:pPr algn="l" indent="0" marL="0">
+              <a:lnSpc>
+                <a:spcPts val="1620"/>
+              </a:lnSpc>
+              <a:spcAft>
+                <a:spcPts val="300"/>
+              </a:spcAft>
+              <a:buNone/>
+            </a:pPr>
+            <a:r>
+              <a:rPr lang="en-US" sz="1200" dirty="0">
+                <a:solidFill>
+                  <a:srgbClr val="1C2833"/>
+                </a:solidFill>
+                <a:latin typeface="Arial" pitchFamily="34" charset="0"/>
+                <a:ea typeface="Arial" pitchFamily="34" charset="-122"/>
+                <a:cs typeface="Arial" pitchFamily="34" charset="-120"/>
+              </a:rPr>
+              <a:t> — a complex limonoid compound. The most-studied bioactive in neem; the molecule behind neem's use as an agricultural insect repellent.</a:t>
+            </a:r>
+            <a:endParaRPr lang="en-US" sz="1200" dirty="0"/>
+          </a:p>
+        </p:txBody>
+      </p:sp>
+      <p:sp>
+        <p:nvSpPr>
+          <p:cNvPr id="5" name="Text 3"/>
           <p:cNvSpPr/>
           <p:nvPr/>
         </p:nvSpPr>
@@ -4290,7 +7540,7 @@
                 <a:ea typeface="Georgia" pitchFamily="34" charset="-122"/>
                 <a:cs typeface="Georgia" pitchFamily="34" charset="-120"/>
               </a:rPr>
-              <a:t>Warm-up (5 min)</a:t>
+              <a:t>Lesson flow</a:t>
             </a:r>
             <a:endParaRPr lang="en-US" sz="1800" dirty="0"/>
           </a:p>
@@ -4299,219 +7549,6 @@
       <p:sp>
         <p:nvSpPr>
           <p:cNvPr id="4" name="Text 2"/>
-          <p:cNvSpPr/>
-          <p:nvPr/>
-        </p:nvSpPr>
-        <p:spPr>
-          <a:xfrm>
-            <a:off x="406301" y="870942"/>
-            <a:ext cx="8498026" cy="213271"/>
-          </a:xfrm>
-          <a:prstGeom prst="rect">
-            <a:avLst/>
-          </a:prstGeom>
-          <a:noFill/>
-          <a:ln/>
-        </p:spPr>
-        <p:txBody>
-          <a:bodyPr wrap="square" lIns="0" tIns="0" rIns="0" bIns="0" rtlCol="0" anchor="t"/>
-          <a:lstStyle/>
-          <a:p>
-            <a:pPr algn="l" indent="0" marL="0">
-              <a:lnSpc>
-                <a:spcPts val="1680"/>
-              </a:lnSpc>
-              <a:spcBef>
-                <a:spcPts val="300"/>
-              </a:spcBef>
-              <a:spcAft>
-                <a:spcPts val="300"/>
-              </a:spcAft>
-              <a:buNone/>
-            </a:pPr>
-            <a:r>
-              <a:rPr lang="en-US" sz="1200" dirty="0">
-                <a:solidFill>
-                  <a:srgbClr val="1C2833"/>
-                </a:solidFill>
-                <a:latin typeface="Arial" pitchFamily="34" charset="0"/>
-                <a:ea typeface="Arial" pitchFamily="34" charset="-122"/>
-                <a:cs typeface="Arial" pitchFamily="34" charset="-120"/>
-              </a:rPr>
-              <a:t>Daily check-in: who has seen a neem tree near their home, school, or daily route? Hands.</a:t>
-            </a:r>
-            <a:endParaRPr lang="en-US" sz="1200" dirty="0"/>
-          </a:p>
-        </p:txBody>
-      </p:sp>
-      <p:sp>
-        <p:nvSpPr>
-          <p:cNvPr id="5" name="Text 3"/>
-          <p:cNvSpPr/>
-          <p:nvPr/>
-        </p:nvSpPr>
-        <p:spPr>
-          <a:xfrm>
-            <a:off x="406301" y="1160413"/>
-            <a:ext cx="8498026" cy="213271"/>
-          </a:xfrm>
-          <a:prstGeom prst="rect">
-            <a:avLst/>
-          </a:prstGeom>
-          <a:noFill/>
-          <a:ln/>
-        </p:spPr>
-        <p:txBody>
-          <a:bodyPr wrap="square" lIns="0" tIns="0" rIns="0" bIns="0" rtlCol="0" anchor="t"/>
-          <a:lstStyle/>
-          <a:p>
-            <a:pPr algn="l" indent="0" marL="0">
-              <a:lnSpc>
-                <a:spcPts val="1680"/>
-              </a:lnSpc>
-              <a:spcBef>
-                <a:spcPts val="300"/>
-              </a:spcBef>
-              <a:spcAft>
-                <a:spcPts val="300"/>
-              </a:spcAft>
-              <a:buNone/>
-            </a:pPr>
-            <a:r>
-              <a:rPr lang="en-US" sz="1200" i="1" dirty="0">
-                <a:solidFill>
-                  <a:srgbClr val="1C2833"/>
-                </a:solidFill>
-                <a:latin typeface="Arial" pitchFamily="34" charset="0"/>
-                <a:ea typeface="Arial" pitchFamily="34" charset="-122"/>
-                <a:cs typeface="Arial" pitchFamily="34" charset="-120"/>
-              </a:rPr>
-              <a:t>"Anyone here ever been told 'eat a neem leaf, it's good for you'? Did you?"</a:t>
-            </a:r>
-            <a:pPr algn="l" indent="0" marL="0">
-              <a:lnSpc>
-                <a:spcPts val="1680"/>
-              </a:lnSpc>
-              <a:spcBef>
-                <a:spcPts val="300"/>
-              </a:spcBef>
-              <a:spcAft>
-                <a:spcPts val="300"/>
-              </a:spcAft>
-              <a:buNone/>
-            </a:pPr>
-            <a:r>
-              <a:rPr lang="en-US" sz="1200" dirty="0">
-                <a:solidFill>
-                  <a:srgbClr val="1C2833"/>
-                </a:solidFill>
-                <a:latin typeface="Arial" pitchFamily="34" charset="0"/>
-                <a:ea typeface="Arial" pitchFamily="34" charset="-122"/>
-                <a:cs typeface="Arial" pitchFamily="34" charset="-120"/>
-              </a:rPr>
-              <a:t> (Most who tried will say it tasted terrible.)</a:t>
-            </a:r>
-            <a:endParaRPr lang="en-US" sz="1200" dirty="0"/>
-          </a:p>
-        </p:txBody>
-      </p:sp>
-      <p:sp>
-        <p:nvSpPr>
-          <p:cNvPr id="6" name="Text 4"/>
-          <p:cNvSpPr/>
-          <p:nvPr/>
-        </p:nvSpPr>
-        <p:spPr>
-          <a:xfrm>
-            <a:off x="406301" y="1449884"/>
-            <a:ext cx="8498026" cy="213271"/>
-          </a:xfrm>
-          <a:prstGeom prst="rect">
-            <a:avLst/>
-          </a:prstGeom>
-          <a:noFill/>
-          <a:ln/>
-        </p:spPr>
-        <p:txBody>
-          <a:bodyPr wrap="square" lIns="0" tIns="0" rIns="0" bIns="0" rtlCol="0" anchor="t"/>
-          <a:lstStyle/>
-          <a:p>
-            <a:pPr algn="l" indent="0" marL="0">
-              <a:lnSpc>
-                <a:spcPts val="1680"/>
-              </a:lnSpc>
-              <a:spcBef>
-                <a:spcPts val="300"/>
-              </a:spcBef>
-              <a:spcAft>
-                <a:spcPts val="300"/>
-              </a:spcAft>
-              <a:buNone/>
-            </a:pPr>
-            <a:r>
-              <a:rPr lang="en-US" sz="1200" dirty="0">
-                <a:solidFill>
-                  <a:srgbClr val="1C2833"/>
-                </a:solidFill>
-                <a:latin typeface="Arial" pitchFamily="34" charset="0"/>
-                <a:ea typeface="Arial" pitchFamily="34" charset="-122"/>
-                <a:cs typeface="Arial" pitchFamily="34" charset="-120"/>
-              </a:rPr>
-              <a:t>Bridge: today we explore why the body's </a:t>
-            </a:r>
-            <a:pPr algn="l" indent="0" marL="0">
-              <a:lnSpc>
-                <a:spcPts val="1680"/>
-              </a:lnSpc>
-              <a:spcBef>
-                <a:spcPts val="300"/>
-              </a:spcBef>
-              <a:spcAft>
-                <a:spcPts val="300"/>
-              </a:spcAft>
-              <a:buNone/>
-            </a:pPr>
-            <a:r>
-              <a:rPr lang="en-US" sz="1200" i="1" dirty="0">
-                <a:solidFill>
-                  <a:srgbClr val="1C2833"/>
-                </a:solidFill>
-                <a:latin typeface="Arial" pitchFamily="34" charset="0"/>
-                <a:ea typeface="Arial" pitchFamily="34" charset="-122"/>
-                <a:cs typeface="Arial" pitchFamily="34" charset="-120"/>
-              </a:rPr>
-              <a:t>first response</a:t>
-            </a:r>
-            <a:pPr algn="l" indent="0" marL="0">
-              <a:lnSpc>
-                <a:spcPts val="1680"/>
-              </a:lnSpc>
-              <a:spcBef>
-                <a:spcPts val="300"/>
-              </a:spcBef>
-              <a:spcAft>
-                <a:spcPts val="300"/>
-              </a:spcAft>
-              <a:buNone/>
-            </a:pPr>
-            <a:r>
-              <a:rPr lang="en-US" sz="1200" dirty="0">
-                <a:solidFill>
-                  <a:srgbClr val="1C2833"/>
-                </a:solidFill>
-                <a:latin typeface="Arial" pitchFamily="34" charset="0"/>
-                <a:ea typeface="Arial" pitchFamily="34" charset="-122"/>
-                <a:cs typeface="Arial" pitchFamily="34" charset="-120"/>
-              </a:rPr>
-              <a:t> to neem — "spit it out" — is actually telling us something useful.</a:t>
-            </a:r>
-            <a:endParaRPr lang="en-US" sz="1200" dirty="0"/>
-          </a:p>
-        </p:txBody>
-      </p:sp>
-      <p:sp>
-        <p:nvSpPr>
-          <p:cNvPr id="7" name="Text 5"/>
           <p:cNvSpPr/>
           <p:nvPr/>
         </p:nvSpPr>
@@ -4661,7 +7698,7 @@
                 <a:ea typeface="Georgia" pitchFamily="34" charset="-122"/>
                 <a:cs typeface="Georgia" pitchFamily="34" charset="-120"/>
               </a:rPr>
-              <a:t>Activity (15 min) — Formative Quiz Part A + Compound-leaf sketch</a:t>
+              <a:t>Warm-up (5 min)</a:t>
             </a:r>
             <a:endParaRPr lang="en-US" sz="1800" dirty="0"/>
           </a:p>
@@ -4676,7 +7713,7 @@
         <p:spPr>
           <a:xfrm>
             <a:off x="406301" y="870942"/>
-            <a:ext cx="8498026" cy="436066"/>
+            <a:ext cx="8498026" cy="213271"/>
           </a:xfrm>
           <a:prstGeom prst="rect">
             <a:avLst/>
@@ -4701,29 +7738,6 @@
               <a:buNone/>
             </a:pPr>
             <a:r>
-              <a:rPr lang="en-US" sz="1200" b="1" dirty="0">
-                <a:solidFill>
-                  <a:srgbClr val="1C2833"/>
-                </a:solidFill>
-                <a:latin typeface="Arial" pitchFamily="34" charset="0"/>
-                <a:ea typeface="Arial" pitchFamily="34" charset="-122"/>
-                <a:cs typeface="Arial" pitchFamily="34" charset="-120"/>
-              </a:rPr>
-              <a:t>First 5 min — Formative Quiz Part A</a:t>
-            </a:r>
-            <a:pPr algn="l" indent="0" marL="0">
-              <a:lnSpc>
-                <a:spcPts val="1680"/>
-              </a:lnSpc>
-              <a:spcBef>
-                <a:spcPts val="300"/>
-              </a:spcBef>
-              <a:spcAft>
-                <a:spcPts val="300"/>
-              </a:spcAft>
-              <a:buNone/>
-            </a:pPr>
-            <a:r>
               <a:rPr lang="en-US" sz="1200" dirty="0">
                 <a:solidFill>
                   <a:srgbClr val="1C2833"/>
@@ -4732,53 +7746,7 @@
                 <a:ea typeface="Arial" pitchFamily="34" charset="-122"/>
                 <a:cs typeface="Arial" pitchFamily="34" charset="-120"/>
               </a:rPr>
-              <a:t> (from </a:t>
-            </a:r>
-            <a:pPr algn="l" indent="0" marL="0">
-              <a:lnSpc>
-                <a:spcPts val="1680"/>
-              </a:lnSpc>
-              <a:spcBef>
-                <a:spcPts val="300"/>
-              </a:spcBef>
-              <a:spcAft>
-                <a:spcPts val="300"/>
-              </a:spcAft>
-              <a:buNone/>
-            </a:pPr>
-            <a:r>
-              <a:rPr lang="en-US" sz="1200" dirty="0">
-                <a:solidFill>
-                  <a:srgbClr val="1C2833"/>
-                </a:solidFill>
-                <a:latin typeface="Arial" pitchFamily="34" charset="0"/>
-                <a:ea typeface="Arial" pitchFamily="34" charset="-122"/>
-                <a:cs typeface="Arial" pitchFamily="34" charset="-120"/>
-              </a:rPr>
-              <a:t>quizzes/formative.md</a:t>
-            </a:r>
-            <a:pPr algn="l" indent="0" marL="0">
-              <a:lnSpc>
-                <a:spcPts val="1680"/>
-              </a:lnSpc>
-              <a:spcBef>
-                <a:spcPts val="300"/>
-              </a:spcBef>
-              <a:spcAft>
-                <a:spcPts val="300"/>
-              </a:spcAft>
-              <a:buNone/>
-            </a:pPr>
-            <a:r>
-              <a:rPr lang="en-US" sz="1200" dirty="0">
-                <a:solidFill>
-                  <a:srgbClr val="1C2833"/>
-                </a:solidFill>
-                <a:latin typeface="Arial" pitchFamily="34" charset="0"/>
-                <a:ea typeface="Arial" pitchFamily="34" charset="-122"/>
-                <a:cs typeface="Arial" pitchFamily="34" charset="-120"/>
-              </a:rPr>
-              <a:t>). Hand out the 5-question slip. Pencils only. Collect at minute 5.</a:t>
+              <a:t>Daily check-in: who has seen a neem tree near their home, school, or daily route? Hands.</a:t>
             </a:r>
             <a:endParaRPr lang="en-US" sz="1200" dirty="0"/>
           </a:p>
@@ -4792,8 +7760,8 @@
         </p:nvSpPr>
         <p:spPr>
           <a:xfrm>
-            <a:off x="406301" y="1383209"/>
-            <a:ext cx="8498026" cy="853083"/>
+            <a:off x="406301" y="1160413"/>
+            <a:ext cx="8498026" cy="213271"/>
           </a:xfrm>
           <a:prstGeom prst="rect">
             <a:avLst/>
@@ -4818,15 +7786,15 @@
               <a:buNone/>
             </a:pPr>
             <a:r>
-              <a:rPr lang="en-US" sz="1200" b="1" dirty="0">
-                <a:solidFill>
-                  <a:srgbClr val="1C2833"/>
-                </a:solidFill>
-                <a:latin typeface="Arial" pitchFamily="34" charset="0"/>
-                <a:ea typeface="Arial" pitchFamily="34" charset="-122"/>
-                <a:cs typeface="Arial" pitchFamily="34" charset="-120"/>
-              </a:rPr>
-              <a:t>Next 10 min — Compound-leaf sketch.</a:t>
+              <a:rPr lang="en-US" sz="1200" i="1" dirty="0">
+                <a:solidFill>
+                  <a:srgbClr val="1C2833"/>
+                </a:solidFill>
+                <a:latin typeface="Arial" pitchFamily="34" charset="0"/>
+                <a:ea typeface="Arial" pitchFamily="34" charset="-122"/>
+                <a:cs typeface="Arial" pitchFamily="34" charset="-120"/>
+              </a:rPr>
+              <a:t>"Anyone here ever been told 'eat a neem leaf, it's good for you'? Did you?"</a:t>
             </a:r>
             <a:pPr algn="l" indent="0" marL="0">
               <a:lnSpc>
@@ -4849,8 +7817,33 @@
                 <a:ea typeface="Arial" pitchFamily="34" charset="-122"/>
                 <a:cs typeface="Arial" pitchFamily="34" charset="-120"/>
               </a:rPr>
-              <a:t> – Each student draws a neem compound leaf from observation (or from the photo if no live sample). Label the rachis (central stem), the leaflets, the serrate edges. – Below the drawing, label: - </a:t>
-            </a:r>
+              <a:t> (Most who tried will say it tasted terrible.)</a:t>
+            </a:r>
+            <a:endParaRPr lang="en-US" sz="1200" dirty="0"/>
+          </a:p>
+        </p:txBody>
+      </p:sp>
+      <p:sp>
+        <p:nvSpPr>
+          <p:cNvPr id="6" name="Text 4"/>
+          <p:cNvSpPr/>
+          <p:nvPr/>
+        </p:nvSpPr>
+        <p:spPr>
+          <a:xfrm>
+            <a:off x="406301" y="1449884"/>
+            <a:ext cx="8498026" cy="213271"/>
+          </a:xfrm>
+          <a:prstGeom prst="rect">
+            <a:avLst/>
+          </a:prstGeom>
+          <a:noFill/>
+          <a:ln/>
+        </p:spPr>
+        <p:txBody>
+          <a:bodyPr wrap="square" lIns="0" tIns="0" rIns="0" bIns="0" rtlCol="0" anchor="t"/>
+          <a:lstStyle/>
+          <a:p>
             <a:pPr algn="l" indent="0" marL="0">
               <a:lnSpc>
                 <a:spcPts val="1680"/>
@@ -4864,15 +7857,15 @@
               <a:buNone/>
             </a:pPr>
             <a:r>
-              <a:rPr lang="en-US" sz="1200" b="1" dirty="0">
-                <a:solidFill>
-                  <a:srgbClr val="1C2833"/>
-                </a:solidFill>
-                <a:latin typeface="Arial" pitchFamily="34" charset="0"/>
-                <a:ea typeface="Arial" pitchFamily="34" charset="-122"/>
-                <a:cs typeface="Arial" pitchFamily="34" charset="-120"/>
-              </a:rPr>
-              <a:t>Sanskrit name:</a:t>
+              <a:rPr lang="en-US" sz="1200" dirty="0">
+                <a:solidFill>
+                  <a:srgbClr val="1C2833"/>
+                </a:solidFill>
+                <a:latin typeface="Arial" pitchFamily="34" charset="0"/>
+                <a:ea typeface="Arial" pitchFamily="34" charset="-122"/>
+                <a:cs typeface="Arial" pitchFamily="34" charset="-120"/>
+              </a:rPr>
+              <a:t>Bridge: today we explore why the body's </a:t>
             </a:r>
             <a:pPr algn="l" indent="0" marL="0">
               <a:lnSpc>
@@ -4887,6 +7880,29 @@
               <a:buNone/>
             </a:pPr>
             <a:r>
+              <a:rPr lang="en-US" sz="1200" i="1" dirty="0">
+                <a:solidFill>
+                  <a:srgbClr val="1C2833"/>
+                </a:solidFill>
+                <a:latin typeface="Arial" pitchFamily="34" charset="0"/>
+                <a:ea typeface="Arial" pitchFamily="34" charset="-122"/>
+                <a:cs typeface="Arial" pitchFamily="34" charset="-120"/>
+              </a:rPr>
+              <a:t>first response</a:t>
+            </a:r>
+            <a:pPr algn="l" indent="0" marL="0">
+              <a:lnSpc>
+                <a:spcPts val="1680"/>
+              </a:lnSpc>
+              <a:spcBef>
+                <a:spcPts val="300"/>
+              </a:spcBef>
+              <a:spcAft>
+                <a:spcPts val="300"/>
+              </a:spcAft>
+              <a:buNone/>
+            </a:pPr>
+            <a:r>
               <a:rPr lang="en-US" sz="1200" dirty="0">
                 <a:solidFill>
                   <a:srgbClr val="1C2833"/>
@@ -4895,352 +7911,7 @@
                 <a:ea typeface="Arial" pitchFamily="34" charset="-122"/>
                 <a:cs typeface="Arial" pitchFamily="34" charset="-120"/>
               </a:rPr>
-              <a:t> </a:t>
-            </a:r>
-            <a:pPr algn="l" indent="0" marL="0">
-              <a:lnSpc>
-                <a:spcPts val="1680"/>
-              </a:lnSpc>
-              <a:spcBef>
-                <a:spcPts val="300"/>
-              </a:spcBef>
-              <a:spcAft>
-                <a:spcPts val="300"/>
-              </a:spcAft>
-              <a:buNone/>
-            </a:pPr>
-            <a:r>
-              <a:rPr lang="en-US" sz="1200" i="1" dirty="0">
-                <a:solidFill>
-                  <a:srgbClr val="1C2833"/>
-                </a:solidFill>
-                <a:latin typeface="Arial" pitchFamily="34" charset="0"/>
-                <a:ea typeface="Arial" pitchFamily="34" charset="-122"/>
-                <a:cs typeface="Arial" pitchFamily="34" charset="-120"/>
-              </a:rPr>
-              <a:t>nimba</a:t>
-            </a:r>
-            <a:pPr algn="l" indent="0" marL="0">
-              <a:lnSpc>
-                <a:spcPts val="1680"/>
-              </a:lnSpc>
-              <a:spcBef>
-                <a:spcPts val="300"/>
-              </a:spcBef>
-              <a:spcAft>
-                <a:spcPts val="300"/>
-              </a:spcAft>
-              <a:buNone/>
-            </a:pPr>
-            <a:r>
-              <a:rPr lang="en-US" sz="1200" dirty="0">
-                <a:solidFill>
-                  <a:srgbClr val="1C2833"/>
-                </a:solidFill>
-                <a:latin typeface="Arial" pitchFamily="34" charset="0"/>
-                <a:ea typeface="Arial" pitchFamily="34" charset="-122"/>
-                <a:cs typeface="Arial" pitchFamily="34" charset="-120"/>
-              </a:rPr>
-              <a:t> - </a:t>
-            </a:r>
-            <a:pPr algn="l" indent="0" marL="0">
-              <a:lnSpc>
-                <a:spcPts val="1680"/>
-              </a:lnSpc>
-              <a:spcBef>
-                <a:spcPts val="300"/>
-              </a:spcBef>
-              <a:spcAft>
-                <a:spcPts val="300"/>
-              </a:spcAft>
-              <a:buNone/>
-            </a:pPr>
-            <a:r>
-              <a:rPr lang="en-US" sz="1200" b="1" dirty="0">
-                <a:solidFill>
-                  <a:srgbClr val="1C2833"/>
-                </a:solidFill>
-                <a:latin typeface="Arial" pitchFamily="34" charset="0"/>
-                <a:ea typeface="Arial" pitchFamily="34" charset="-122"/>
-                <a:cs typeface="Arial" pitchFamily="34" charset="-120"/>
-              </a:rPr>
-              <a:t>Botanical name:</a:t>
-            </a:r>
-            <a:pPr algn="l" indent="0" marL="0">
-              <a:lnSpc>
-                <a:spcPts val="1680"/>
-              </a:lnSpc>
-              <a:spcBef>
-                <a:spcPts val="300"/>
-              </a:spcBef>
-              <a:spcAft>
-                <a:spcPts val="300"/>
-              </a:spcAft>
-              <a:buNone/>
-            </a:pPr>
-            <a:r>
-              <a:rPr lang="en-US" sz="1200" dirty="0">
-                <a:solidFill>
-                  <a:srgbClr val="1C2833"/>
-                </a:solidFill>
-                <a:latin typeface="Arial" pitchFamily="34" charset="0"/>
-                <a:ea typeface="Arial" pitchFamily="34" charset="-122"/>
-                <a:cs typeface="Arial" pitchFamily="34" charset="-120"/>
-              </a:rPr>
-              <a:t> </a:t>
-            </a:r>
-            <a:pPr algn="l" indent="0" marL="0">
-              <a:lnSpc>
-                <a:spcPts val="1680"/>
-              </a:lnSpc>
-              <a:spcBef>
-                <a:spcPts val="300"/>
-              </a:spcBef>
-              <a:spcAft>
-                <a:spcPts val="300"/>
-              </a:spcAft>
-              <a:buNone/>
-            </a:pPr>
-            <a:r>
-              <a:rPr lang="en-US" sz="1200" i="1" dirty="0">
-                <a:solidFill>
-                  <a:srgbClr val="1C2833"/>
-                </a:solidFill>
-                <a:latin typeface="Arial" pitchFamily="34" charset="0"/>
-                <a:ea typeface="Arial" pitchFamily="34" charset="-122"/>
-                <a:cs typeface="Arial" pitchFamily="34" charset="-120"/>
-              </a:rPr>
-              <a:t>Azadirachta indica</a:t>
-            </a:r>
-            <a:pPr algn="l" indent="0" marL="0">
-              <a:lnSpc>
-                <a:spcPts val="1680"/>
-              </a:lnSpc>
-              <a:spcBef>
-                <a:spcPts val="300"/>
-              </a:spcBef>
-              <a:spcAft>
-                <a:spcPts val="300"/>
-              </a:spcAft>
-              <a:buNone/>
-            </a:pPr>
-            <a:r>
-              <a:rPr lang="en-US" sz="1200" dirty="0">
-                <a:solidFill>
-                  <a:srgbClr val="1C2833"/>
-                </a:solidFill>
-                <a:latin typeface="Arial" pitchFamily="34" charset="0"/>
-                <a:ea typeface="Arial" pitchFamily="34" charset="-122"/>
-                <a:cs typeface="Arial" pitchFamily="34" charset="-120"/>
-              </a:rPr>
-              <a:t> - </a:t>
-            </a:r>
-            <a:pPr algn="l" indent="0" marL="0">
-              <a:lnSpc>
-                <a:spcPts val="1680"/>
-              </a:lnSpc>
-              <a:spcBef>
-                <a:spcPts val="300"/>
-              </a:spcBef>
-              <a:spcAft>
-                <a:spcPts val="300"/>
-              </a:spcAft>
-              <a:buNone/>
-            </a:pPr>
-            <a:r>
-              <a:rPr lang="en-US" sz="1200" b="1" dirty="0">
-                <a:solidFill>
-                  <a:srgbClr val="1C2833"/>
-                </a:solidFill>
-                <a:latin typeface="Arial" pitchFamily="34" charset="0"/>
-                <a:ea typeface="Arial" pitchFamily="34" charset="-122"/>
-                <a:cs typeface="Arial" pitchFamily="34" charset="-120"/>
-              </a:rPr>
-              <a:t>Taste class:</a:t>
-            </a:r>
-            <a:pPr algn="l" indent="0" marL="0">
-              <a:lnSpc>
-                <a:spcPts val="1680"/>
-              </a:lnSpc>
-              <a:spcBef>
-                <a:spcPts val="300"/>
-              </a:spcBef>
-              <a:spcAft>
-                <a:spcPts val="300"/>
-              </a:spcAft>
-              <a:buNone/>
-            </a:pPr>
-            <a:r>
-              <a:rPr lang="en-US" sz="1200" dirty="0">
-                <a:solidFill>
-                  <a:srgbClr val="1C2833"/>
-                </a:solidFill>
-                <a:latin typeface="Arial" pitchFamily="34" charset="0"/>
-                <a:ea typeface="Arial" pitchFamily="34" charset="-122"/>
-                <a:cs typeface="Arial" pitchFamily="34" charset="-120"/>
-              </a:rPr>
-              <a:t> </a:t>
-            </a:r>
-            <a:pPr algn="l" indent="0" marL="0">
-              <a:lnSpc>
-                <a:spcPts val="1680"/>
-              </a:lnSpc>
-              <a:spcBef>
-                <a:spcPts val="300"/>
-              </a:spcBef>
-              <a:spcAft>
-                <a:spcPts val="300"/>
-              </a:spcAft>
-              <a:buNone/>
-            </a:pPr>
-            <a:r>
-              <a:rPr lang="en-US" sz="1200" i="1" dirty="0">
-                <a:solidFill>
-                  <a:srgbClr val="1C2833"/>
-                </a:solidFill>
-                <a:latin typeface="Arial" pitchFamily="34" charset="0"/>
-                <a:ea typeface="Arial" pitchFamily="34" charset="-122"/>
-                <a:cs typeface="Arial" pitchFamily="34" charset="-120"/>
-              </a:rPr>
-              <a:t>tikta</a:t>
-            </a:r>
-            <a:pPr algn="l" indent="0" marL="0">
-              <a:lnSpc>
-                <a:spcPts val="1680"/>
-              </a:lnSpc>
-              <a:spcBef>
-                <a:spcPts val="300"/>
-              </a:spcBef>
-              <a:spcAft>
-                <a:spcPts val="300"/>
-              </a:spcAft>
-              <a:buNone/>
-            </a:pPr>
-            <a:r>
-              <a:rPr lang="en-US" sz="1200" dirty="0">
-                <a:solidFill>
-                  <a:srgbClr val="1C2833"/>
-                </a:solidFill>
-                <a:latin typeface="Arial" pitchFamily="34" charset="0"/>
-                <a:ea typeface="Arial" pitchFamily="34" charset="-122"/>
-                <a:cs typeface="Arial" pitchFamily="34" charset="-120"/>
-              </a:rPr>
-              <a:t> (bitter) - </a:t>
-            </a:r>
-            <a:pPr algn="l" indent="0" marL="0">
-              <a:lnSpc>
-                <a:spcPts val="1680"/>
-              </a:lnSpc>
-              <a:spcBef>
-                <a:spcPts val="300"/>
-              </a:spcBef>
-              <a:spcAft>
-                <a:spcPts val="300"/>
-              </a:spcAft>
-              <a:buNone/>
-            </a:pPr>
-            <a:r>
-              <a:rPr lang="en-US" sz="1200" b="1" dirty="0">
-                <a:solidFill>
-                  <a:srgbClr val="1C2833"/>
-                </a:solidFill>
-                <a:latin typeface="Arial" pitchFamily="34" charset="0"/>
-                <a:ea typeface="Arial" pitchFamily="34" charset="-122"/>
-                <a:cs typeface="Arial" pitchFamily="34" charset="-120"/>
-              </a:rPr>
-              <a:t>Active compound:</a:t>
-            </a:r>
-            <a:pPr algn="l" indent="0" marL="0">
-              <a:lnSpc>
-                <a:spcPts val="1680"/>
-              </a:lnSpc>
-              <a:spcBef>
-                <a:spcPts val="300"/>
-              </a:spcBef>
-              <a:spcAft>
-                <a:spcPts val="300"/>
-              </a:spcAft>
-              <a:buNone/>
-            </a:pPr>
-            <a:r>
-              <a:rPr lang="en-US" sz="1200" dirty="0">
-                <a:solidFill>
-                  <a:srgbClr val="1C2833"/>
-                </a:solidFill>
-                <a:latin typeface="Arial" pitchFamily="34" charset="0"/>
-                <a:ea typeface="Arial" pitchFamily="34" charset="-122"/>
-                <a:cs typeface="Arial" pitchFamily="34" charset="-120"/>
-              </a:rPr>
-              <a:t> azadirachtin - </a:t>
-            </a:r>
-            <a:pPr algn="l" indent="0" marL="0">
-              <a:lnSpc>
-                <a:spcPts val="1680"/>
-              </a:lnSpc>
-              <a:spcBef>
-                <a:spcPts val="300"/>
-              </a:spcBef>
-              <a:spcAft>
-                <a:spcPts val="300"/>
-              </a:spcAft>
-              <a:buNone/>
-            </a:pPr>
-            <a:r>
-              <a:rPr lang="en-US" sz="1200" b="1" dirty="0">
-                <a:solidFill>
-                  <a:srgbClr val="1C2833"/>
-                </a:solidFill>
-                <a:latin typeface="Arial" pitchFamily="34" charset="0"/>
-                <a:ea typeface="Arial" pitchFamily="34" charset="-122"/>
-                <a:cs typeface="Arial" pitchFamily="34" charset="-120"/>
-              </a:rPr>
-              <a:t>Safety:</a:t>
-            </a:r>
-            <a:pPr algn="l" indent="0" marL="0">
-              <a:lnSpc>
-                <a:spcPts val="1680"/>
-              </a:lnSpc>
-              <a:spcBef>
-                <a:spcPts val="300"/>
-              </a:spcBef>
-              <a:spcAft>
-                <a:spcPts val="300"/>
-              </a:spcAft>
-              <a:buNone/>
-            </a:pPr>
-            <a:r>
-              <a:rPr lang="en-US" sz="1200" dirty="0">
-                <a:solidFill>
-                  <a:srgbClr val="1C2833"/>
-                </a:solidFill>
-                <a:latin typeface="Arial" pitchFamily="34" charset="0"/>
-                <a:ea typeface="Arial" pitchFamily="34" charset="-122"/>
-                <a:cs typeface="Arial" pitchFamily="34" charset="-120"/>
-              </a:rPr>
-              <a:t> </a:t>
-            </a:r>
-            <a:pPr algn="l" indent="0" marL="0">
-              <a:lnSpc>
-                <a:spcPts val="1680"/>
-              </a:lnSpc>
-              <a:spcBef>
-                <a:spcPts val="300"/>
-              </a:spcBef>
-              <a:spcAft>
-                <a:spcPts val="300"/>
-              </a:spcAft>
-              <a:buNone/>
-            </a:pPr>
-            <a:r>
-              <a:rPr lang="en-US" sz="1200" i="1" dirty="0">
-                <a:solidFill>
-                  <a:srgbClr val="1C2833"/>
-                </a:solidFill>
-                <a:latin typeface="Arial" pitchFamily="34" charset="0"/>
-                <a:ea typeface="Arial" pitchFamily="34" charset="-122"/>
-                <a:cs typeface="Arial" pitchFamily="34" charset="-120"/>
-              </a:rPr>
-              <a:t>not for ingestion in concentrated form</a:t>
+              <a:t> to neem — "spit it out" — is actually telling us something useful.</a:t>
             </a:r>
             <a:endParaRPr lang="en-US" sz="1200" dirty="0"/>
           </a:p>
@@ -5248,7 +7919,7 @@
       </p:sp>
       <p:sp>
         <p:nvSpPr>
-          <p:cNvPr id="6" name="Text 4"/>
+          <p:cNvPr id="7" name="Text 5"/>
           <p:cNvSpPr/>
           <p:nvPr/>
         </p:nvSpPr>
@@ -5398,7 +8069,7 @@
                 <a:ea typeface="Georgia" pitchFamily="34" charset="-122"/>
                 <a:cs typeface="Georgia" pitchFamily="34" charset="-120"/>
               </a:rPr>
-              <a:t>Wrap-up (5 min)</a:t>
+              <a:t>Core (20 min)</a:t>
             </a:r>
             <a:endParaRPr lang="en-US" sz="1800" dirty="0"/>
           </a:p>
@@ -5412,8 +8083,8 @@
         </p:nvSpPr>
         <p:spPr>
           <a:xfrm>
-            <a:off x="406301" y="870942"/>
-            <a:ext cx="8498026" cy="426541"/>
+            <a:off x="634901" y="883593"/>
+            <a:ext cx="8102798" cy="281880"/>
           </a:xfrm>
           <a:prstGeom prst="rect">
             <a:avLst/>
@@ -5425,13 +8096,31 @@
           <a:bodyPr wrap="square" lIns="0" tIns="0" rIns="0" bIns="0" rtlCol="0" anchor="t"/>
           <a:lstStyle/>
           <a:p>
-            <a:pPr algn="l" indent="0" marL="0">
-              <a:lnSpc>
-                <a:spcPts val="1680"/>
-              </a:lnSpc>
-              <a:spcBef>
-                <a:spcPts val="300"/>
-              </a:spcBef>
+            <a:pPr algn="l" marL="342900" indent="-342900">
+              <a:lnSpc>
+                <a:spcPts val="1620"/>
+              </a:lnSpc>
+              <a:spcAft>
+                <a:spcPts val="300"/>
+              </a:spcAft>
+              <a:buSzPct val="100000"/>
+              <a:buChar char="•"/>
+            </a:pPr>
+            <a:r>
+              <a:rPr lang="en-US" sz="1200" b="1" dirty="0">
+                <a:solidFill>
+                  <a:srgbClr val="1C2833"/>
+                </a:solidFill>
+                <a:latin typeface="Arial" pitchFamily="34" charset="0"/>
+                <a:ea typeface="Arial" pitchFamily="34" charset="-122"/>
+                <a:cs typeface="Arial" pitchFamily="34" charset="-120"/>
+              </a:rPr>
+              <a:t>Identify it.</a:t>
+            </a:r>
+            <a:pPr algn="l" indent="0" marL="0">
+              <a:lnSpc>
+                <a:spcPts val="1620"/>
+              </a:lnSpc>
               <a:spcAft>
                 <a:spcPts val="300"/>
               </a:spcAft>
@@ -5446,30 +8135,7 @@
                 <a:ea typeface="Arial" pitchFamily="34" charset="-122"/>
                 <a:cs typeface="Arial" pitchFamily="34" charset="-120"/>
               </a:rPr>
-              <a:t>– Restate safety rule + the neem-specific warning chorally. – Hand-back of Day 2 exit tickets if marked. – Preview Day 4: </a:t>
-            </a:r>
-            <a:pPr algn="l" indent="0" marL="0">
-              <a:lnSpc>
-                <a:spcPts val="1680"/>
-              </a:lnSpc>
-              <a:spcBef>
-                <a:spcPts val="300"/>
-              </a:spcBef>
-              <a:spcAft>
-                <a:spcPts val="300"/>
-              </a:spcAft>
-              <a:buNone/>
-            </a:pPr>
-            <a:r>
-              <a:rPr lang="en-US" sz="1200" i="1" dirty="0">
-                <a:solidFill>
-                  <a:srgbClr val="1C2833"/>
-                </a:solidFill>
-                <a:latin typeface="Arial" pitchFamily="34" charset="0"/>
-                <a:ea typeface="Arial" pitchFamily="34" charset="-122"/>
-                <a:cs typeface="Arial" pitchFamily="34" charset="-120"/>
-              </a:rPr>
-              <a:t>"Tomorrow — the herb that turns everything gold."</a:t>
+              <a:t> Neem is a tree, not a small herb:</a:t>
             </a:r>
             <a:endParaRPr lang="en-US" sz="1200" dirty="0"/>
           </a:p>
@@ -5478,6 +8144,204 @@
       <p:sp>
         <p:nvSpPr>
           <p:cNvPr id="5" name="Text 3"/>
+          <p:cNvSpPr/>
+          <p:nvPr/>
+        </p:nvSpPr>
+        <p:spPr>
+          <a:xfrm>
+            <a:off x="634901" y="1266974"/>
+            <a:ext cx="8102798" cy="1218902"/>
+          </a:xfrm>
+          <a:prstGeom prst="rect">
+            <a:avLst/>
+          </a:prstGeom>
+          <a:noFill/>
+          <a:ln/>
+        </p:spPr>
+        <p:txBody>
+          <a:bodyPr wrap="square" lIns="0" tIns="0" rIns="0" bIns="0" rtlCol="0" anchor="t"/>
+          <a:lstStyle/>
+          <a:p>
+            <a:pPr algn="l" marL="342900" indent="-342900">
+              <a:lnSpc>
+                <a:spcPts val="1620"/>
+              </a:lnSpc>
+              <a:spcAft>
+                <a:spcPts val="300"/>
+              </a:spcAft>
+              <a:buSzPct val="100000"/>
+              <a:buChar char="•"/>
+            </a:pPr>
+            <a:r>
+              <a:rPr lang="en-US" sz="1200" b="1" dirty="0">
+                <a:solidFill>
+                  <a:srgbClr val="1C2833"/>
+                </a:solidFill>
+                <a:latin typeface="Arial" pitchFamily="34" charset="0"/>
+                <a:ea typeface="Arial" pitchFamily="34" charset="-122"/>
+                <a:cs typeface="Arial" pitchFamily="34" charset="-120"/>
+              </a:rPr>
+              <a:t>Compound leaf:</a:t>
+            </a:r>
+            <a:pPr algn="l" indent="0" marL="0">
+              <a:lnSpc>
+                <a:spcPts val="1620"/>
+              </a:lnSpc>
+              <a:spcAft>
+                <a:spcPts val="300"/>
+              </a:spcAft>
+              <a:buNone/>
+            </a:pPr>
+            <a:r>
+              <a:rPr lang="en-US" sz="1200" dirty="0">
+                <a:solidFill>
+                  <a:srgbClr val="1C2833"/>
+                </a:solidFill>
+                <a:latin typeface="Arial" pitchFamily="34" charset="0"/>
+                <a:ea typeface="Arial" pitchFamily="34" charset="-122"/>
+                <a:cs typeface="Arial" pitchFamily="34" charset="-120"/>
+              </a:rPr>
+              <a:t> instead of a single blade, each "leaf" is made up of 9–15 small leaflets attached to a central stem. (Compare to tulsi yesterday — single simple leaves.)</a:t>
+            </a:r>
+            <a:endParaRPr lang="en-US" sz="1200" dirty="0"/>
+          </a:p>
+          <a:p>
+            <a:pPr algn="l" marL="342900" indent="-342900">
+              <a:lnSpc>
+                <a:spcPts val="1620"/>
+              </a:lnSpc>
+              <a:spcAft>
+                <a:spcPts val="300"/>
+              </a:spcAft>
+              <a:buSzPct val="100000"/>
+              <a:buChar char="•"/>
+            </a:pPr>
+            <a:r>
+              <a:rPr lang="en-US" sz="1200" b="1" dirty="0">
+                <a:solidFill>
+                  <a:srgbClr val="1C2833"/>
+                </a:solidFill>
+                <a:latin typeface="Arial" pitchFamily="34" charset="0"/>
+                <a:ea typeface="Arial" pitchFamily="34" charset="-122"/>
+                <a:cs typeface="Arial" pitchFamily="34" charset="-120"/>
+              </a:rPr>
+              <a:t>Leaflet shape:</a:t>
+            </a:r>
+            <a:pPr algn="l" indent="0" marL="0">
+              <a:lnSpc>
+                <a:spcPts val="1620"/>
+              </a:lnSpc>
+              <a:spcAft>
+                <a:spcPts val="300"/>
+              </a:spcAft>
+              <a:buNone/>
+            </a:pPr>
+            <a:r>
+              <a:rPr lang="en-US" sz="1200" dirty="0">
+                <a:solidFill>
+                  <a:srgbClr val="1C2833"/>
+                </a:solidFill>
+                <a:latin typeface="Arial" pitchFamily="34" charset="0"/>
+                <a:ea typeface="Arial" pitchFamily="34" charset="-122"/>
+                <a:cs typeface="Arial" pitchFamily="34" charset="-120"/>
+              </a:rPr>
+              <a:t> narrow, curved (sickle-shaped), with serrate (toothed) edges.</a:t>
+            </a:r>
+            <a:endParaRPr lang="en-US" sz="1200" dirty="0"/>
+          </a:p>
+          <a:p>
+            <a:pPr algn="l" marL="342900" indent="-342900">
+              <a:lnSpc>
+                <a:spcPts val="1620"/>
+              </a:lnSpc>
+              <a:spcAft>
+                <a:spcPts val="300"/>
+              </a:spcAft>
+              <a:buSzPct val="100000"/>
+              <a:buChar char="•"/>
+            </a:pPr>
+            <a:r>
+              <a:rPr lang="en-US" sz="1200" b="1" dirty="0">
+                <a:solidFill>
+                  <a:srgbClr val="1C2833"/>
+                </a:solidFill>
+                <a:latin typeface="Arial" pitchFamily="34" charset="0"/>
+                <a:ea typeface="Arial" pitchFamily="34" charset="-122"/>
+                <a:cs typeface="Arial" pitchFamily="34" charset="-120"/>
+              </a:rPr>
+              <a:t>Smell when crushed:</a:t>
+            </a:r>
+            <a:pPr algn="l" indent="0" marL="0">
+              <a:lnSpc>
+                <a:spcPts val="1620"/>
+              </a:lnSpc>
+              <a:spcAft>
+                <a:spcPts val="300"/>
+              </a:spcAft>
+              <a:buNone/>
+            </a:pPr>
+            <a:r>
+              <a:rPr lang="en-US" sz="1200" dirty="0">
+                <a:solidFill>
+                  <a:srgbClr val="1C2833"/>
+                </a:solidFill>
+                <a:latin typeface="Arial" pitchFamily="34" charset="0"/>
+                <a:ea typeface="Arial" pitchFamily="34" charset="-122"/>
+                <a:cs typeface="Arial" pitchFamily="34" charset="-120"/>
+              </a:rPr>
+              <a:t> strong, slightly garlic-like, mostly bitter.</a:t>
+            </a:r>
+            <a:endParaRPr lang="en-US" sz="1200" dirty="0"/>
+          </a:p>
+          <a:p>
+            <a:pPr algn="l" marL="342900" indent="-342900">
+              <a:lnSpc>
+                <a:spcPts val="1620"/>
+              </a:lnSpc>
+              <a:spcAft>
+                <a:spcPts val="300"/>
+              </a:spcAft>
+              <a:buSzPct val="100000"/>
+              <a:buChar char="•"/>
+            </a:pPr>
+            <a:r>
+              <a:rPr lang="en-US" sz="1200" b="1" dirty="0">
+                <a:solidFill>
+                  <a:srgbClr val="1C2833"/>
+                </a:solidFill>
+                <a:latin typeface="Arial" pitchFamily="34" charset="0"/>
+                <a:ea typeface="Arial" pitchFamily="34" charset="-122"/>
+                <a:cs typeface="Arial" pitchFamily="34" charset="-120"/>
+              </a:rPr>
+              <a:t>Where it grows:</a:t>
+            </a:r>
+            <a:pPr algn="l" indent="0" marL="0">
+              <a:lnSpc>
+                <a:spcPts val="1620"/>
+              </a:lnSpc>
+              <a:spcAft>
+                <a:spcPts val="300"/>
+              </a:spcAft>
+              <a:buNone/>
+            </a:pPr>
+            <a:r>
+              <a:rPr lang="en-US" sz="1200" dirty="0">
+                <a:solidFill>
+                  <a:srgbClr val="1C2833"/>
+                </a:solidFill>
+                <a:latin typeface="Arial" pitchFamily="34" charset="0"/>
+                <a:ea typeface="Arial" pitchFamily="34" charset="-122"/>
+                <a:cs typeface="Arial" pitchFamily="34" charset="-120"/>
+              </a:rPr>
+              <a:t> native to South Asia; widely planted along streets, in temple compounds, and as a shade tree.</a:t>
+            </a:r>
+            <a:endParaRPr lang="en-US" sz="1200" dirty="0"/>
+          </a:p>
+        </p:txBody>
+      </p:sp>
+      <p:sp>
+        <p:nvSpPr>
+          <p:cNvPr id="6" name="Text 4"/>
           <p:cNvSpPr/>
           <p:nvPr/>
         </p:nvSpPr>
@@ -5627,7 +8491,7 @@
                 <a:ea typeface="Georgia" pitchFamily="34" charset="-122"/>
                 <a:cs typeface="Georgia" pitchFamily="34" charset="-120"/>
               </a:rPr>
-              <a:t>Student-facing content</a:t>
+              <a:t>Core (20 min) (cont.)</a:t>
             </a:r>
             <a:endParaRPr lang="en-US" sz="1800" dirty="0"/>
           </a:p>
@@ -5641,8 +8505,74 @@
         </p:nvSpPr>
         <p:spPr>
           <a:xfrm>
-            <a:off x="406301" y="883593"/>
-            <a:ext cx="8331398" cy="3074194"/>
+            <a:off x="634901" y="883593"/>
+            <a:ext cx="8102798" cy="281880"/>
+          </a:xfrm>
+          <a:prstGeom prst="rect">
+            <a:avLst/>
+          </a:prstGeom>
+          <a:noFill/>
+          <a:ln/>
+        </p:spPr>
+        <p:txBody>
+          <a:bodyPr wrap="square" lIns="0" tIns="0" rIns="0" bIns="0" rtlCol="0" anchor="t"/>
+          <a:lstStyle/>
+          <a:p>
+            <a:pPr algn="l" marL="342900" indent="-342900">
+              <a:lnSpc>
+                <a:spcPts val="1620"/>
+              </a:lnSpc>
+              <a:spcAft>
+                <a:spcPts val="300"/>
+              </a:spcAft>
+              <a:buSzPct val="100000"/>
+              <a:buChar char="•"/>
+            </a:pPr>
+            <a:r>
+              <a:rPr lang="en-US" sz="1200" b="1" dirty="0">
+                <a:solidFill>
+                  <a:srgbClr val="1C2833"/>
+                </a:solidFill>
+                <a:latin typeface="Arial" pitchFamily="34" charset="0"/>
+                <a:ea typeface="Arial" pitchFamily="34" charset="-122"/>
+                <a:cs typeface="Arial" pitchFamily="34" charset="-120"/>
+              </a:rPr>
+              <a:t>The taste.</a:t>
+            </a:r>
+            <a:pPr algn="l" indent="0" marL="0">
+              <a:lnSpc>
+                <a:spcPts val="1620"/>
+              </a:lnSpc>
+              <a:spcAft>
+                <a:spcPts val="300"/>
+              </a:spcAft>
+              <a:buNone/>
+            </a:pPr>
+            <a:r>
+              <a:rPr lang="en-US" sz="1200" dirty="0">
+                <a:solidFill>
+                  <a:srgbClr val="1C2833"/>
+                </a:solidFill>
+                <a:latin typeface="Arial" pitchFamily="34" charset="0"/>
+                <a:ea typeface="Arial" pitchFamily="34" charset="-122"/>
+                <a:cs typeface="Arial" pitchFamily="34" charset="-120"/>
+              </a:rPr>
+              <a:t> Pass the sealed container around for smell only.</a:t>
+            </a:r>
+            <a:endParaRPr lang="en-US" sz="1200" dirty="0"/>
+          </a:p>
+        </p:txBody>
+      </p:sp>
+      <p:sp>
+        <p:nvSpPr>
+          <p:cNvPr id="5" name="Text 3"/>
+          <p:cNvSpPr/>
+          <p:nvPr/>
+        </p:nvSpPr>
+        <p:spPr>
+          <a:xfrm>
+            <a:off x="406301" y="1266974"/>
+            <a:ext cx="8331398" cy="611981"/>
           </a:xfrm>
           <a:prstGeom prst="rect">
             <a:avLst/>
@@ -5665,14 +8595,14 @@
       </p:sp>
       <p:sp>
         <p:nvSpPr>
-          <p:cNvPr id="5" name="Shape 3"/>
+          <p:cNvPr id="6" name="Shape 4"/>
           <p:cNvSpPr/>
           <p:nvPr/>
         </p:nvSpPr>
         <p:spPr>
           <a:xfrm>
-            <a:off x="434876" y="883593"/>
-            <a:ext cx="0" cy="3074194"/>
+            <a:off x="434876" y="1266974"/>
+            <a:ext cx="0" cy="611981"/>
           </a:xfrm>
           <a:prstGeom prst="line">
             <a:avLst/>
@@ -5688,13 +8618,13 @@
       </p:sp>
       <p:sp>
         <p:nvSpPr>
-          <p:cNvPr id="6" name="Text 4"/>
+          <p:cNvPr id="7" name="Text 5"/>
           <p:cNvSpPr/>
           <p:nvPr/>
         </p:nvSpPr>
         <p:spPr>
           <a:xfrm>
-            <a:off x="692051" y="1074093"/>
+            <a:off x="692051" y="1457474"/>
             <a:ext cx="7973389" cy="230981"/>
           </a:xfrm>
           <a:prstGeom prst="rect">
@@ -5728,193 +8658,7 @@
                 <a:ea typeface="Georgia" pitchFamily="34" charset="-122"/>
                 <a:cs typeface="Georgia" pitchFamily="34" charset="-120"/>
               </a:rPr>
-              <a:t>Nimba</a:t>
-            </a:r>
-            <a:pPr algn="l" indent="0" marL="0">
-              <a:lnSpc>
-                <a:spcPts val="1820"/>
-              </a:lnSpc>
-              <a:spcBef>
-                <a:spcPts val="300"/>
-              </a:spcBef>
-              <a:spcAft>
-                <a:spcPts val="300"/>
-              </a:spcAft>
-              <a:buNone/>
-            </a:pPr>
-            <a:r>
-              <a:rPr lang="en-US" sz="1300" dirty="0">
-                <a:solidFill>
-                  <a:srgbClr val="1C2833"/>
-                </a:solidFill>
-                <a:latin typeface="Georgia" pitchFamily="34" charset="0"/>
-                <a:ea typeface="Georgia" pitchFamily="34" charset="-122"/>
-                <a:cs typeface="Georgia" pitchFamily="34" charset="-120"/>
-              </a:rPr>
-              <a:t> (</a:t>
-            </a:r>
-            <a:pPr algn="l" indent="0" marL="0">
-              <a:lnSpc>
-                <a:spcPts val="1820"/>
-              </a:lnSpc>
-              <a:spcBef>
-                <a:spcPts val="300"/>
-              </a:spcBef>
-              <a:spcAft>
-                <a:spcPts val="300"/>
-              </a:spcAft>
-              <a:buNone/>
-            </a:pPr>
-            <a:r>
-              <a:rPr lang="en-US" sz="1300" i="1" dirty="0">
-                <a:solidFill>
-                  <a:srgbClr val="1C2833"/>
-                </a:solidFill>
-                <a:latin typeface="Georgia" pitchFamily="34" charset="0"/>
-                <a:ea typeface="Georgia" pitchFamily="34" charset="-122"/>
-                <a:cs typeface="Georgia" pitchFamily="34" charset="-120"/>
-              </a:rPr>
-              <a:t>Azadirachta indica</a:t>
-            </a:r>
-            <a:pPr algn="l" indent="0" marL="0">
-              <a:lnSpc>
-                <a:spcPts val="1820"/>
-              </a:lnSpc>
-              <a:spcBef>
-                <a:spcPts val="300"/>
-              </a:spcBef>
-              <a:spcAft>
-                <a:spcPts val="300"/>
-              </a:spcAft>
-              <a:buNone/>
-            </a:pPr>
-            <a:r>
-              <a:rPr lang="en-US" sz="1300" dirty="0">
-                <a:solidFill>
-                  <a:srgbClr val="1C2833"/>
-                </a:solidFill>
-                <a:latin typeface="Georgia" pitchFamily="34" charset="0"/>
-                <a:ea typeface="Georgia" pitchFamily="34" charset="-122"/>
-                <a:cs typeface="Georgia" pitchFamily="34" charset="-120"/>
-              </a:rPr>
-              <a:t>) — known in English as neem.</a:t>
-            </a:r>
-            <a:endParaRPr lang="en-US" sz="1300" dirty="0"/>
-          </a:p>
-        </p:txBody>
-      </p:sp>
-      <p:sp>
-        <p:nvSpPr>
-          <p:cNvPr id="7" name="Text 5"/>
-          <p:cNvSpPr/>
-          <p:nvPr/>
-        </p:nvSpPr>
-        <p:spPr>
-          <a:xfrm>
-            <a:off x="692051" y="1343174"/>
-            <a:ext cx="7973389" cy="692944"/>
-          </a:xfrm>
-          <a:prstGeom prst="rect">
-            <a:avLst/>
-          </a:prstGeom>
-          <a:noFill/>
-          <a:ln/>
-        </p:spPr>
-        <p:txBody>
-          <a:bodyPr wrap="square" lIns="0" tIns="0" rIns="0" bIns="0" rtlCol="0" anchor="t"/>
-          <a:lstStyle/>
-          <a:p>
-            <a:pPr algn="l" indent="0" marL="0">
-              <a:lnSpc>
-                <a:spcPts val="1820"/>
-              </a:lnSpc>
-              <a:spcBef>
-                <a:spcPts val="300"/>
-              </a:spcBef>
-              <a:spcAft>
-                <a:spcPts val="300"/>
-              </a:spcAft>
-              <a:buNone/>
-            </a:pPr>
-            <a:r>
-              <a:rPr lang="en-US" sz="1300" b="1" i="1" dirty="0">
-                <a:solidFill>
-                  <a:srgbClr val="1C2833"/>
-                </a:solidFill>
-                <a:latin typeface="Georgia" pitchFamily="34" charset="0"/>
-                <a:ea typeface="Georgia" pitchFamily="34" charset="-122"/>
-                <a:cs typeface="Georgia" pitchFamily="34" charset="-120"/>
-              </a:rPr>
-              <a:t>How to identify it:</a:t>
-            </a:r>
-            <a:pPr algn="l" indent="0" marL="0">
-              <a:lnSpc>
-                <a:spcPts val="1820"/>
-              </a:lnSpc>
-              <a:spcBef>
-                <a:spcPts val="300"/>
-              </a:spcBef>
-              <a:spcAft>
-                <a:spcPts val="300"/>
-              </a:spcAft>
-              <a:buNone/>
-            </a:pPr>
-            <a:r>
-              <a:rPr lang="en-US" sz="1300" dirty="0">
-                <a:solidFill>
-                  <a:srgbClr val="1C2833"/>
-                </a:solidFill>
-                <a:latin typeface="Georgia" pitchFamily="34" charset="0"/>
-                <a:ea typeface="Georgia" pitchFamily="34" charset="-122"/>
-                <a:cs typeface="Georgia" pitchFamily="34" charset="-120"/>
-              </a:rPr>
-              <a:t> - A tree, not a small plant. - </a:t>
-            </a:r>
-            <a:pPr algn="l" indent="0" marL="0">
-              <a:lnSpc>
-                <a:spcPts val="1820"/>
-              </a:lnSpc>
-              <a:spcBef>
-                <a:spcPts val="300"/>
-              </a:spcBef>
-              <a:spcAft>
-                <a:spcPts val="300"/>
-              </a:spcAft>
-              <a:buNone/>
-            </a:pPr>
-            <a:r>
-              <a:rPr lang="en-US" sz="1300" b="1" i="1" dirty="0">
-                <a:solidFill>
-                  <a:srgbClr val="1C2833"/>
-                </a:solidFill>
-                <a:latin typeface="Georgia" pitchFamily="34" charset="0"/>
-                <a:ea typeface="Georgia" pitchFamily="34" charset="-122"/>
-                <a:cs typeface="Georgia" pitchFamily="34" charset="-120"/>
-              </a:rPr>
-              <a:t>Compound leaf</a:t>
-            </a:r>
-            <a:pPr algn="l" indent="0" marL="0">
-              <a:lnSpc>
-                <a:spcPts val="1820"/>
-              </a:lnSpc>
-              <a:spcBef>
-                <a:spcPts val="300"/>
-              </a:spcBef>
-              <a:spcAft>
-                <a:spcPts val="300"/>
-              </a:spcAft>
-              <a:buNone/>
-            </a:pPr>
-            <a:r>
-              <a:rPr lang="en-US" sz="1300" dirty="0">
-                <a:solidFill>
-                  <a:srgbClr val="1C2833"/>
-                </a:solidFill>
-                <a:latin typeface="Georgia" pitchFamily="34" charset="0"/>
-                <a:ea typeface="Georgia" pitchFamily="34" charset="-122"/>
-                <a:cs typeface="Georgia" pitchFamily="34" charset="-120"/>
-              </a:rPr>
-              <a:t> — what looks like one "leaf" is actually made of 9–15 small leaflets arranged along a central stem. - Leaflets are narrow, slightly curved, with jagged edges. - Smell when crushed: bitter, slightly garlic-like.</a:t>
+              <a:t>Today we do not chew the leaf.</a:t>
             </a:r>
             <a:endParaRPr lang="en-US" sz="1300" dirty="0"/>
           </a:p>
@@ -5928,8 +8672,8 @@
         </p:nvSpPr>
         <p:spPr>
           <a:xfrm>
-            <a:off x="692051" y="2074218"/>
-            <a:ext cx="7973389" cy="461963"/>
+            <a:off x="406301" y="1967805"/>
+            <a:ext cx="8498026" cy="639812"/>
           </a:xfrm>
           <a:prstGeom prst="rect">
             <a:avLst/>
@@ -5943,7 +8687,7 @@
           <a:p>
             <a:pPr algn="l" indent="0" marL="0">
               <a:lnSpc>
-                <a:spcPts val="1820"/>
+                <a:spcPts val="1680"/>
               </a:lnSpc>
               <a:spcBef>
                 <a:spcPts val="300"/>
@@ -5954,19 +8698,19 @@
               <a:buNone/>
             </a:pPr>
             <a:r>
-              <a:rPr lang="en-US" sz="1300" b="1" i="1" dirty="0">
-                <a:solidFill>
-                  <a:srgbClr val="1C2833"/>
-                </a:solidFill>
-                <a:latin typeface="Georgia" pitchFamily="34" charset="0"/>
-                <a:ea typeface="Georgia" pitchFamily="34" charset="-122"/>
-                <a:cs typeface="Georgia" pitchFamily="34" charset="-120"/>
-              </a:rPr>
-              <a:t>What's inside:</a:t>
-            </a:r>
-            <a:pPr algn="l" indent="0" marL="0">
-              <a:lnSpc>
-                <a:spcPts val="1820"/>
+              <a:rPr lang="en-US" sz="1200" dirty="0">
+                <a:solidFill>
+                  <a:srgbClr val="1C2833"/>
+                </a:solidFill>
+                <a:latin typeface="Arial" pitchFamily="34" charset="0"/>
+                <a:ea typeface="Arial" pitchFamily="34" charset="-122"/>
+                <a:cs typeface="Arial" pitchFamily="34" charset="-120"/>
+              </a:rPr>
+              <a:t>Neem is the textbook example of </a:t>
+            </a:r>
+            <a:pPr algn="l" indent="0" marL="0">
+              <a:lnSpc>
+                <a:spcPts val="1680"/>
               </a:lnSpc>
               <a:spcBef>
                 <a:spcPts val="300"/>
@@ -5977,19 +8721,19 @@
               <a:buNone/>
             </a:pPr>
             <a:r>
-              <a:rPr lang="en-US" sz="1300" dirty="0">
-                <a:solidFill>
-                  <a:srgbClr val="1C2833"/>
-                </a:solidFill>
-                <a:latin typeface="Georgia" pitchFamily="34" charset="0"/>
-                <a:ea typeface="Georgia" pitchFamily="34" charset="-122"/>
-                <a:cs typeface="Georgia" pitchFamily="34" charset="-120"/>
-              </a:rPr>
-              <a:t> </a:t>
-            </a:r>
-            <a:pPr algn="l" indent="0" marL="0">
-              <a:lnSpc>
-                <a:spcPts val="1820"/>
+              <a:rPr lang="en-US" sz="1200" i="1" dirty="0">
+                <a:solidFill>
+                  <a:srgbClr val="1C2833"/>
+                </a:solidFill>
+                <a:latin typeface="Arial" pitchFamily="34" charset="0"/>
+                <a:ea typeface="Arial" pitchFamily="34" charset="-122"/>
+                <a:cs typeface="Arial" pitchFamily="34" charset="-120"/>
+              </a:rPr>
+              <a:t>tikta</a:t>
+            </a:r>
+            <a:pPr algn="l" indent="0" marL="0">
+              <a:lnSpc>
+                <a:spcPts val="1680"/>
               </a:lnSpc>
               <a:spcBef>
                 <a:spcPts val="300"/>
@@ -6000,19 +8744,19 @@
               <a:buNone/>
             </a:pPr>
             <a:r>
-              <a:rPr lang="en-US" sz="1300" b="1" i="1" dirty="0">
-                <a:solidFill>
-                  <a:srgbClr val="1C2833"/>
-                </a:solidFill>
-                <a:latin typeface="Georgia" pitchFamily="34" charset="0"/>
-                <a:ea typeface="Georgia" pitchFamily="34" charset="-122"/>
-                <a:cs typeface="Georgia" pitchFamily="34" charset="-120"/>
-              </a:rPr>
-              <a:t>Azadirachtin</a:t>
-            </a:r>
-            <a:pPr algn="l" indent="0" marL="0">
-              <a:lnSpc>
-                <a:spcPts val="1820"/>
+              <a:rPr lang="en-US" sz="1200" dirty="0">
+                <a:solidFill>
+                  <a:srgbClr val="1C2833"/>
+                </a:solidFill>
+                <a:latin typeface="Arial" pitchFamily="34" charset="0"/>
+                <a:ea typeface="Arial" pitchFamily="34" charset="-122"/>
+                <a:cs typeface="Arial" pitchFamily="34" charset="-120"/>
+              </a:rPr>
+              <a:t> (bitter taste) in Ayurveda. The bitter taste comes from a class of compounds called </a:t>
+            </a:r>
+            <a:pPr algn="l" indent="0" marL="0">
+              <a:lnSpc>
+                <a:spcPts val="1680"/>
               </a:lnSpc>
               <a:spcBef>
                 <a:spcPts val="300"/>
@@ -6023,257 +8767,138 @@
               <a:buNone/>
             </a:pPr>
             <a:r>
-              <a:rPr lang="en-US" sz="1300" dirty="0">
-                <a:solidFill>
-                  <a:srgbClr val="1C2833"/>
-                </a:solidFill>
-                <a:latin typeface="Georgia" pitchFamily="34" charset="0"/>
-                <a:ea typeface="Georgia" pitchFamily="34" charset="-122"/>
-                <a:cs typeface="Georgia" pitchFamily="34" charset="-120"/>
-              </a:rPr>
-              <a:t> — a limonoid compound. The molecule behind neem's well-supported use as an agricultural insect repellent.</a:t>
-            </a:r>
-            <a:endParaRPr lang="en-US" sz="1300" dirty="0"/>
+              <a:rPr lang="en-US" sz="1200" b="1" dirty="0">
+                <a:solidFill>
+                  <a:srgbClr val="1C2833"/>
+                </a:solidFill>
+                <a:latin typeface="Arial" pitchFamily="34" charset="0"/>
+                <a:ea typeface="Arial" pitchFamily="34" charset="-122"/>
+                <a:cs typeface="Arial" pitchFamily="34" charset="-120"/>
+              </a:rPr>
+              <a:t>limonoids</a:t>
+            </a:r>
+            <a:pPr algn="l" indent="0" marL="0">
+              <a:lnSpc>
+                <a:spcPts val="1680"/>
+              </a:lnSpc>
+              <a:spcBef>
+                <a:spcPts val="300"/>
+              </a:spcBef>
+              <a:spcAft>
+                <a:spcPts val="300"/>
+              </a:spcAft>
+              <a:buNone/>
+            </a:pPr>
+            <a:r>
+              <a:rPr lang="en-US" sz="1200" dirty="0">
+                <a:solidFill>
+                  <a:srgbClr val="1C2833"/>
+                </a:solidFill>
+                <a:latin typeface="Arial" pitchFamily="34" charset="0"/>
+                <a:ea typeface="Arial" pitchFamily="34" charset="-122"/>
+                <a:cs typeface="Arial" pitchFamily="34" charset="-120"/>
+              </a:rPr>
+              <a:t> — the most-studied of which is </a:t>
+            </a:r>
+            <a:pPr algn="l" indent="0" marL="0">
+              <a:lnSpc>
+                <a:spcPts val="1680"/>
+              </a:lnSpc>
+              <a:spcBef>
+                <a:spcPts val="300"/>
+              </a:spcBef>
+              <a:spcAft>
+                <a:spcPts val="300"/>
+              </a:spcAft>
+              <a:buNone/>
+            </a:pPr>
+            <a:r>
+              <a:rPr lang="en-US" sz="1200" b="1" dirty="0">
+                <a:solidFill>
+                  <a:srgbClr val="1C2833"/>
+                </a:solidFill>
+                <a:latin typeface="Arial" pitchFamily="34" charset="0"/>
+                <a:ea typeface="Arial" pitchFamily="34" charset="-122"/>
+                <a:cs typeface="Arial" pitchFamily="34" charset="-120"/>
+              </a:rPr>
+              <a:t>azadirachtin</a:t>
+            </a:r>
+            <a:pPr algn="l" indent="0" marL="0">
+              <a:lnSpc>
+                <a:spcPts val="1680"/>
+              </a:lnSpc>
+              <a:spcBef>
+                <a:spcPts val="300"/>
+              </a:spcBef>
+              <a:spcAft>
+                <a:spcPts val="300"/>
+              </a:spcAft>
+              <a:buNone/>
+            </a:pPr>
+            <a:r>
+              <a:rPr lang="en-US" sz="1200" dirty="0">
+                <a:solidFill>
+                  <a:srgbClr val="1C2833"/>
+                </a:solidFill>
+                <a:latin typeface="Arial" pitchFamily="34" charset="0"/>
+                <a:ea typeface="Arial" pitchFamily="34" charset="-122"/>
+                <a:cs typeface="Arial" pitchFamily="34" charset="-120"/>
+              </a:rPr>
+              <a:t>. Bitter taste is the body's warning signal — many plant toxins are bitter, and the bitter receptors evolved to make us </a:t>
+            </a:r>
+            <a:pPr algn="l" indent="0" marL="0">
+              <a:lnSpc>
+                <a:spcPts val="1680"/>
+              </a:lnSpc>
+              <a:spcBef>
+                <a:spcPts val="300"/>
+              </a:spcBef>
+              <a:spcAft>
+                <a:spcPts val="300"/>
+              </a:spcAft>
+              <a:buNone/>
+            </a:pPr>
+            <a:r>
+              <a:rPr lang="en-US" sz="1200" i="1" dirty="0">
+                <a:solidFill>
+                  <a:srgbClr val="1C2833"/>
+                </a:solidFill>
+                <a:latin typeface="Arial" pitchFamily="34" charset="0"/>
+                <a:ea typeface="Arial" pitchFamily="34" charset="-122"/>
+                <a:cs typeface="Arial" pitchFamily="34" charset="-120"/>
+              </a:rPr>
+              <a:t>cautious</a:t>
+            </a:r>
+            <a:pPr algn="l" indent="0" marL="0">
+              <a:lnSpc>
+                <a:spcPts val="1680"/>
+              </a:lnSpc>
+              <a:spcBef>
+                <a:spcPts val="300"/>
+              </a:spcBef>
+              <a:spcAft>
+                <a:spcPts val="300"/>
+              </a:spcAft>
+              <a:buNone/>
+            </a:pPr>
+            <a:r>
+              <a:rPr lang="en-US" sz="1200" dirty="0">
+                <a:solidFill>
+                  <a:srgbClr val="1C2833"/>
+                </a:solidFill>
+                <a:latin typeface="Arial" pitchFamily="34" charset="0"/>
+                <a:ea typeface="Arial" pitchFamily="34" charset="-122"/>
+                <a:cs typeface="Arial" pitchFamily="34" charset="-120"/>
+              </a:rPr>
+              <a:t> about new plants.</a:t>
+            </a:r>
+            <a:endParaRPr lang="en-US" sz="1200" dirty="0"/>
           </a:p>
         </p:txBody>
       </p:sp>
       <p:sp>
         <p:nvSpPr>
           <p:cNvPr id="9" name="Text 7"/>
-          <p:cNvSpPr/>
-          <p:nvPr/>
-        </p:nvSpPr>
-        <p:spPr>
-          <a:xfrm>
-            <a:off x="692051" y="2574280"/>
-            <a:ext cx="7973389" cy="461963"/>
-          </a:xfrm>
-          <a:prstGeom prst="rect">
-            <a:avLst/>
-          </a:prstGeom>
-          <a:noFill/>
-          <a:ln/>
-        </p:spPr>
-        <p:txBody>
-          <a:bodyPr wrap="square" lIns="0" tIns="0" rIns="0" bIns="0" rtlCol="0" anchor="t"/>
-          <a:lstStyle/>
-          <a:p>
-            <a:pPr algn="l" indent="0" marL="0">
-              <a:lnSpc>
-                <a:spcPts val="1820"/>
-              </a:lnSpc>
-              <a:spcBef>
-                <a:spcPts val="300"/>
-              </a:spcBef>
-              <a:spcAft>
-                <a:spcPts val="300"/>
-              </a:spcAft>
-              <a:buNone/>
-            </a:pPr>
-            <a:r>
-              <a:rPr lang="en-US" sz="1300" b="1" i="1" dirty="0">
-                <a:solidFill>
-                  <a:srgbClr val="1C2833"/>
-                </a:solidFill>
-                <a:latin typeface="Georgia" pitchFamily="34" charset="0"/>
-                <a:ea typeface="Georgia" pitchFamily="34" charset="-122"/>
-                <a:cs typeface="Georgia" pitchFamily="34" charset="-120"/>
-              </a:rPr>
-              <a:t>Taste class in Ayurveda:</a:t>
-            </a:r>
-            <a:pPr algn="l" indent="0" marL="0">
-              <a:lnSpc>
-                <a:spcPts val="1820"/>
-              </a:lnSpc>
-              <a:spcBef>
-                <a:spcPts val="300"/>
-              </a:spcBef>
-              <a:spcAft>
-                <a:spcPts val="300"/>
-              </a:spcAft>
-              <a:buNone/>
-            </a:pPr>
-            <a:r>
-              <a:rPr lang="en-US" sz="1300" dirty="0">
-                <a:solidFill>
-                  <a:srgbClr val="1C2833"/>
-                </a:solidFill>
-                <a:latin typeface="Georgia" pitchFamily="34" charset="0"/>
-                <a:ea typeface="Georgia" pitchFamily="34" charset="-122"/>
-                <a:cs typeface="Georgia" pitchFamily="34" charset="-120"/>
-              </a:rPr>
-              <a:t> </a:t>
-            </a:r>
-            <a:pPr algn="l" indent="0" marL="0">
-              <a:lnSpc>
-                <a:spcPts val="1820"/>
-              </a:lnSpc>
-              <a:spcBef>
-                <a:spcPts val="300"/>
-              </a:spcBef>
-              <a:spcAft>
-                <a:spcPts val="300"/>
-              </a:spcAft>
-              <a:buNone/>
-            </a:pPr>
-            <a:r>
-              <a:rPr lang="en-US" sz="1300" i="1" dirty="0">
-                <a:solidFill>
-                  <a:srgbClr val="1C2833"/>
-                </a:solidFill>
-                <a:latin typeface="Georgia" pitchFamily="34" charset="0"/>
-                <a:ea typeface="Georgia" pitchFamily="34" charset="-122"/>
-                <a:cs typeface="Georgia" pitchFamily="34" charset="-120"/>
-              </a:rPr>
-              <a:t>tikta</a:t>
-            </a:r>
-            <a:pPr algn="l" indent="0" marL="0">
-              <a:lnSpc>
-                <a:spcPts val="1820"/>
-              </a:lnSpc>
-              <a:spcBef>
-                <a:spcPts val="300"/>
-              </a:spcBef>
-              <a:spcAft>
-                <a:spcPts val="300"/>
-              </a:spcAft>
-              <a:buNone/>
-            </a:pPr>
-            <a:r>
-              <a:rPr lang="en-US" sz="1300" dirty="0">
-                <a:solidFill>
-                  <a:srgbClr val="1C2833"/>
-                </a:solidFill>
-                <a:latin typeface="Georgia" pitchFamily="34" charset="0"/>
-                <a:ea typeface="Georgia" pitchFamily="34" charset="-122"/>
-                <a:cs typeface="Georgia" pitchFamily="34" charset="-120"/>
-              </a:rPr>
-              <a:t> — bitter. Bitter taste is the body's warning signal for many plant toxins.</a:t>
-            </a:r>
-            <a:endParaRPr lang="en-US" sz="1300" dirty="0"/>
-          </a:p>
-        </p:txBody>
-      </p:sp>
-      <p:sp>
-        <p:nvSpPr>
-          <p:cNvPr id="10" name="Text 8"/>
-          <p:cNvSpPr/>
-          <p:nvPr/>
-        </p:nvSpPr>
-        <p:spPr>
-          <a:xfrm>
-            <a:off x="692051" y="3074343"/>
-            <a:ext cx="7973389" cy="692944"/>
-          </a:xfrm>
-          <a:prstGeom prst="rect">
-            <a:avLst/>
-          </a:prstGeom>
-          <a:noFill/>
-          <a:ln/>
-        </p:spPr>
-        <p:txBody>
-          <a:bodyPr wrap="square" lIns="0" tIns="0" rIns="0" bIns="0" rtlCol="0" anchor="t"/>
-          <a:lstStyle/>
-          <a:p>
-            <a:pPr algn="l" indent="0" marL="0">
-              <a:lnSpc>
-                <a:spcPts val="1820"/>
-              </a:lnSpc>
-              <a:spcBef>
-                <a:spcPts val="300"/>
-              </a:spcBef>
-              <a:spcAft>
-                <a:spcPts val="300"/>
-              </a:spcAft>
-              <a:buNone/>
-            </a:pPr>
-            <a:r>
-              <a:rPr lang="en-US" sz="1300" b="1" i="1" dirty="0">
-                <a:solidFill>
-                  <a:srgbClr val="1C2833"/>
-                </a:solidFill>
-                <a:latin typeface="Georgia" pitchFamily="34" charset="0"/>
-                <a:ea typeface="Georgia" pitchFamily="34" charset="-122"/>
-                <a:cs typeface="Georgia" pitchFamily="34" charset="-120"/>
-              </a:rPr>
-              <a:t>Safety:</a:t>
-            </a:r>
-            <a:pPr algn="l" indent="0" marL="0">
-              <a:lnSpc>
-                <a:spcPts val="1820"/>
-              </a:lnSpc>
-              <a:spcBef>
-                <a:spcPts val="300"/>
-              </a:spcBef>
-              <a:spcAft>
-                <a:spcPts val="300"/>
-              </a:spcAft>
-              <a:buNone/>
-            </a:pPr>
-            <a:r>
-              <a:rPr lang="en-US" sz="1300" dirty="0">
-                <a:solidFill>
-                  <a:srgbClr val="1C2833"/>
-                </a:solidFill>
-                <a:latin typeface="Georgia" pitchFamily="34" charset="0"/>
-                <a:ea typeface="Georgia" pitchFamily="34" charset="-122"/>
-                <a:cs typeface="Georgia" pitchFamily="34" charset="-120"/>
-              </a:rPr>
-              <a:t> - External uses (soap, oil for plants, twig as toothbrush) — fine when used as labelled. - </a:t>
-            </a:r>
-            <a:pPr algn="l" indent="0" marL="0">
-              <a:lnSpc>
-                <a:spcPts val="1820"/>
-              </a:lnSpc>
-              <a:spcBef>
-                <a:spcPts val="300"/>
-              </a:spcBef>
-              <a:spcAft>
-                <a:spcPts val="300"/>
-              </a:spcAft>
-              <a:buNone/>
-            </a:pPr>
-            <a:r>
-              <a:rPr lang="en-US" sz="1300" b="1" i="1" dirty="0">
-                <a:solidFill>
-                  <a:srgbClr val="1C2833"/>
-                </a:solidFill>
-                <a:latin typeface="Georgia" pitchFamily="34" charset="0"/>
-                <a:ea typeface="Georgia" pitchFamily="34" charset="-122"/>
-                <a:cs typeface="Georgia" pitchFamily="34" charset="-120"/>
-              </a:rPr>
-              <a:t>Concentrated internal use — especially neem oil — is unsafe.</a:t>
-            </a:r>
-            <a:pPr algn="l" indent="0" marL="0">
-              <a:lnSpc>
-                <a:spcPts val="1820"/>
-              </a:lnSpc>
-              <a:spcBef>
-                <a:spcPts val="300"/>
-              </a:spcBef>
-              <a:spcAft>
-                <a:spcPts val="300"/>
-              </a:spcAft>
-              <a:buNone/>
-            </a:pPr>
-            <a:r>
-              <a:rPr lang="en-US" sz="1300" dirty="0">
-                <a:solidFill>
-                  <a:srgbClr val="1C2833"/>
-                </a:solidFill>
-                <a:latin typeface="Georgia" pitchFamily="34" charset="0"/>
-                <a:ea typeface="Georgia" pitchFamily="34" charset="-122"/>
-                <a:cs typeface="Georgia" pitchFamily="34" charset="-120"/>
-              </a:rPr>
-              <a:t> Documented cases of liver toxicity in children. - We do not chew, drink, or eat neem in this class.</a:t>
-            </a:r>
-            <a:endParaRPr lang="en-US" sz="1300" dirty="0"/>
-          </a:p>
-        </p:txBody>
-      </p:sp>
-      <p:sp>
-        <p:nvSpPr>
-          <p:cNvPr id="11" name="Text 9"/>
           <p:cNvSpPr/>
           <p:nvPr/>
         </p:nvSpPr>
@@ -6423,7 +9048,7 @@
                 <a:ea typeface="Georgia" pitchFamily="34" charset="-122"/>
                 <a:cs typeface="Georgia" pitchFamily="34" charset="-120"/>
               </a:rPr>
-              <a:t>Homework</a:t>
+              <a:t>Core (20 min) (cont.)</a:t>
             </a:r>
             <a:endParaRPr lang="en-US" sz="1800" dirty="0"/>
           </a:p>
@@ -6437,8 +9062,8 @@
         </p:nvSpPr>
         <p:spPr>
           <a:xfrm>
-            <a:off x="406301" y="870942"/>
-            <a:ext cx="8498026" cy="426541"/>
+            <a:off x="634901" y="883593"/>
+            <a:ext cx="8102798" cy="281880"/>
           </a:xfrm>
           <a:prstGeom prst="rect">
             <a:avLst/>
@@ -6450,13 +9075,31 @@
           <a:bodyPr wrap="square" lIns="0" tIns="0" rIns="0" bIns="0" rtlCol="0" anchor="t"/>
           <a:lstStyle/>
           <a:p>
-            <a:pPr algn="l" indent="0" marL="0">
-              <a:lnSpc>
-                <a:spcPts val="1680"/>
-              </a:lnSpc>
-              <a:spcBef>
-                <a:spcPts val="300"/>
-              </a:spcBef>
+            <a:pPr algn="l" marL="342900" indent="-342900">
+              <a:lnSpc>
+                <a:spcPts val="1620"/>
+              </a:lnSpc>
+              <a:spcAft>
+                <a:spcPts val="300"/>
+              </a:spcAft>
+              <a:buSzPct val="100000"/>
+              <a:buChar char="•"/>
+            </a:pPr>
+            <a:r>
+              <a:rPr lang="en-US" sz="1200" b="1" dirty="0">
+                <a:solidFill>
+                  <a:srgbClr val="1C2833"/>
+                </a:solidFill>
+                <a:latin typeface="Arial" pitchFamily="34" charset="0"/>
+                <a:ea typeface="Arial" pitchFamily="34" charset="-122"/>
+                <a:cs typeface="Arial" pitchFamily="34" charset="-120"/>
+              </a:rPr>
+              <a:t>What azadirachtin does.</a:t>
+            </a:r>
+            <a:pPr algn="l" indent="0" marL="0">
+              <a:lnSpc>
+                <a:spcPts val="1620"/>
+              </a:lnSpc>
               <a:spcAft>
                 <a:spcPts val="300"/>
               </a:spcAft>
@@ -6471,7 +9114,7 @@
                 <a:ea typeface="Arial" pitchFamily="34" charset="-122"/>
                 <a:cs typeface="Arial" pitchFamily="34" charset="-120"/>
               </a:rPr>
-              <a:t>– Find a neem tree near your home or school. Sketch a leaf in your workbook from life. Note where the tree is and how many you saw on your walk.</a:t>
+              <a:t> This is real:</a:t>
             </a:r>
             <a:endParaRPr lang="en-US" sz="1200" dirty="0"/>
           </a:p>
@@ -6480,6 +9123,200 @@
       <p:sp>
         <p:nvSpPr>
           <p:cNvPr id="5" name="Text 3"/>
+          <p:cNvSpPr/>
+          <p:nvPr/>
+        </p:nvSpPr>
+        <p:spPr>
+          <a:xfrm>
+            <a:off x="634901" y="1266974"/>
+            <a:ext cx="8102798" cy="1180802"/>
+          </a:xfrm>
+          <a:prstGeom prst="rect">
+            <a:avLst/>
+          </a:prstGeom>
+          <a:noFill/>
+          <a:ln/>
+        </p:spPr>
+        <p:txBody>
+          <a:bodyPr wrap="square" lIns="0" tIns="0" rIns="0" bIns="0" rtlCol="0" anchor="t"/>
+          <a:lstStyle/>
+          <a:p>
+            <a:pPr algn="l" marL="342900" indent="-342900">
+              <a:lnSpc>
+                <a:spcPts val="1620"/>
+              </a:lnSpc>
+              <a:spcAft>
+                <a:spcPts val="300"/>
+              </a:spcAft>
+              <a:buSzPct val="100000"/>
+              <a:buChar char="•"/>
+            </a:pPr>
+            <a:r>
+              <a:rPr lang="en-US" sz="1200" b="1" dirty="0">
+                <a:solidFill>
+                  <a:srgbClr val="1C2833"/>
+                </a:solidFill>
+                <a:latin typeface="Arial" pitchFamily="34" charset="0"/>
+                <a:ea typeface="Arial" pitchFamily="34" charset="-122"/>
+                <a:cs typeface="Arial" pitchFamily="34" charset="-120"/>
+              </a:rPr>
+              <a:t>Insecticidal/insect repellent:</a:t>
+            </a:r>
+            <a:pPr algn="l" indent="0" marL="0">
+              <a:lnSpc>
+                <a:spcPts val="1620"/>
+              </a:lnSpc>
+              <a:spcAft>
+                <a:spcPts val="300"/>
+              </a:spcAft>
+              <a:buNone/>
+            </a:pPr>
+            <a:r>
+              <a:rPr lang="en-US" sz="1200" dirty="0">
+                <a:solidFill>
+                  <a:srgbClr val="1C2833"/>
+                </a:solidFill>
+                <a:latin typeface="Arial" pitchFamily="34" charset="0"/>
+                <a:ea typeface="Arial" pitchFamily="34" charset="-122"/>
+                <a:cs typeface="Arial" pitchFamily="34" charset="-120"/>
+              </a:rPr>
+              <a:t> azadirachtin disrupts insect moulting hormones. Hence neem oil is widely sold as an agricultural insect repellent — and that use is well-supported.</a:t>
+            </a:r>
+            <a:endParaRPr lang="en-US" sz="1200" dirty="0"/>
+          </a:p>
+          <a:p>
+            <a:pPr algn="l" marL="342900" indent="-342900">
+              <a:lnSpc>
+                <a:spcPts val="1620"/>
+              </a:lnSpc>
+              <a:spcAft>
+                <a:spcPts val="300"/>
+              </a:spcAft>
+              <a:buSzPct val="100000"/>
+              <a:buChar char="•"/>
+            </a:pPr>
+            <a:r>
+              <a:rPr lang="en-US" sz="1200" b="1" dirty="0">
+                <a:solidFill>
+                  <a:srgbClr val="1C2833"/>
+                </a:solidFill>
+                <a:latin typeface="Arial" pitchFamily="34" charset="0"/>
+                <a:ea typeface="Arial" pitchFamily="34" charset="-122"/>
+                <a:cs typeface="Arial" pitchFamily="34" charset="-120"/>
+              </a:rPr>
+              <a:t>Antimicrobial effects</a:t>
+            </a:r>
+            <a:pPr algn="l" indent="0" marL="0">
+              <a:lnSpc>
+                <a:spcPts val="1620"/>
+              </a:lnSpc>
+              <a:spcAft>
+                <a:spcPts val="300"/>
+              </a:spcAft>
+              <a:buNone/>
+            </a:pPr>
+            <a:r>
+              <a:rPr lang="en-US" sz="1200" dirty="0">
+                <a:solidFill>
+                  <a:srgbClr val="1C2833"/>
+                </a:solidFill>
+                <a:latin typeface="Arial" pitchFamily="34" charset="0"/>
+                <a:ea typeface="Arial" pitchFamily="34" charset="-122"/>
+                <a:cs typeface="Arial" pitchFamily="34" charset="-120"/>
+              </a:rPr>
+              <a:t> at lab/petri-dish level.</a:t>
+            </a:r>
+            <a:endParaRPr lang="en-US" sz="1200" dirty="0"/>
+          </a:p>
+          <a:p>
+            <a:pPr algn="l" marL="342900" indent="-342900">
+              <a:lnSpc>
+                <a:spcPts val="1620"/>
+              </a:lnSpc>
+              <a:spcAft>
+                <a:spcPts val="300"/>
+              </a:spcAft>
+              <a:buSzPct val="100000"/>
+              <a:buChar char="•"/>
+            </a:pPr>
+            <a:r>
+              <a:rPr lang="en-US" sz="1200" b="1" dirty="0">
+                <a:solidFill>
+                  <a:srgbClr val="1C2833"/>
+                </a:solidFill>
+                <a:latin typeface="Arial" pitchFamily="34" charset="0"/>
+                <a:ea typeface="Arial" pitchFamily="34" charset="-122"/>
+                <a:cs typeface="Arial" pitchFamily="34" charset="-120"/>
+              </a:rPr>
+              <a:t>Traditional uses:</a:t>
+            </a:r>
+            <a:pPr algn="l" indent="0" marL="0">
+              <a:lnSpc>
+                <a:spcPts val="1620"/>
+              </a:lnSpc>
+              <a:spcAft>
+                <a:spcPts val="300"/>
+              </a:spcAft>
+              <a:buNone/>
+            </a:pPr>
+            <a:r>
+              <a:rPr lang="en-US" sz="1200" dirty="0">
+                <a:solidFill>
+                  <a:srgbClr val="1C2833"/>
+                </a:solidFill>
+                <a:latin typeface="Arial" pitchFamily="34" charset="0"/>
+                <a:ea typeface="Arial" pitchFamily="34" charset="-122"/>
+                <a:cs typeface="Arial" pitchFamily="34" charset="-120"/>
+              </a:rPr>
+              <a:t> twigs as natural toothbrushes (</a:t>
+            </a:r>
+            <a:pPr algn="l" indent="0" marL="0">
+              <a:lnSpc>
+                <a:spcPts val="1620"/>
+              </a:lnSpc>
+              <a:spcAft>
+                <a:spcPts val="300"/>
+              </a:spcAft>
+              <a:buNone/>
+            </a:pPr>
+            <a:r>
+              <a:rPr lang="en-US" sz="1200" i="1" dirty="0">
+                <a:solidFill>
+                  <a:srgbClr val="1C2833"/>
+                </a:solidFill>
+                <a:latin typeface="Arial" pitchFamily="34" charset="0"/>
+                <a:ea typeface="Arial" pitchFamily="34" charset="-122"/>
+                <a:cs typeface="Arial" pitchFamily="34" charset="-120"/>
+              </a:rPr>
+              <a:t>dātun</a:t>
+            </a:r>
+            <a:pPr algn="l" indent="0" marL="0">
+              <a:lnSpc>
+                <a:spcPts val="1620"/>
+              </a:lnSpc>
+              <a:spcAft>
+                <a:spcPts val="300"/>
+              </a:spcAft>
+              <a:buNone/>
+            </a:pPr>
+            <a:r>
+              <a:rPr lang="en-US" sz="1200" dirty="0">
+                <a:solidFill>
+                  <a:srgbClr val="1C2833"/>
+                </a:solidFill>
+                <a:latin typeface="Arial" pitchFamily="34" charset="0"/>
+                <a:ea typeface="Arial" pitchFamily="34" charset="-122"/>
+                <a:cs typeface="Arial" pitchFamily="34" charset="-120"/>
+              </a:rPr>
+              <a:t>), neem-leaf paste on skin in some folk traditions, neem-based soaps and shampoos. These external/dilute uses are different from internal use.</a:t>
+            </a:r>
+            <a:endParaRPr lang="en-US" sz="1200" dirty="0"/>
+          </a:p>
+        </p:txBody>
+      </p:sp>
+      <p:sp>
+        <p:nvSpPr>
+          <p:cNvPr id="6" name="Text 4"/>
           <p:cNvSpPr/>
           <p:nvPr/>
         </p:nvSpPr>
